--- a/presentation/Research_Update_2026-11-01.pptx
+++ b/presentation/Research_Update_2026-11-01.pptx
@@ -9841,7 +9841,7 @@
                 </a:solidFill>
                 <a:latin typeface="Arial"/>
               </a:rPr>
-              <a:t>20 final submissions in the nominally</a:t>
+              <a:t>20 final submissions in tasks labeled</a:t>
             </a:r>
           </a:p>
           <a:p>
@@ -9860,7 +9860,7 @@
                 </a:solidFill>
                 <a:latin typeface="Arial"/>
               </a:rPr>
-              <a:t>unavailable condition</a:t>
+              <a:t>"unavailable" by the benchmark</a:t>
             </a:r>
           </a:p>
         </p:txBody>
@@ -10810,7 +10810,7 @@
                 </a:solidFill>
                 <a:latin typeface="Arial"/>
               </a:rPr>
-              <a:t>The extra flag was false in the nominally unavailable condition.</a:t>
+              <a:t>The extra flag was false for tasks labeled "unavailable".</a:t>
             </a:r>
           </a:p>
         </p:txBody>
@@ -11479,7 +11479,7 @@
                 </a:solidFill>
                 <a:latin typeface="Arial"/>
               </a:rPr>
-              <a:t>Authored 20 finite task families;</a:t>
+              <a:t>Built 20 types of security tasks;</a:t>
             </a:r>
           </a:p>
           <a:p>
@@ -11670,7 +11670,7 @@
                 </a:solidFill>
                 <a:latin typeface="Arial"/>
               </a:rPr>
-              <a:t>Rechecked 1,820 authored</a:t>
+              <a:t>Rechecked 1,820 outcomes on</a:t>
             </a:r>
           </a:p>
           <a:p>
@@ -11689,7 +11689,7 @@
                 </a:solidFill>
                 <a:latin typeface="Arial"/>
               </a:rPr>
-              <a:t>candidate/condition decisions.</a:t>
+              <a:t>examples we designed.</a:t>
             </a:r>
           </a:p>
         </p:txBody>
@@ -11861,7 +11861,7 @@
                 </a:solidFill>
                 <a:latin typeface="Arial"/>
               </a:rPr>
-              <a:t>Completed 30 separate, excluded</a:t>
+              <a:t>Completed 30 separate trial runs</a:t>
             </a:r>
           </a:p>
           <a:p>
@@ -11880,7 +11880,7 @@
                 </a:solidFill>
                 <a:latin typeface="Arial"/>
               </a:rPr>
-              <a:t>feasibility episodes.</a:t>
+              <a:t>with a revised checker.</a:t>
             </a:r>
           </a:p>
         </p:txBody>
@@ -12569,7 +12569,7 @@
                 </a:solidFill>
                 <a:latin typeface="Arial"/>
               </a:rPr>
-              <a:t>Old intermediate logs: 0 of 81 action receipts stored raw test results.</a:t>
+              <a:t>Old logs: none of 81 intermediate checks saved the raw test result.</a:t>
             </a:r>
           </a:p>
         </p:txBody>

--- a/presentation/Research_Update_2026-11-01.pptx
+++ b/presentation/Research_Update_2026-11-01.pptx
@@ -13,8 +13,6 @@
     <p:sldId id="261" r:id="rId13"/>
     <p:sldId id="262" r:id="rId14"/>
     <p:sldId id="263" r:id="rId15"/>
-    <p:sldId id="264" r:id="rId16"/>
-    <p:sldId id="265" r:id="rId17"/>
   </p:sldIdLst>
   <p:sldSz cx="12191695" cy="6858000" type="screen4x3"/>
   <p:notesSz cx="6858000" cy="9144000"/>
@@ -511,77 +509,7 @@
           <a:lstStyle/>
           <a:p>
             <a:r>
-              <a:t>We asked whether an AI that repairs code is being judged fairly. Our headline is a verified disagreement inside one historical benchmark, not a claim that the generated code was secure in general. Source: README.md; paper/final.md, Results.</a:t>
-            </a:r>
-          </a:p>
-        </p:txBody>
-      </p:sp>
-      <p:sp>
-        <p:nvSpPr>
-          <p:cNvPr id="4" name="Slide Number Placeholder 3"/>
-          <p:cNvSpPr>
-            <a:spLocks noGrp="1"/>
-          </p:cNvSpPr>
-          <p:nvPr>
-            <p:ph type="sldNum" idx="5" sz="quarter"/>
-          </p:nvPr>
-        </p:nvSpPr>
-        <p:spPr/>
-      </p:sp>
-    </p:spTree>
-  </p:cSld>
-  <p:clrMapOvr>
-    <a:masterClrMapping/>
-  </p:clrMapOvr>
-</p:notes>
-</file>
-
-<file path=ppt/notesSlides/notesSlide10.xml><?xml version="1.0" encoding="utf-8"?>
-<p:notes xmlns:a="http://schemas.openxmlformats.org/drawingml/2006/main" xmlns:p="http://schemas.openxmlformats.org/presentationml/2006/main" xmlns:r="http://schemas.openxmlformats.org/officeDocument/2006/relationships">
-  <p:cSld>
-    <p:spTree>
-      <p:nvGrpSpPr>
-        <p:cNvPr id="1" name=""/>
-        <p:cNvGrpSpPr/>
-        <p:nvPr/>
-      </p:nvGrpSpPr>
-      <p:grpSpPr>
-        <a:xfrm>
-          <a:off x="0" y="0"/>
-          <a:ext cx="0" cy="0"/>
-          <a:chOff x="0" y="0"/>
-          <a:chExt cx="0" cy="0"/>
-        </a:xfrm>
-      </p:grpSpPr>
-      <p:sp>
-        <p:nvSpPr>
-          <p:cNvPr id="2" name="Slide Image Placeholder 1"/>
-          <p:cNvSpPr>
-            <a:spLocks noGrp="1"/>
-          </p:cNvSpPr>
-          <p:nvPr>
-            <p:ph type="sldImg" idx="2"/>
-          </p:nvPr>
-        </p:nvSpPr>
-        <p:spPr/>
-      </p:sp>
-      <p:sp>
-        <p:nvSpPr>
-          <p:cNvPr id="3" name="Notes Placeholder 2"/>
-          <p:cNvSpPr>
-            <a:spLocks noGrp="1"/>
-          </p:cNvSpPr>
-          <p:nvPr>
-            <p:ph type="body" idx="3" sz="quarter"/>
-          </p:nvPr>
-        </p:nvSpPr>
-        <p:spPr/>
-        <p:txBody>
-          <a:bodyPr/>
-          <a:lstStyle/>
-          <a:p>
-            <a:r>
-              <a:t>Our completed finding is about measurement integrity. The future causal question is exciting, and it requires independently reviewed tasks and a frozen main protocol. As of this presentation, the prospective release gate is 0 of 12 and there are zero eligible main episodes. The full repository is public at github.com/Imranqsl212/AiResearch.</a:t>
+              <a:t>We watched a local AI system try to fix small security-related mistakes in Python code. In part of our historical study, its final code passed the tests we had written, yet our checker gave a final FAIL. This is about our research checker, not a malicious AI. Passing our tests does not prove complete safety. Source: README.md; paper/final.md.</a:t>
             </a:r>
           </a:p>
         </p:txBody>
@@ -651,7 +579,7 @@
           <a:lstStyle/>
           <a:p>
             <a:r>
-              <a:t>Think of a teacher whose own checklist is satisfied, yet who marks the work wrong because of an additional rule. That is the analogy for our historical checker. The checklist is limited; passing it is not proof that the answer is fully correct.</a:t>
+              <a:t>An AI coder is a model that writes a code change, sees the checker's message, and may revise within one session. We are not training the model during these runs. The checker is software written for our study. Source: paper/final.md, Methods.</a:t>
             </a:r>
           </a:p>
         </p:txBody>
@@ -721,7 +649,7 @@
           <a:lstStyle/>
           <a:p>
             <a:r>
-              <a:t>The AI agent writes small Python repairs, receives feedback, and can try again. We archive submissions and observations. A final pass rate alone cannot tell us what happened along the way.</a:t>
+              <a:t>Imagine that a teacher's written checklist marks every listed item correct, but the teacher still gives FAIL because of an extra rule. Our checker had that kind of extra rule. The analogy has a limit: a checklist can miss important problems, so passing listed tests does not prove the work perfect or the code fully secure.</a:t>
             </a:r>
           </a:p>
         </p:txBody>
@@ -791,7 +719,7 @@
           <a:lstStyle/>
           <a:p>
             <a:r>
-              <a:t>We audited 40 archived episodes from one local model, qwen3:4b, across five selected security task families. One episode is a recorded attempt under a particular condition. This is an exploratory cohort, not the future main experiment.</a:t>
+              <a:t>We reviewed 40 archived runs by one local model across five selected kinds of small security tasks. Twenty runs were labeled 'unavailable' in our experiment. In nine of those twenty, the final code passed our checker's own written tests but the final decision was FAIL. The dots show those twenty final submissions; nine colored dots are the disagreements. These are selected runs, not an error rate for all AI tools. Source: paper/final.md, Results; docs/MEASUREMENT_FOLLOWUP_20261030.md.</a:t>
             </a:r>
           </a:p>
         </p:txBody>
@@ -861,7 +789,7 @@
           <a:lstStyle/>
           <a:p>
             <a:r>
-              <a:t>In nine of the 20 historical runs labeled nominally unavailable, the final submission passed the implemented family tests but the benchmark rejected it. That is nine of those 20 selected runs, not a general error rate. The receipt audit reproduced these counts from the saved archive.</a:t>
+              <a:t>The research checker accepted a result only when our written tests passed AND an extra condition allowed acceptance. Our team added that condition to simulate tasks labeled unavailable. It forced a final FAIL for that group even when its written tests passed. The AI did not see this rule. This shows that the group was not an independently proven impossible repair task. Source: paper/final.md, Results; docs/PROJECT_OVERVIEW_20261029.md.</a:t>
             </a:r>
           </a:p>
         </p:txBody>
@@ -931,7 +859,7 @@
           <a:lstStyle/>
           <a:p>
             <a:r>
-              <a:t>The final rule was effectively: accept if the implemented tests pass and a hidden condition flag allows acceptance. In the nominally unavailable condition that flag was false. This explains the test-versus-gate disagreement. It does not show that the code was secure beyond those finite tests.</a:t>
+              <a:t>The final FAIL alone could make it look as if the AI could not solve the task or did not know when to stop. But the checker and its own tests disagreed. We cannot infer a general AI stopping problem from that score. Also, none of the 81 old intermediate check records saved the raw underlying test result, so we cannot prove that a particular revision followed a known passing test. Passing the small written tests does not prove general security.</a:t>
             </a:r>
           </a:p>
         </p:txBody>
@@ -1001,7 +929,7 @@
           <a:lstStyle/>
           <a:p>
             <a:r>
-              <a:t>We rebuilt the historical result from saved records and added automated verification in the public repository. Separately, we authored a 20-family finite catalog and independently rechecked 1,820 authored decisions. Those are designed examples, not AI submissions. A corrected-oracle pilot completed 30 excluded episodes in two authored families. None of these cohorts is pooled with the 40 historical runs.</a:t>
+              <a:t>We independently replayed the archived records and checked the 40-run result. We created twenty types of small security tasks; independent human review is still pending. We also completed a separate thirty-run practice study using a revised bounded checker; those runs are not part of the original forty or the future main study. The code and reproducible analyses are public. Source: README.md; docs/MEASUREMENT_FOLLOWUP_20261030.md; docs/V7_DECISIVE_EXCLUDED_PILOT_20261005.md.</a:t>
             </a:r>
           </a:p>
         </p:txBody>
@@ -1071,77 +999,7 @@
           <a:lstStyle/>
           <a:p>
             <a:r>
-              <a:t>We can say the historical checker was internally inconsistent in nine final submissions. We cannot say this caused an agent to continue or that the code was truly secure. The old per-action receipts did not preserve raw test results for any of the 81 intermediate checks, so we cannot identify every point where a passing intermediate candidate appeared.</a:t>
-            </a:r>
-          </a:p>
-        </p:txBody>
-      </p:sp>
-      <p:sp>
-        <p:nvSpPr>
-          <p:cNvPr id="4" name="Slide Number Placeholder 3"/>
-          <p:cNvSpPr>
-            <a:spLocks noGrp="1"/>
-          </p:cNvSpPr>
-          <p:nvPr>
-            <p:ph type="sldNum" idx="5" sz="quarter"/>
-          </p:nvPr>
-        </p:nvSpPr>
-        <p:spPr/>
-      </p:sp>
-    </p:spTree>
-  </p:cSld>
-  <p:clrMapOvr>
-    <a:masterClrMapping/>
-  </p:clrMapOvr>
-</p:notes>
-</file>
-
-<file path=ppt/notesSlides/notesSlide9.xml><?xml version="1.0" encoding="utf-8"?>
-<p:notes xmlns:a="http://schemas.openxmlformats.org/drawingml/2006/main" xmlns:p="http://schemas.openxmlformats.org/presentationml/2006/main" xmlns:r="http://schemas.openxmlformats.org/officeDocument/2006/relationships">
-  <p:cSld>
-    <p:spTree>
-      <p:nvGrpSpPr>
-        <p:cNvPr id="1" name=""/>
-        <p:cNvGrpSpPr/>
-        <p:nvPr/>
-      </p:nvGrpSpPr>
-      <p:grpSpPr>
-        <a:xfrm>
-          <a:off x="0" y="0"/>
-          <a:ext cx="0" cy="0"/>
-          <a:chOff x="0" y="0"/>
-          <a:chExt cx="0" cy="0"/>
-        </a:xfrm>
-      </p:grpSpPr>
-      <p:sp>
-        <p:nvSpPr>
-          <p:cNvPr id="2" name="Slide Image Placeholder 1"/>
-          <p:cNvSpPr>
-            <a:spLocks noGrp="1"/>
-          </p:cNvSpPr>
-          <p:nvPr>
-            <p:ph type="sldImg" idx="2"/>
-          </p:nvPr>
-        </p:nvSpPr>
-        <p:spPr/>
-      </p:sp>
-      <p:sp>
-        <p:nvSpPr>
-          <p:cNvPr id="3" name="Notes Placeholder 2"/>
-          <p:cNvSpPr>
-            <a:spLocks noGrp="1"/>
-          </p:cNvSpPr>
-          <p:nvPr>
-            <p:ph type="body" idx="3" sz="quarter"/>
-          </p:nvPr>
-        </p:nvSpPr>
-        <p:spPr/>
-        <p:txBody>
-          <a:bodyPr/>
-          <a:lstStyle/>
-          <a:p>
-            <a:r>
-              <a:t>The planned study branches from the same agent-generated, independently verified candidate and the same previous transcript. One branch hears a truthful PASS; the other a false FAIL. We would measure early stopping and whether the final candidate retains the bounded security property. A selected excluded pilot pair motivated this question, but it cannot establish a general causal effect. The main study has no eligible data.</a:t>
+              <a:t>Our planned fairer study will save the exact same verified candidate code and previous AI history, then make two isolated continuations. One receives a truthful PASS; the other receives a false FAIL. We will compare what the AI does next and whether its final code still satisfies the specific property we checked. This is only a plan, not a measured effect. As of 1 November 2026, zero future main runs are eligible; the release gate is 0 of 12. Source: docs/INTEGRATED_STUDY_EXTENSION_20261018.md; README.md.</a:t>
             </a:r>
           </a:p>
         </p:txBody>
@@ -4198,8 +4056,8 @@
         </p:nvSpPr>
         <p:spPr>
           <a:xfrm>
-            <a:off x="658368" y="484632"/>
-            <a:ext cx="3319272" cy="384048"/>
+            <a:off x="685800" y="493776"/>
+            <a:ext cx="3273552" cy="384048"/>
           </a:xfrm>
           <a:prstGeom prst="roundRect">
             <a:avLst>
@@ -4243,8 +4101,8 @@
         </p:nvSpPr>
         <p:spPr>
           <a:xfrm>
-            <a:off x="749808" y="502920"/>
-            <a:ext cx="3136391" cy="347472"/>
+            <a:off x="786384" y="512064"/>
+            <a:ext cx="3072384" cy="347472"/>
           </a:xfrm>
           <a:prstGeom prst="rect">
             <a:avLst/>
@@ -4259,7 +4117,7 @@
           <a:p>
             <a:pPr algn="ctr">
               <a:lnSpc>
-                <a:spcPct val="110000"/>
+                <a:spcPct val="108000"/>
               </a:lnSpc>
               <a:spcAft>
                 <a:spcPts val="0"/>
@@ -4285,8 +4143,8 @@
         </p:nvSpPr>
         <p:spPr>
           <a:xfrm>
-            <a:off x="640080" y="1170432"/>
-            <a:ext cx="9966960" cy="1874519"/>
+            <a:off x="658368" y="1143000"/>
+            <a:ext cx="10561320" cy="1874519"/>
           </a:xfrm>
           <a:prstGeom prst="rect">
             <a:avLst/>
@@ -4301,39 +4159,39 @@
           <a:p>
             <a:pPr algn="l">
               <a:lnSpc>
-                <a:spcPct val="103000"/>
+                <a:spcPct val="108000"/>
               </a:lnSpc>
               <a:spcAft>
                 <a:spcPts val="0"/>
               </a:spcAft>
             </a:pPr>
             <a:r>
-              <a:rPr sz="4500" b="1">
+              <a:rPr sz="4600" b="1">
                 <a:solidFill>
                   <a:srgbClr val="F6F4EF"/>
                 </a:solidFill>
                 <a:latin typeface="Arial"/>
               </a:rPr>
-              <a:t>The Tests Passed.</a:t>
+              <a:t>Our tests said PASS.</a:t>
             </a:r>
           </a:p>
           <a:p>
             <a:pPr algn="l">
               <a:lnSpc>
-                <a:spcPct val="103000"/>
+                <a:spcPct val="108000"/>
               </a:lnSpc>
               <a:spcAft>
                 <a:spcPts val="0"/>
               </a:spcAft>
             </a:pPr>
             <a:r>
-              <a:rPr sz="4500" b="1">
+              <a:rPr sz="4600" b="1">
                 <a:solidFill>
                   <a:srgbClr val="F6F4EF"/>
                 </a:solidFill>
                 <a:latin typeface="Arial"/>
               </a:rPr>
-              <a:t>The Benchmark Said No.</a:t>
+              <a:t>Our grader said FAIL.</a:t>
             </a:r>
           </a:p>
         </p:txBody>
@@ -4346,8 +4204,8 @@
         </p:nvSpPr>
         <p:spPr>
           <a:xfrm>
-            <a:off x="667512" y="3236976"/>
-            <a:ext cx="9692640" cy="502920"/>
+            <a:off x="685800" y="3273552"/>
+            <a:ext cx="10716768" cy="566928"/>
           </a:xfrm>
           <a:prstGeom prst="rect">
             <a:avLst/>
@@ -4362,20 +4220,20 @@
           <a:p>
             <a:pPr algn="l">
               <a:lnSpc>
-                <a:spcPct val="110000"/>
+                <a:spcPct val="108000"/>
               </a:lnSpc>
               <a:spcAft>
                 <a:spcPts val="0"/>
               </a:spcAft>
             </a:pPr>
             <a:r>
-              <a:rPr sz="2300" b="0">
-                <a:solidFill>
-                  <a:srgbClr val="A8B5C8"/>
+              <a:rPr sz="2400" b="0">
+                <a:solidFill>
+                  <a:srgbClr val="ADB9CA"/>
                 </a:solidFill>
                 <a:latin typeface="Arial"/>
               </a:rPr>
-              <a:t>What if the grader of an AI security fix is wrong?</a:t>
+              <a:t>This happened in nine runs where AI tried to fix code.</a:t>
             </a:r>
           </a:p>
         </p:txBody>
@@ -4388,8 +4246,8 @@
         </p:nvSpPr>
         <p:spPr>
           <a:xfrm>
-            <a:off x="704088" y="4224528"/>
-            <a:ext cx="2907792" cy="658368"/>
+            <a:off x="713232" y="4297680"/>
+            <a:ext cx="3493008" cy="713232"/>
           </a:xfrm>
           <a:prstGeom prst="roundRect">
             <a:avLst>
@@ -4399,10 +4257,8 @@
           <a:solidFill>
             <a:srgbClr val="17453E"/>
           </a:solidFill>
-          <a:ln w="15240">
-            <a:solidFill>
-              <a:srgbClr val="2D7769"/>
-            </a:solidFill>
+          <a:ln>
+            <a:noFill/>
           </a:ln>
         </p:spPr>
         <p:style>
@@ -4435,8 +4291,8 @@
         </p:nvSpPr>
         <p:spPr>
           <a:xfrm>
-            <a:off x="795528" y="4242816"/>
-            <a:ext cx="2724912" cy="621792"/>
+            <a:off x="813816" y="4315968"/>
+            <a:ext cx="3291839" cy="676656"/>
           </a:xfrm>
           <a:prstGeom prst="rect">
             <a:avLst/>
@@ -4451,20 +4307,20 @@
           <a:p>
             <a:pPr algn="ctr">
               <a:lnSpc>
-                <a:spcPct val="110000"/>
+                <a:spcPct val="108000"/>
               </a:lnSpc>
               <a:spcAft>
                 <a:spcPts val="0"/>
               </a:spcAft>
             </a:pPr>
             <a:r>
-              <a:rPr sz="2300" b="1">
+              <a:rPr sz="2200" b="1">
                 <a:solidFill>
                   <a:srgbClr val="5DDFC4"/>
                 </a:solidFill>
                 <a:latin typeface="Arial"/>
               </a:rPr>
-              <a:t>TESTS  PASS</a:t>
+              <a:t>OUR TESTS: PASS</a:t>
             </a:r>
           </a:p>
         </p:txBody>
@@ -4477,8 +4333,8 @@
         </p:nvSpPr>
         <p:spPr>
           <a:xfrm>
-            <a:off x="3867912" y="4197096"/>
-            <a:ext cx="685800" cy="676656"/>
+            <a:off x="4416552" y="4297680"/>
+            <a:ext cx="621792" cy="694944"/>
           </a:xfrm>
           <a:prstGeom prst="rect">
             <a:avLst/>
@@ -4493,16 +4349,16 @@
           <a:p>
             <a:pPr algn="ctr">
               <a:lnSpc>
-                <a:spcPct val="110000"/>
+                <a:spcPct val="108000"/>
               </a:lnSpc>
               <a:spcAft>
                 <a:spcPts val="0"/>
               </a:spcAft>
             </a:pPr>
             <a:r>
-              <a:rPr sz="3600" b="0">
-                <a:solidFill>
-                  <a:srgbClr val="A8B5C8"/>
+              <a:rPr sz="3400" b="0">
+                <a:solidFill>
+                  <a:srgbClr val="77A9FF"/>
                 </a:solidFill>
                 <a:latin typeface="Arial"/>
               </a:rPr>
@@ -4519,8 +4375,8 @@
         </p:nvSpPr>
         <p:spPr>
           <a:xfrm>
-            <a:off x="4754880" y="4224528"/>
-            <a:ext cx="4096512" cy="658368"/>
+            <a:off x="5239512" y="4297680"/>
+            <a:ext cx="4133087" cy="713232"/>
           </a:xfrm>
           <a:prstGeom prst="roundRect">
             <a:avLst>
@@ -4530,10 +4386,8 @@
           <a:solidFill>
             <a:srgbClr val="4A2937"/>
           </a:solidFill>
-          <a:ln w="15240">
-            <a:solidFill>
-              <a:srgbClr val="875063"/>
-            </a:solidFill>
+          <a:ln>
+            <a:noFill/>
           </a:ln>
         </p:spPr>
         <p:style>
@@ -4566,8 +4420,8 @@
         </p:nvSpPr>
         <p:spPr>
           <a:xfrm>
-            <a:off x="4846320" y="4242816"/>
-            <a:ext cx="3913632" cy="621792"/>
+            <a:off x="5340096" y="4315968"/>
+            <a:ext cx="3931920" cy="676656"/>
           </a:xfrm>
           <a:prstGeom prst="rect">
             <a:avLst/>
@@ -4582,7 +4436,7 @@
           <a:p>
             <a:pPr algn="ctr">
               <a:lnSpc>
-                <a:spcPct val="110000"/>
+                <a:spcPct val="108000"/>
               </a:lnSpc>
               <a:spcAft>
                 <a:spcPts val="0"/>
@@ -4595,7 +4449,7 @@
                 </a:solidFill>
                 <a:latin typeface="Arial"/>
               </a:rPr>
-              <a:t>FINAL VERDICT  FAIL</a:t>
+              <a:t>FINAL SCORE: FAIL</a:t>
             </a:r>
           </a:p>
         </p:txBody>
@@ -4608,8 +4462,8 @@
         </p:nvCxnSpPr>
         <p:spPr>
           <a:xfrm>
-            <a:off x="658368" y="6199632"/>
-            <a:ext cx="10872216" cy="0"/>
+            <a:off x="685800" y="6181344"/>
+            <a:ext cx="10817352" cy="0"/>
           </a:xfrm>
           <a:prstGeom prst="line">
             <a:avLst/>
@@ -4643,8 +4497,8 @@
         </p:nvSpPr>
         <p:spPr>
           <a:xfrm>
-            <a:off x="667512" y="6318504"/>
-            <a:ext cx="7315200" cy="228600"/>
+            <a:off x="694944" y="6309360"/>
+            <a:ext cx="7909560" cy="256032"/>
           </a:xfrm>
           <a:prstGeom prst="rect">
             <a:avLst/>
@@ -4659,7 +4513,7 @@
           <a:p>
             <a:pPr algn="l">
               <a:lnSpc>
-                <a:spcPct val="110000"/>
+                <a:spcPct val="108000"/>
               </a:lnSpc>
               <a:spcAft>
                 <a:spcPts val="0"/>
@@ -4668,7 +4522,7 @@
             <a:r>
               <a:rPr sz="1100" b="0">
                 <a:solidFill>
-                  <a:srgbClr val="A8B5C8"/>
+                  <a:srgbClr val="ADB9CA"/>
                 </a:solidFill>
                 <a:latin typeface="Arial"/>
               </a:rPr>
@@ -4685,8 +4539,8 @@
         </p:nvSpPr>
         <p:spPr>
           <a:xfrm>
-            <a:off x="11045952" y="6300216"/>
-            <a:ext cx="457200" cy="237744"/>
+            <a:off x="11018520" y="6291072"/>
+            <a:ext cx="457200" cy="246888"/>
           </a:xfrm>
           <a:prstGeom prst="rect">
             <a:avLst/>
@@ -4701,7 +4555,7 @@
           <a:p>
             <a:pPr algn="r">
               <a:lnSpc>
-                <a:spcPct val="110000"/>
+                <a:spcPct val="108000"/>
               </a:lnSpc>
               <a:spcAft>
                 <a:spcPts val="0"/>
@@ -4710,717 +4564,11 @@
             <a:r>
               <a:rPr sz="1100" b="0">
                 <a:solidFill>
-                  <a:srgbClr val="A8B5C8"/>
+                  <a:srgbClr val="ADB9CA"/>
                 </a:solidFill>
                 <a:latin typeface="Arial"/>
               </a:rPr>
               <a:t>01</a:t>
-            </a:r>
-          </a:p>
-        </p:txBody>
-      </p:sp>
-    </p:spTree>
-  </p:cSld>
-  <p:clrMapOvr>
-    <a:masterClrMapping/>
-  </p:clrMapOvr>
-</p:sld>
-</file>
-
-<file path=ppt/slides/slide10.xml><?xml version="1.0" encoding="utf-8"?>
-<p:sld xmlns:a="http://schemas.openxmlformats.org/drawingml/2006/main" xmlns:p="http://schemas.openxmlformats.org/presentationml/2006/main" xmlns:r="http://schemas.openxmlformats.org/officeDocument/2006/relationships">
-  <p:cSld>
-    <p:spTree>
-      <p:nvGrpSpPr>
-        <p:cNvPr id="1" name=""/>
-        <p:cNvGrpSpPr/>
-        <p:nvPr/>
-      </p:nvGrpSpPr>
-      <p:grpSpPr/>
-      <p:sp>
-        <p:nvSpPr>
-          <p:cNvPr id="2" name="Rectangle 1"/>
-          <p:cNvSpPr/>
-          <p:nvPr/>
-        </p:nvSpPr>
-        <p:spPr>
-          <a:xfrm>
-            <a:off x="0" y="0"/>
-            <a:ext cx="12191695" cy="6858000"/>
-          </a:xfrm>
-          <a:prstGeom prst="rect">
-            <a:avLst/>
-          </a:prstGeom>
-          <a:solidFill>
-            <a:srgbClr val="0B1220"/>
-          </a:solidFill>
-          <a:ln>
-            <a:noFill/>
-          </a:ln>
-        </p:spPr>
-        <p:style>
-          <a:lnRef idx="1">
-            <a:schemeClr val="accent1"/>
-          </a:lnRef>
-          <a:fillRef idx="3">
-            <a:schemeClr val="accent1"/>
-          </a:fillRef>
-          <a:effectRef idx="2">
-            <a:schemeClr val="accent1"/>
-          </a:effectRef>
-          <a:fontRef idx="minor">
-            <a:schemeClr val="lt1"/>
-          </a:fontRef>
-        </p:style>
-        <p:txBody>
-          <a:bodyPr rtlCol="0" anchor="ctr"/>
-          <a:lstStyle/>
-          <a:p>
-            <a:pPr algn="ctr"/>
-          </a:p>
-        </p:txBody>
-      </p:sp>
-      <p:sp>
-        <p:nvSpPr>
-          <p:cNvPr id="3" name="TextBox 2"/>
-          <p:cNvSpPr txBox="1"/>
-          <p:nvPr/>
-        </p:nvSpPr>
-        <p:spPr>
-          <a:xfrm>
-            <a:off x="667512" y="493776"/>
-            <a:ext cx="8229600" cy="320040"/>
-          </a:xfrm>
-          <a:prstGeom prst="rect">
-            <a:avLst/>
-          </a:prstGeom>
-          <a:noFill/>
-        </p:spPr>
-        <p:txBody>
-          <a:bodyPr wrap="square" lIns="0" rIns="0" tIns="0" bIns="0" anchor="ctr">
-            <a:spAutoFit/>
-          </a:bodyPr>
-          <a:lstStyle/>
-          <a:p>
-            <a:pPr algn="l">
-              <a:lnSpc>
-                <a:spcPct val="110000"/>
-              </a:lnSpc>
-              <a:spcAft>
-                <a:spcPts val="0"/>
-              </a:spcAft>
-            </a:pPr>
-            <a:r>
-              <a:rPr sz="1200" b="1">
-                <a:solidFill>
-                  <a:srgbClr val="77A9FF"/>
-                </a:solidFill>
-                <a:latin typeface="Arial"/>
-              </a:rPr>
-              <a:t>THE TAKEAWAY</a:t>
-            </a:r>
-          </a:p>
-        </p:txBody>
-      </p:sp>
-      <p:sp>
-        <p:nvSpPr>
-          <p:cNvPr id="4" name="TextBox 3"/>
-          <p:cNvSpPr txBox="1"/>
-          <p:nvPr/>
-        </p:nvSpPr>
-        <p:spPr>
-          <a:xfrm>
-            <a:off x="667512" y="1161288"/>
-            <a:ext cx="10625328" cy="1618488"/>
-          </a:xfrm>
-          <a:prstGeom prst="rect">
-            <a:avLst/>
-          </a:prstGeom>
-          <a:noFill/>
-        </p:spPr>
-        <p:txBody>
-          <a:bodyPr wrap="square" lIns="0" rIns="0" tIns="0" bIns="0" anchor="t">
-            <a:spAutoFit/>
-          </a:bodyPr>
-          <a:lstStyle/>
-          <a:p>
-            <a:pPr algn="l">
-              <a:lnSpc>
-                <a:spcPct val="103000"/>
-              </a:lnSpc>
-              <a:spcAft>
-                <a:spcPts val="0"/>
-              </a:spcAft>
-            </a:pPr>
-            <a:r>
-              <a:rPr sz="4800" b="1">
-                <a:solidFill>
-                  <a:srgbClr val="F6F4EF"/>
-                </a:solidFill>
-                <a:latin typeface="Arial"/>
-              </a:rPr>
-              <a:t>Before judging the AI,</a:t>
-            </a:r>
-          </a:p>
-          <a:p>
-            <a:pPr algn="l">
-              <a:lnSpc>
-                <a:spcPct val="103000"/>
-              </a:lnSpc>
-              <a:spcAft>
-                <a:spcPts val="0"/>
-              </a:spcAft>
-            </a:pPr>
-            <a:r>
-              <a:rPr sz="4800" b="1">
-                <a:solidFill>
-                  <a:srgbClr val="F6F4EF"/>
-                </a:solidFill>
-                <a:latin typeface="Arial"/>
-              </a:rPr>
-              <a:t>check the judge.</a:t>
-            </a:r>
-          </a:p>
-        </p:txBody>
-      </p:sp>
-      <p:sp>
-        <p:nvSpPr>
-          <p:cNvPr id="5" name="Rounded Rectangle 4"/>
-          <p:cNvSpPr/>
-          <p:nvPr/>
-        </p:nvSpPr>
-        <p:spPr>
-          <a:xfrm>
-            <a:off x="704088" y="3419856"/>
-            <a:ext cx="10771632" cy="1271016"/>
-          </a:xfrm>
-          <a:prstGeom prst="roundRect">
-            <a:avLst>
-              <a:gd name="adj" fmla="val 12000"/>
-            </a:avLst>
-          </a:prstGeom>
-          <a:solidFill>
-            <a:srgbClr val="172238"/>
-          </a:solidFill>
-          <a:ln>
-            <a:noFill/>
-          </a:ln>
-        </p:spPr>
-        <p:style>
-          <a:lnRef idx="1">
-            <a:schemeClr val="accent1"/>
-          </a:lnRef>
-          <a:fillRef idx="3">
-            <a:schemeClr val="accent1"/>
-          </a:fillRef>
-          <a:effectRef idx="2">
-            <a:schemeClr val="accent1"/>
-          </a:effectRef>
-          <a:fontRef idx="minor">
-            <a:schemeClr val="lt1"/>
-          </a:fontRef>
-        </p:style>
-        <p:txBody>
-          <a:bodyPr rtlCol="0" anchor="ctr"/>
-          <a:lstStyle/>
-          <a:p>
-            <a:pPr algn="ctr"/>
-          </a:p>
-        </p:txBody>
-      </p:sp>
-      <p:sp>
-        <p:nvSpPr>
-          <p:cNvPr id="6" name="TextBox 5"/>
-          <p:cNvSpPr txBox="1"/>
-          <p:nvPr/>
-        </p:nvSpPr>
-        <p:spPr>
-          <a:xfrm>
-            <a:off x="960120" y="3657600"/>
-            <a:ext cx="1874519" cy="274320"/>
-          </a:xfrm>
-          <a:prstGeom prst="rect">
-            <a:avLst/>
-          </a:prstGeom>
-          <a:noFill/>
-        </p:spPr>
-        <p:txBody>
-          <a:bodyPr wrap="square" lIns="0" rIns="0" tIns="0" bIns="0" anchor="ctr">
-            <a:spAutoFit/>
-          </a:bodyPr>
-          <a:lstStyle/>
-          <a:p>
-            <a:pPr algn="l">
-              <a:lnSpc>
-                <a:spcPct val="110000"/>
-              </a:lnSpc>
-              <a:spcAft>
-                <a:spcPts val="0"/>
-              </a:spcAft>
-            </a:pPr>
-            <a:r>
-              <a:rPr sz="1200" b="1">
-                <a:solidFill>
-                  <a:srgbClr val="5DDFC4"/>
-                </a:solidFill>
-                <a:latin typeface="Arial"/>
-              </a:rPr>
-              <a:t>COMPLETED</a:t>
-            </a:r>
-          </a:p>
-        </p:txBody>
-      </p:sp>
-      <p:sp>
-        <p:nvSpPr>
-          <p:cNvPr id="7" name="TextBox 6"/>
-          <p:cNvSpPr txBox="1"/>
-          <p:nvPr/>
-        </p:nvSpPr>
-        <p:spPr>
-          <a:xfrm>
-            <a:off x="969264" y="4005072"/>
-            <a:ext cx="2578608" cy="384048"/>
-          </a:xfrm>
-          <a:prstGeom prst="rect">
-            <a:avLst/>
-          </a:prstGeom>
-          <a:noFill/>
-        </p:spPr>
-        <p:txBody>
-          <a:bodyPr wrap="square" lIns="0" rIns="0" tIns="0" bIns="0" anchor="ctr">
-            <a:spAutoFit/>
-          </a:bodyPr>
-          <a:lstStyle/>
-          <a:p>
-            <a:pPr algn="l">
-              <a:lnSpc>
-                <a:spcPct val="110000"/>
-              </a:lnSpc>
-              <a:spcAft>
-                <a:spcPts val="0"/>
-              </a:spcAft>
-            </a:pPr>
-            <a:r>
-              <a:rPr sz="2000" b="1">
-                <a:solidFill>
-                  <a:srgbClr val="F6F4EF"/>
-                </a:solidFill>
-                <a:latin typeface="Arial"/>
-              </a:rPr>
-              <a:t>historical audit</a:t>
-            </a:r>
-          </a:p>
-        </p:txBody>
-      </p:sp>
-      <p:sp>
-        <p:nvSpPr>
-          <p:cNvPr id="8" name="TextBox 7"/>
-          <p:cNvSpPr txBox="1"/>
-          <p:nvPr/>
-        </p:nvSpPr>
-        <p:spPr>
-          <a:xfrm>
-            <a:off x="4206240" y="3657600"/>
-            <a:ext cx="1051560" cy="274320"/>
-          </a:xfrm>
-          <a:prstGeom prst="rect">
-            <a:avLst/>
-          </a:prstGeom>
-          <a:noFill/>
-        </p:spPr>
-        <p:txBody>
-          <a:bodyPr wrap="square" lIns="0" rIns="0" tIns="0" bIns="0" anchor="ctr">
-            <a:spAutoFit/>
-          </a:bodyPr>
-          <a:lstStyle/>
-          <a:p>
-            <a:pPr algn="l">
-              <a:lnSpc>
-                <a:spcPct val="110000"/>
-              </a:lnSpc>
-              <a:spcAft>
-                <a:spcPts val="0"/>
-              </a:spcAft>
-            </a:pPr>
-            <a:r>
-              <a:rPr sz="1200" b="1">
-                <a:solidFill>
-                  <a:srgbClr val="FFC96E"/>
-                </a:solidFill>
-                <a:latin typeface="Arial"/>
-              </a:rPr>
-              <a:t>NEXT</a:t>
-            </a:r>
-          </a:p>
-        </p:txBody>
-      </p:sp>
-      <p:sp>
-        <p:nvSpPr>
-          <p:cNvPr id="9" name="TextBox 8"/>
-          <p:cNvSpPr txBox="1"/>
-          <p:nvPr/>
-        </p:nvSpPr>
-        <p:spPr>
-          <a:xfrm>
-            <a:off x="4206240" y="4005072"/>
-            <a:ext cx="2752344" cy="384048"/>
-          </a:xfrm>
-          <a:prstGeom prst="rect">
-            <a:avLst/>
-          </a:prstGeom>
-          <a:noFill/>
-        </p:spPr>
-        <p:txBody>
-          <a:bodyPr wrap="square" lIns="0" rIns="0" tIns="0" bIns="0" anchor="ctr">
-            <a:spAutoFit/>
-          </a:bodyPr>
-          <a:lstStyle/>
-          <a:p>
-            <a:pPr algn="l">
-              <a:lnSpc>
-                <a:spcPct val="110000"/>
-              </a:lnSpc>
-              <a:spcAft>
-                <a:spcPts val="0"/>
-              </a:spcAft>
-            </a:pPr>
-            <a:r>
-              <a:rPr sz="2000" b="1">
-                <a:solidFill>
-                  <a:srgbClr val="F6F4EF"/>
-                </a:solidFill>
-                <a:latin typeface="Arial"/>
-              </a:rPr>
-              <a:t>independent review</a:t>
-            </a:r>
-          </a:p>
-        </p:txBody>
-      </p:sp>
-      <p:sp>
-        <p:nvSpPr>
-          <p:cNvPr id="10" name="TextBox 9"/>
-          <p:cNvSpPr txBox="1"/>
-          <p:nvPr/>
-        </p:nvSpPr>
-        <p:spPr>
-          <a:xfrm>
-            <a:off x="8046720" y="3657600"/>
-            <a:ext cx="1938528" cy="274320"/>
-          </a:xfrm>
-          <a:prstGeom prst="rect">
-            <a:avLst/>
-          </a:prstGeom>
-          <a:noFill/>
-        </p:spPr>
-        <p:txBody>
-          <a:bodyPr wrap="square" lIns="0" rIns="0" tIns="0" bIns="0" anchor="ctr">
-            <a:spAutoFit/>
-          </a:bodyPr>
-          <a:lstStyle/>
-          <a:p>
-            <a:pPr algn="l">
-              <a:lnSpc>
-                <a:spcPct val="110000"/>
-              </a:lnSpc>
-              <a:spcAft>
-                <a:spcPts val="0"/>
-              </a:spcAft>
-            </a:pPr>
-            <a:r>
-              <a:rPr sz="1200" b="1">
-                <a:solidFill>
-                  <a:srgbClr val="FF7773"/>
-                </a:solidFill>
-                <a:latin typeface="Arial"/>
-              </a:rPr>
-              <a:t>MAIN STUDY</a:t>
-            </a:r>
-          </a:p>
-        </p:txBody>
-      </p:sp>
-      <p:sp>
-        <p:nvSpPr>
-          <p:cNvPr id="11" name="TextBox 10"/>
-          <p:cNvSpPr txBox="1"/>
-          <p:nvPr/>
-        </p:nvSpPr>
-        <p:spPr>
-          <a:xfrm>
-            <a:off x="8055864" y="4005072"/>
-            <a:ext cx="2944368" cy="384048"/>
-          </a:xfrm>
-          <a:prstGeom prst="rect">
-            <a:avLst/>
-          </a:prstGeom>
-          <a:noFill/>
-        </p:spPr>
-        <p:txBody>
-          <a:bodyPr wrap="square" lIns="0" rIns="0" tIns="0" bIns="0" anchor="ctr">
-            <a:spAutoFit/>
-          </a:bodyPr>
-          <a:lstStyle/>
-          <a:p>
-            <a:pPr algn="l">
-              <a:lnSpc>
-                <a:spcPct val="110000"/>
-              </a:lnSpc>
-              <a:spcAft>
-                <a:spcPts val="0"/>
-              </a:spcAft>
-            </a:pPr>
-            <a:r>
-              <a:rPr sz="2000" b="1">
-                <a:solidFill>
-                  <a:srgbClr val="F6F4EF"/>
-                </a:solidFill>
-                <a:latin typeface="Arial"/>
-              </a:rPr>
-              <a:t>0 / 12 gates passed</a:t>
-            </a:r>
-          </a:p>
-        </p:txBody>
-      </p:sp>
-      <p:sp>
-        <p:nvSpPr>
-          <p:cNvPr id="12" name="TextBox 11"/>
-          <p:cNvSpPr txBox="1"/>
-          <p:nvPr/>
-        </p:nvSpPr>
-        <p:spPr>
-          <a:xfrm>
-            <a:off x="8065008" y="4416552"/>
-            <a:ext cx="2852928" cy="182880"/>
-          </a:xfrm>
-          <a:prstGeom prst="rect">
-            <a:avLst/>
-          </a:prstGeom>
-          <a:noFill/>
-        </p:spPr>
-        <p:txBody>
-          <a:bodyPr wrap="square" lIns="0" rIns="0" tIns="0" bIns="0" anchor="ctr">
-            <a:spAutoFit/>
-          </a:bodyPr>
-          <a:lstStyle/>
-          <a:p>
-            <a:pPr algn="l">
-              <a:lnSpc>
-                <a:spcPct val="110000"/>
-              </a:lnSpc>
-              <a:spcAft>
-                <a:spcPts val="0"/>
-              </a:spcAft>
-            </a:pPr>
-            <a:r>
-              <a:rPr sz="1000" b="0">
-                <a:solidFill>
-                  <a:srgbClr val="A8B5C8"/>
-                </a:solidFill>
-                <a:latin typeface="Arial"/>
-              </a:rPr>
-              <a:t>as of 1 Nov 2026</a:t>
-            </a:r>
-          </a:p>
-        </p:txBody>
-      </p:sp>
-      <p:sp>
-        <p:nvSpPr>
-          <p:cNvPr id="13" name="TextBox 12"/>
-          <p:cNvSpPr txBox="1"/>
-          <p:nvPr/>
-        </p:nvSpPr>
-        <p:spPr>
-          <a:xfrm>
-            <a:off x="667512" y="5120640"/>
-            <a:ext cx="10881360" cy="539496"/>
-          </a:xfrm>
-          <a:prstGeom prst="rect">
-            <a:avLst/>
-          </a:prstGeom>
-          <a:noFill/>
-        </p:spPr>
-        <p:txBody>
-          <a:bodyPr wrap="square" lIns="0" rIns="0" tIns="0" bIns="0" anchor="ctr">
-            <a:spAutoFit/>
-          </a:bodyPr>
-          <a:lstStyle/>
-          <a:p>
-            <a:pPr algn="l">
-              <a:lnSpc>
-                <a:spcPct val="110000"/>
-              </a:lnSpc>
-              <a:spcAft>
-                <a:spcPts val="0"/>
-              </a:spcAft>
-            </a:pPr>
-            <a:r>
-              <a:rPr sz="2100" b="0">
-                <a:solidFill>
-                  <a:srgbClr val="A8B5C8"/>
-                </a:solidFill>
-                <a:latin typeface="Arial"/>
-              </a:rPr>
-              <a:t>Would you trust an AI score if the grader disagreed with its own tests?</a:t>
-            </a:r>
-          </a:p>
-        </p:txBody>
-      </p:sp>
-      <p:sp>
-        <p:nvSpPr>
-          <p:cNvPr id="14" name="TextBox 13"/>
-          <p:cNvSpPr txBox="1"/>
-          <p:nvPr/>
-        </p:nvSpPr>
-        <p:spPr>
-          <a:xfrm>
-            <a:off x="676656" y="6080760"/>
-            <a:ext cx="7360920" cy="320040"/>
-          </a:xfrm>
-          <a:prstGeom prst="rect">
-            <a:avLst/>
-          </a:prstGeom>
-          <a:noFill/>
-        </p:spPr>
-        <p:txBody>
-          <a:bodyPr wrap="square" lIns="0" rIns="0" tIns="0" bIns="0" anchor="ctr">
-            <a:spAutoFit/>
-          </a:bodyPr>
-          <a:lstStyle/>
-          <a:p>
-            <a:pPr algn="l">
-              <a:lnSpc>
-                <a:spcPct val="110000"/>
-              </a:lnSpc>
-              <a:spcAft>
-                <a:spcPts val="0"/>
-              </a:spcAft>
-            </a:pPr>
-            <a:r>
-              <a:rPr sz="1600" b="1">
-                <a:solidFill>
-                  <a:srgbClr val="77A9FF"/>
-                </a:solidFill>
-                <a:latin typeface="Arial"/>
-              </a:rPr>
-              <a:t>github.com/Imranqsl212/AiResearch</a:t>
-            </a:r>
-          </a:p>
-        </p:txBody>
-      </p:sp>
-      <p:cxnSp>
-        <p:nvCxnSpPr>
-          <p:cNvPr id="15" name="Connector 14"/>
-          <p:cNvCxnSpPr/>
-          <p:nvPr/>
-        </p:nvCxnSpPr>
-        <p:spPr>
-          <a:xfrm>
-            <a:off x="667512" y="6519672"/>
-            <a:ext cx="10872216" cy="0"/>
-          </a:xfrm>
-          <a:prstGeom prst="line">
-            <a:avLst/>
-          </a:prstGeom>
-          <a:ln w="19050">
-            <a:solidFill>
-              <a:srgbClr val="34445D"/>
-            </a:solidFill>
-          </a:ln>
-        </p:spPr>
-        <p:style>
-          <a:lnRef idx="2">
-            <a:schemeClr val="accent1"/>
-          </a:lnRef>
-          <a:fillRef idx="0">
-            <a:schemeClr val="accent1"/>
-          </a:fillRef>
-          <a:effectRef idx="1">
-            <a:schemeClr val="accent1"/>
-          </a:effectRef>
-          <a:fontRef idx="minor">
-            <a:schemeClr val="tx1"/>
-          </a:fontRef>
-        </p:style>
-      </p:cxnSp>
-      <p:sp>
-        <p:nvSpPr>
-          <p:cNvPr id="16" name="TextBox 15"/>
-          <p:cNvSpPr txBox="1"/>
-          <p:nvPr/>
-        </p:nvSpPr>
-        <p:spPr>
-          <a:xfrm>
-            <a:off x="676656" y="6565392"/>
-            <a:ext cx="10515600" cy="164592"/>
-          </a:xfrm>
-          <a:prstGeom prst="rect">
-            <a:avLst/>
-          </a:prstGeom>
-          <a:noFill/>
-        </p:spPr>
-        <p:txBody>
-          <a:bodyPr wrap="square" lIns="0" rIns="0" tIns="0" bIns="0" anchor="ctr">
-            <a:spAutoFit/>
-          </a:bodyPr>
-          <a:lstStyle/>
-          <a:p>
-            <a:pPr algn="l">
-              <a:lnSpc>
-                <a:spcPct val="110000"/>
-              </a:lnSpc>
-              <a:spcAft>
-                <a:spcPts val="0"/>
-              </a:spcAft>
-            </a:pPr>
-            <a:r>
-              <a:rPr sz="850" b="0">
-                <a:solidFill>
-                  <a:srgbClr val="A8B5C8"/>
-                </a:solidFill>
-                <a:latin typeface="Arial"/>
-              </a:rPr>
-              <a:t>Sources: README.md · paper/final.md · docs/MEASUREMENT_FOLLOWUP_20261030.md</a:t>
-            </a:r>
-          </a:p>
-        </p:txBody>
-      </p:sp>
-      <p:sp>
-        <p:nvSpPr>
-          <p:cNvPr id="17" name="TextBox 16"/>
-          <p:cNvSpPr txBox="1"/>
-          <p:nvPr/>
-        </p:nvSpPr>
-        <p:spPr>
-          <a:xfrm>
-            <a:off x="11064240" y="6556248"/>
-            <a:ext cx="457200" cy="182880"/>
-          </a:xfrm>
-          <a:prstGeom prst="rect">
-            <a:avLst/>
-          </a:prstGeom>
-          <a:noFill/>
-        </p:spPr>
-        <p:txBody>
-          <a:bodyPr wrap="square" lIns="0" rIns="0" tIns="0" bIns="0" anchor="ctr">
-            <a:spAutoFit/>
-          </a:bodyPr>
-          <a:lstStyle/>
-          <a:p>
-            <a:pPr algn="r">
-              <a:lnSpc>
-                <a:spcPct val="110000"/>
-              </a:lnSpc>
-              <a:spcAft>
-                <a:spcPts val="0"/>
-              </a:spcAft>
-            </a:pPr>
-            <a:r>
-              <a:rPr sz="1000" b="0">
-                <a:solidFill>
-                  <a:srgbClr val="A8B5C8"/>
-                </a:solidFill>
-                <a:latin typeface="Arial"/>
-              </a:rPr>
-              <a:t>10</a:t>
             </a:r>
           </a:p>
         </p:txBody>
@@ -5494,8 +4642,8 @@
         </p:nvSpPr>
         <p:spPr>
           <a:xfrm>
-            <a:off x="640080" y="329184"/>
-            <a:ext cx="9966960" cy="274320"/>
+            <a:off x="640080" y="320040"/>
+            <a:ext cx="9875520" cy="274320"/>
           </a:xfrm>
           <a:prstGeom prst="rect">
             <a:avLst/>
@@ -5510,7 +4658,7 @@
           <a:p>
             <a:pPr algn="l">
               <a:lnSpc>
-                <a:spcPct val="110000"/>
+                <a:spcPct val="108000"/>
               </a:lnSpc>
               <a:spcAft>
                 <a:spcPts val="0"/>
@@ -5523,7 +4671,7 @@
                 </a:solidFill>
                 <a:latin typeface="Arial"/>
               </a:rPr>
-              <a:t>THE IDEA</a:t>
+              <a:t>FIRST</a:t>
             </a:r>
           </a:p>
         </p:txBody>
@@ -5536,8 +4684,8 @@
         </p:nvSpPr>
         <p:spPr>
           <a:xfrm>
-            <a:off x="640080" y="740664"/>
-            <a:ext cx="10927080" cy="841248"/>
+            <a:off x="640080" y="758952"/>
+            <a:ext cx="10954512" cy="822960"/>
           </a:xfrm>
           <a:prstGeom prst="rect">
             <a:avLst/>
@@ -5552,20 +4700,20 @@
           <a:p>
             <a:pPr algn="l">
               <a:lnSpc>
-                <a:spcPct val="110000"/>
+                <a:spcPct val="108000"/>
               </a:lnSpc>
               <a:spcAft>
                 <a:spcPts val="0"/>
               </a:spcAft>
             </a:pPr>
             <a:r>
-              <a:rPr sz="3300" b="1">
+              <a:rPr sz="3500" b="1">
                 <a:solidFill>
                   <a:srgbClr val="F6F4EF"/>
                 </a:solidFill>
                 <a:latin typeface="Arial"/>
               </a:rPr>
-              <a:t>Imagine a teacher with a checklist</a:t>
+              <a:t>What was the AI doing?</a:t>
             </a:r>
           </a:p>
         </p:txBody>
@@ -5578,7 +4726,7 @@
         </p:nvCxnSpPr>
         <p:spPr>
           <a:xfrm>
-            <a:off x="640080" y="6473952"/>
+            <a:off x="640080" y="6464808"/>
             <a:ext cx="10908792" cy="0"/>
           </a:xfrm>
           <a:prstGeom prst="line">
@@ -5614,7 +4762,7 @@
         <p:spPr>
           <a:xfrm>
             <a:off x="658368" y="6528816"/>
-            <a:ext cx="10424160" cy="173736"/>
+            <a:ext cx="10332720" cy="173736"/>
           </a:xfrm>
           <a:prstGeom prst="rect">
             <a:avLst/>
@@ -5629,20 +4777,20 @@
           <a:p>
             <a:pPr algn="l">
               <a:lnSpc>
-                <a:spcPct val="110000"/>
+                <a:spcPct val="108000"/>
               </a:lnSpc>
               <a:spcAft>
                 <a:spcPts val="0"/>
               </a:spcAft>
             </a:pPr>
             <a:r>
-              <a:rPr sz="850" b="0">
-                <a:solidFill>
-                  <a:srgbClr val="A8B5C8"/>
+              <a:rPr sz="819" b="0">
+                <a:solidFill>
+                  <a:srgbClr val="ADB9CA"/>
                 </a:solidFill>
                 <a:latin typeface="Arial"/>
               </a:rPr>
-              <a:t>Illustration of the benchmark disagreement; see paper/final.md, Results.</a:t>
+              <a:t>Source: paper/final.md, Methods; README.md.</a:t>
             </a:r>
           </a:p>
         </p:txBody>
@@ -5655,8 +4803,8 @@
         </p:nvSpPr>
         <p:spPr>
           <a:xfrm>
-            <a:off x="11064240" y="6501384"/>
-            <a:ext cx="457200" cy="219456"/>
+            <a:off x="11045952" y="6510528"/>
+            <a:ext cx="457200" cy="201168"/>
           </a:xfrm>
           <a:prstGeom prst="rect">
             <a:avLst/>
@@ -5671,7 +4819,7 @@
           <a:p>
             <a:pPr algn="r">
               <a:lnSpc>
-                <a:spcPct val="110000"/>
+                <a:spcPct val="108000"/>
               </a:lnSpc>
               <a:spcAft>
                 <a:spcPts val="0"/>
@@ -5680,7 +4828,7 @@
             <a:r>
               <a:rPr sz="1000" b="0">
                 <a:solidFill>
-                  <a:srgbClr val="A8B5C8"/>
+                  <a:srgbClr val="ADB9CA"/>
                 </a:solidFill>
                 <a:latin typeface="Arial"/>
               </a:rPr>
@@ -5697,8 +4845,8 @@
         </p:nvSpPr>
         <p:spPr>
           <a:xfrm>
-            <a:off x="694944" y="1892807"/>
-            <a:ext cx="4864608" cy="3255264"/>
+            <a:off x="685800" y="1920240"/>
+            <a:ext cx="2542032" cy="2907792"/>
           </a:xfrm>
           <a:prstGeom prst="roundRect">
             <a:avLst>
@@ -5736,14 +4884,57 @@
       </p:sp>
       <p:sp>
         <p:nvSpPr>
-          <p:cNvPr id="9" name="TextBox 8"/>
+          <p:cNvPr id="9" name="Oval 8"/>
+          <p:cNvSpPr/>
+          <p:nvPr/>
+        </p:nvSpPr>
+        <p:spPr>
+          <a:xfrm>
+            <a:off x="1572768" y="2176272"/>
+            <a:ext cx="713232" cy="713232"/>
+          </a:xfrm>
+          <a:prstGeom prst="ellipse">
+            <a:avLst/>
+          </a:prstGeom>
+          <a:solidFill>
+            <a:srgbClr val="77A9FF"/>
+          </a:solidFill>
+          <a:ln>
+            <a:noFill/>
+          </a:ln>
+        </p:spPr>
+        <p:style>
+          <a:lnRef idx="1">
+            <a:schemeClr val="accent1"/>
+          </a:lnRef>
+          <a:fillRef idx="3">
+            <a:schemeClr val="accent1"/>
+          </a:fillRef>
+          <a:effectRef idx="2">
+            <a:schemeClr val="accent1"/>
+          </a:effectRef>
+          <a:fontRef idx="minor">
+            <a:schemeClr val="lt1"/>
+          </a:fontRef>
+        </p:style>
+        <p:txBody>
+          <a:bodyPr rtlCol="0" anchor="ctr"/>
+          <a:lstStyle/>
+          <a:p>
+            <a:pPr algn="ctr"/>
+          </a:p>
+        </p:txBody>
+      </p:sp>
+      <p:sp>
+        <p:nvSpPr>
+          <p:cNvPr id="10" name="TextBox 9"/>
           <p:cNvSpPr txBox="1"/>
           <p:nvPr/>
         </p:nvSpPr>
         <p:spPr>
           <a:xfrm>
-            <a:off x="996696" y="2185416"/>
-            <a:ext cx="4069080" cy="338328"/>
+            <a:off x="1682496" y="2267712"/>
+            <a:ext cx="475488" cy="457200"/>
           </a:xfrm>
           <a:prstGeom prst="rect">
             <a:avLst/>
@@ -5756,36 +4947,184 @@
           </a:bodyPr>
           <a:lstStyle/>
           <a:p>
-            <a:pPr algn="l">
+            <a:pPr algn="ctr">
               <a:lnSpc>
-                <a:spcPct val="110000"/>
+                <a:spcPct val="108000"/>
               </a:lnSpc>
               <a:spcAft>
                 <a:spcPts val="0"/>
               </a:spcAft>
             </a:pPr>
             <a:r>
-              <a:rPr sz="1400" b="1">
-                <a:solidFill>
-                  <a:srgbClr val="A8B5C8"/>
+              <a:rPr sz="2400" b="1">
+                <a:solidFill>
+                  <a:srgbClr val="0B1220"/>
                 </a:solidFill>
                 <a:latin typeface="Arial"/>
               </a:rPr>
-              <a:t>THE CHECKLIST</a:t>
-            </a:r>
-          </a:p>
-        </p:txBody>
-      </p:sp>
-      <p:sp>
-        <p:nvSpPr>
-          <p:cNvPr id="10" name="Oval 9"/>
+              <a:t>1</a:t>
+            </a:r>
+          </a:p>
+        </p:txBody>
+      </p:sp>
+      <p:sp>
+        <p:nvSpPr>
+          <p:cNvPr id="11" name="TextBox 10"/>
+          <p:cNvSpPr txBox="1"/>
+          <p:nvPr/>
+        </p:nvSpPr>
+        <p:spPr>
+          <a:xfrm>
+            <a:off x="868680" y="3273552"/>
+            <a:ext cx="2176272" cy="987552"/>
+          </a:xfrm>
+          <a:prstGeom prst="rect">
+            <a:avLst/>
+          </a:prstGeom>
+          <a:noFill/>
+        </p:spPr>
+        <p:txBody>
+          <a:bodyPr wrap="square" lIns="0" rIns="0" tIns="0" bIns="0" anchor="ctr">
+            <a:spAutoFit/>
+          </a:bodyPr>
+          <a:lstStyle/>
+          <a:p>
+            <a:pPr algn="ctr">
+              <a:lnSpc>
+                <a:spcPct val="108000"/>
+              </a:lnSpc>
+              <a:spcAft>
+                <a:spcPts val="0"/>
+              </a:spcAft>
+            </a:pPr>
+            <a:r>
+              <a:rPr sz="2200" b="1">
+                <a:solidFill>
+                  <a:srgbClr val="F6F4EF"/>
+                </a:solidFill>
+                <a:latin typeface="Arial"/>
+              </a:rPr>
+              <a:t>See a small</a:t>
+            </a:r>
+          </a:p>
+          <a:p>
+            <a:pPr algn="ctr">
+              <a:lnSpc>
+                <a:spcPct val="108000"/>
+              </a:lnSpc>
+              <a:spcAft>
+                <a:spcPts val="0"/>
+              </a:spcAft>
+            </a:pPr>
+            <a:r>
+              <a:rPr sz="2200" b="1">
+                <a:solidFill>
+                  <a:srgbClr val="F6F4EF"/>
+                </a:solidFill>
+                <a:latin typeface="Arial"/>
+              </a:rPr>
+              <a:t>code problem</a:t>
+            </a:r>
+          </a:p>
+        </p:txBody>
+      </p:sp>
+      <p:sp>
+        <p:nvSpPr>
+          <p:cNvPr id="12" name="TextBox 11"/>
+          <p:cNvSpPr txBox="1"/>
+          <p:nvPr/>
+        </p:nvSpPr>
+        <p:spPr>
+          <a:xfrm>
+            <a:off x="3264408" y="3017520"/>
+            <a:ext cx="320040" cy="603504"/>
+          </a:xfrm>
+          <a:prstGeom prst="rect">
+            <a:avLst/>
+          </a:prstGeom>
+          <a:noFill/>
+        </p:spPr>
+        <p:txBody>
+          <a:bodyPr wrap="square" lIns="0" rIns="0" tIns="0" bIns="0" anchor="ctr">
+            <a:spAutoFit/>
+          </a:bodyPr>
+          <a:lstStyle/>
+          <a:p>
+            <a:pPr algn="ctr">
+              <a:lnSpc>
+                <a:spcPct val="108000"/>
+              </a:lnSpc>
+              <a:spcAft>
+                <a:spcPts val="0"/>
+              </a:spcAft>
+            </a:pPr>
+            <a:r>
+              <a:rPr sz="2900" b="0">
+                <a:solidFill>
+                  <a:srgbClr val="77A9FF"/>
+                </a:solidFill>
+                <a:latin typeface="Arial"/>
+              </a:rPr>
+              <a:t>→</a:t>
+            </a:r>
+          </a:p>
+        </p:txBody>
+      </p:sp>
+      <p:sp>
+        <p:nvSpPr>
+          <p:cNvPr id="13" name="Rounded Rectangle 12"/>
           <p:cNvSpPr/>
           <p:nvPr/>
         </p:nvSpPr>
         <p:spPr>
           <a:xfrm>
-            <a:off x="1033271" y="2816352"/>
-            <a:ext cx="466344" cy="466344"/>
+            <a:off x="3575304" y="1920240"/>
+            <a:ext cx="2542032" cy="2907792"/>
+          </a:xfrm>
+          <a:prstGeom prst="roundRect">
+            <a:avLst>
+              <a:gd name="adj" fmla="val 12000"/>
+            </a:avLst>
+          </a:prstGeom>
+          <a:solidFill>
+            <a:srgbClr val="172238"/>
+          </a:solidFill>
+          <a:ln>
+            <a:noFill/>
+          </a:ln>
+        </p:spPr>
+        <p:style>
+          <a:lnRef idx="1">
+            <a:schemeClr val="accent1"/>
+          </a:lnRef>
+          <a:fillRef idx="3">
+            <a:schemeClr val="accent1"/>
+          </a:fillRef>
+          <a:effectRef idx="2">
+            <a:schemeClr val="accent1"/>
+          </a:effectRef>
+          <a:fontRef idx="minor">
+            <a:schemeClr val="lt1"/>
+          </a:fontRef>
+        </p:style>
+        <p:txBody>
+          <a:bodyPr rtlCol="0" anchor="ctr"/>
+          <a:lstStyle/>
+          <a:p>
+            <a:pPr algn="ctr"/>
+          </a:p>
+        </p:txBody>
+      </p:sp>
+      <p:sp>
+        <p:nvSpPr>
+          <p:cNvPr id="14" name="Oval 13"/>
+          <p:cNvSpPr/>
+          <p:nvPr/>
+        </p:nvSpPr>
+        <p:spPr>
+          <a:xfrm>
+            <a:off x="4462272" y="2176272"/>
+            <a:ext cx="713232" cy="713232"/>
           </a:xfrm>
           <a:prstGeom prst="ellipse">
             <a:avLst/>
@@ -5821,14 +5160,14 @@
       </p:sp>
       <p:sp>
         <p:nvSpPr>
-          <p:cNvPr id="11" name="TextBox 10"/>
+          <p:cNvPr id="15" name="TextBox 14"/>
           <p:cNvSpPr txBox="1"/>
           <p:nvPr/>
         </p:nvSpPr>
         <p:spPr>
           <a:xfrm>
-            <a:off x="1088136" y="2788920"/>
-            <a:ext cx="347472" cy="493776"/>
+            <a:off x="4572000" y="2267712"/>
+            <a:ext cx="475488" cy="457200"/>
           </a:xfrm>
           <a:prstGeom prst="rect">
             <a:avLst/>
@@ -5843,34 +5182,34 @@
           <a:p>
             <a:pPr algn="ctr">
               <a:lnSpc>
-                <a:spcPct val="110000"/>
+                <a:spcPct val="108000"/>
               </a:lnSpc>
               <a:spcAft>
                 <a:spcPts val="0"/>
               </a:spcAft>
             </a:pPr>
             <a:r>
-              <a:rPr sz="2800" b="1">
+              <a:rPr sz="2400" b="1">
                 <a:solidFill>
                   <a:srgbClr val="0B1220"/>
                 </a:solidFill>
                 <a:latin typeface="Arial"/>
               </a:rPr>
-              <a:t>✓</a:t>
-            </a:r>
-          </a:p>
-        </p:txBody>
-      </p:sp>
-      <p:sp>
-        <p:nvSpPr>
-          <p:cNvPr id="12" name="TextBox 11"/>
+              <a:t>2</a:t>
+            </a:r>
+          </a:p>
+        </p:txBody>
+      </p:sp>
+      <p:sp>
+        <p:nvSpPr>
+          <p:cNvPr id="16" name="TextBox 15"/>
           <p:cNvSpPr txBox="1"/>
           <p:nvPr/>
         </p:nvSpPr>
         <p:spPr>
           <a:xfrm>
-            <a:off x="1664208" y="2825496"/>
-            <a:ext cx="3520440" cy="493776"/>
+            <a:off x="3758184" y="3273552"/>
+            <a:ext cx="2176272" cy="987552"/>
           </a:xfrm>
           <a:prstGeom prst="rect">
             <a:avLst/>
@@ -5883,9 +5222,9 @@
           </a:bodyPr>
           <a:lstStyle/>
           <a:p>
-            <a:pPr algn="l">
+            <a:pPr algn="ctr">
               <a:lnSpc>
-                <a:spcPct val="110000"/>
+                <a:spcPct val="108000"/>
               </a:lnSpc>
               <a:spcAft>
                 <a:spcPts val="0"/>
@@ -5898,82 +5237,170 @@
                 </a:solidFill>
                 <a:latin typeface="Arial"/>
               </a:rPr>
-              <a:t>All listed checks pass</a:t>
-            </a:r>
-          </a:p>
-        </p:txBody>
-      </p:sp>
-      <p:sp>
-        <p:nvSpPr>
-          <p:cNvPr id="13" name="TextBox 12"/>
-          <p:cNvSpPr txBox="1"/>
-          <p:nvPr/>
-        </p:nvSpPr>
-        <p:spPr>
-          <a:xfrm>
-            <a:off x="1033271" y="3749039"/>
-            <a:ext cx="4005072" cy="868680"/>
-          </a:xfrm>
-          <a:prstGeom prst="rect">
-            <a:avLst/>
-          </a:prstGeom>
-          <a:noFill/>
-        </p:spPr>
-        <p:txBody>
-          <a:bodyPr wrap="square" lIns="0" rIns="0" tIns="0" bIns="0" anchor="ctr">
-            <a:spAutoFit/>
-          </a:bodyPr>
-          <a:lstStyle/>
-          <a:p>
-            <a:pPr algn="l">
+              <a:t>Write a</a:t>
+            </a:r>
+          </a:p>
+          <a:p>
+            <a:pPr algn="ctr">
               <a:lnSpc>
-                <a:spcPct val="110000"/>
+                <a:spcPct val="108000"/>
               </a:lnSpc>
               <a:spcAft>
                 <a:spcPts val="0"/>
               </a:spcAft>
             </a:pPr>
             <a:r>
-              <a:rPr sz="1700" b="0">
-                <a:solidFill>
-                  <a:srgbClr val="A8B5C8"/>
+              <a:rPr sz="2200" b="1">
+                <a:solidFill>
+                  <a:srgbClr val="F6F4EF"/>
                 </a:solidFill>
                 <a:latin typeface="Arial"/>
               </a:rPr>
-              <a:t>The student's work satisfies</a:t>
-            </a:r>
-          </a:p>
-          <a:p>
-            <a:pPr algn="l">
+              <a:t>possible fix</a:t>
+            </a:r>
+          </a:p>
+        </p:txBody>
+      </p:sp>
+      <p:sp>
+        <p:nvSpPr>
+          <p:cNvPr id="17" name="TextBox 16"/>
+          <p:cNvSpPr txBox="1"/>
+          <p:nvPr/>
+        </p:nvSpPr>
+        <p:spPr>
+          <a:xfrm>
+            <a:off x="6153912" y="3017520"/>
+            <a:ext cx="320040" cy="603504"/>
+          </a:xfrm>
+          <a:prstGeom prst="rect">
+            <a:avLst/>
+          </a:prstGeom>
+          <a:noFill/>
+        </p:spPr>
+        <p:txBody>
+          <a:bodyPr wrap="square" lIns="0" rIns="0" tIns="0" bIns="0" anchor="ctr">
+            <a:spAutoFit/>
+          </a:bodyPr>
+          <a:lstStyle/>
+          <a:p>
+            <a:pPr algn="ctr">
               <a:lnSpc>
-                <a:spcPct val="110000"/>
+                <a:spcPct val="108000"/>
               </a:lnSpc>
               <a:spcAft>
                 <a:spcPts val="0"/>
               </a:spcAft>
             </a:pPr>
             <a:r>
-              <a:rPr sz="1700" b="0">
-                <a:solidFill>
-                  <a:srgbClr val="A8B5C8"/>
+              <a:rPr sz="2900" b="0">
+                <a:solidFill>
+                  <a:srgbClr val="77A9FF"/>
                 </a:solidFill>
                 <a:latin typeface="Arial"/>
               </a:rPr>
-              <a:t>what the checklist actually tests.</a:t>
-            </a:r>
-          </a:p>
-        </p:txBody>
-      </p:sp>
-      <p:sp>
-        <p:nvSpPr>
-          <p:cNvPr id="14" name="TextBox 13"/>
+              <a:t>→</a:t>
+            </a:r>
+          </a:p>
+        </p:txBody>
+      </p:sp>
+      <p:sp>
+        <p:nvSpPr>
+          <p:cNvPr id="18" name="Rounded Rectangle 17"/>
+          <p:cNvSpPr/>
+          <p:nvPr/>
+        </p:nvSpPr>
+        <p:spPr>
+          <a:xfrm>
+            <a:off x="6464808" y="1920240"/>
+            <a:ext cx="2542032" cy="2907792"/>
+          </a:xfrm>
+          <a:prstGeom prst="roundRect">
+            <a:avLst>
+              <a:gd name="adj" fmla="val 12000"/>
+            </a:avLst>
+          </a:prstGeom>
+          <a:solidFill>
+            <a:srgbClr val="172238"/>
+          </a:solidFill>
+          <a:ln>
+            <a:noFill/>
+          </a:ln>
+        </p:spPr>
+        <p:style>
+          <a:lnRef idx="1">
+            <a:schemeClr val="accent1"/>
+          </a:lnRef>
+          <a:fillRef idx="3">
+            <a:schemeClr val="accent1"/>
+          </a:fillRef>
+          <a:effectRef idx="2">
+            <a:schemeClr val="accent1"/>
+          </a:effectRef>
+          <a:fontRef idx="minor">
+            <a:schemeClr val="lt1"/>
+          </a:fontRef>
+        </p:style>
+        <p:txBody>
+          <a:bodyPr rtlCol="0" anchor="ctr"/>
+          <a:lstStyle/>
+          <a:p>
+            <a:pPr algn="ctr"/>
+          </a:p>
+        </p:txBody>
+      </p:sp>
+      <p:sp>
+        <p:nvSpPr>
+          <p:cNvPr id="19" name="Oval 18"/>
+          <p:cNvSpPr/>
+          <p:nvPr/>
+        </p:nvSpPr>
+        <p:spPr>
+          <a:xfrm>
+            <a:off x="7351776" y="2176272"/>
+            <a:ext cx="713232" cy="713232"/>
+          </a:xfrm>
+          <a:prstGeom prst="ellipse">
+            <a:avLst/>
+          </a:prstGeom>
+          <a:solidFill>
+            <a:srgbClr val="FFC96E"/>
+          </a:solidFill>
+          <a:ln>
+            <a:noFill/>
+          </a:ln>
+        </p:spPr>
+        <p:style>
+          <a:lnRef idx="1">
+            <a:schemeClr val="accent1"/>
+          </a:lnRef>
+          <a:fillRef idx="3">
+            <a:schemeClr val="accent1"/>
+          </a:fillRef>
+          <a:effectRef idx="2">
+            <a:schemeClr val="accent1"/>
+          </a:effectRef>
+          <a:fontRef idx="minor">
+            <a:schemeClr val="lt1"/>
+          </a:fontRef>
+        </p:style>
+        <p:txBody>
+          <a:bodyPr rtlCol="0" anchor="ctr"/>
+          <a:lstStyle/>
+          <a:p>
+            <a:pPr algn="ctr"/>
+          </a:p>
+        </p:txBody>
+      </p:sp>
+      <p:sp>
+        <p:nvSpPr>
+          <p:cNvPr id="20" name="TextBox 19"/>
           <p:cNvSpPr txBox="1"/>
           <p:nvPr/>
         </p:nvSpPr>
         <p:spPr>
           <a:xfrm>
-            <a:off x="5733288" y="3044952"/>
-            <a:ext cx="731520" cy="777240"/>
+            <a:off x="7461504" y="2267712"/>
+            <a:ext cx="475488" cy="457200"/>
           </a:xfrm>
           <a:prstGeom prst="rect">
             <a:avLst/>
@@ -5988,14 +5415,117 @@
           <a:p>
             <a:pPr algn="ctr">
               <a:lnSpc>
-                <a:spcPct val="110000"/>
+                <a:spcPct val="108000"/>
               </a:lnSpc>
               <a:spcAft>
                 <a:spcPts val="0"/>
               </a:spcAft>
             </a:pPr>
             <a:r>
-              <a:rPr sz="3800" b="0">
+              <a:rPr sz="2400" b="1">
+                <a:solidFill>
+                  <a:srgbClr val="0B1220"/>
+                </a:solidFill>
+                <a:latin typeface="Arial"/>
+              </a:rPr>
+              <a:t>3</a:t>
+            </a:r>
+          </a:p>
+        </p:txBody>
+      </p:sp>
+      <p:sp>
+        <p:nvSpPr>
+          <p:cNvPr id="21" name="TextBox 20"/>
+          <p:cNvSpPr txBox="1"/>
+          <p:nvPr/>
+        </p:nvSpPr>
+        <p:spPr>
+          <a:xfrm>
+            <a:off x="6647688" y="3273552"/>
+            <a:ext cx="2176272" cy="987552"/>
+          </a:xfrm>
+          <a:prstGeom prst="rect">
+            <a:avLst/>
+          </a:prstGeom>
+          <a:noFill/>
+        </p:spPr>
+        <p:txBody>
+          <a:bodyPr wrap="square" lIns="0" rIns="0" tIns="0" bIns="0" anchor="ctr">
+            <a:spAutoFit/>
+          </a:bodyPr>
+          <a:lstStyle/>
+          <a:p>
+            <a:pPr algn="ctr">
+              <a:lnSpc>
+                <a:spcPct val="108000"/>
+              </a:lnSpc>
+              <a:spcAft>
+                <a:spcPts val="0"/>
+              </a:spcAft>
+            </a:pPr>
+            <a:r>
+              <a:rPr sz="2200" b="1">
+                <a:solidFill>
+                  <a:srgbClr val="F6F4EF"/>
+                </a:solidFill>
+                <a:latin typeface="Arial"/>
+              </a:rPr>
+              <a:t>Hear PASS</a:t>
+            </a:r>
+          </a:p>
+          <a:p>
+            <a:pPr algn="ctr">
+              <a:lnSpc>
+                <a:spcPct val="108000"/>
+              </a:lnSpc>
+              <a:spcAft>
+                <a:spcPts val="0"/>
+              </a:spcAft>
+            </a:pPr>
+            <a:r>
+              <a:rPr sz="2200" b="1">
+                <a:solidFill>
+                  <a:srgbClr val="F6F4EF"/>
+                </a:solidFill>
+                <a:latin typeface="Arial"/>
+              </a:rPr>
+              <a:t>or FAIL</a:t>
+            </a:r>
+          </a:p>
+        </p:txBody>
+      </p:sp>
+      <p:sp>
+        <p:nvSpPr>
+          <p:cNvPr id="22" name="TextBox 21"/>
+          <p:cNvSpPr txBox="1"/>
+          <p:nvPr/>
+        </p:nvSpPr>
+        <p:spPr>
+          <a:xfrm>
+            <a:off x="9043416" y="3017520"/>
+            <a:ext cx="320040" cy="603504"/>
+          </a:xfrm>
+          <a:prstGeom prst="rect">
+            <a:avLst/>
+          </a:prstGeom>
+          <a:noFill/>
+        </p:spPr>
+        <p:txBody>
+          <a:bodyPr wrap="square" lIns="0" rIns="0" tIns="0" bIns="0" anchor="ctr">
+            <a:spAutoFit/>
+          </a:bodyPr>
+          <a:lstStyle/>
+          <a:p>
+            <a:pPr algn="ctr">
+              <a:lnSpc>
+                <a:spcPct val="108000"/>
+              </a:lnSpc>
+              <a:spcAft>
+                <a:spcPts val="0"/>
+              </a:spcAft>
+            </a:pPr>
+            <a:r>
+              <a:rPr sz="2900" b="0">
                 <a:solidFill>
                   <a:srgbClr val="77A9FF"/>
                 </a:solidFill>
@@ -6008,14 +5538,14 @@
       </p:sp>
       <p:sp>
         <p:nvSpPr>
-          <p:cNvPr id="15" name="Rounded Rectangle 14"/>
+          <p:cNvPr id="23" name="Rounded Rectangle 22"/>
           <p:cNvSpPr/>
           <p:nvPr/>
         </p:nvSpPr>
         <p:spPr>
           <a:xfrm>
-            <a:off x="6629400" y="1892807"/>
-            <a:ext cx="4846320" cy="3255264"/>
+            <a:off x="9354312" y="1920240"/>
+            <a:ext cx="2542032" cy="2907792"/>
           </a:xfrm>
           <a:prstGeom prst="roundRect">
             <a:avLst>
@@ -6023,12 +5553,10 @@
             </a:avLst>
           </a:prstGeom>
           <a:solidFill>
-            <a:srgbClr val="3D2634"/>
+            <a:srgbClr val="172238"/>
           </a:solidFill>
-          <a:ln w="15240">
-            <a:solidFill>
-              <a:srgbClr val="794458"/>
-            </a:solidFill>
+          <a:ln>
+            <a:noFill/>
           </a:ln>
         </p:spPr>
         <p:style>
@@ -6055,56 +5583,14 @@
       </p:sp>
       <p:sp>
         <p:nvSpPr>
-          <p:cNvPr id="16" name="TextBox 15"/>
-          <p:cNvSpPr txBox="1"/>
-          <p:nvPr/>
-        </p:nvSpPr>
-        <p:spPr>
-          <a:xfrm>
-            <a:off x="6949440" y="2185416"/>
-            <a:ext cx="4069080" cy="338328"/>
-          </a:xfrm>
-          <a:prstGeom prst="rect">
-            <a:avLst/>
-          </a:prstGeom>
-          <a:noFill/>
-        </p:spPr>
-        <p:txBody>
-          <a:bodyPr wrap="square" lIns="0" rIns="0" tIns="0" bIns="0" anchor="ctr">
-            <a:spAutoFit/>
-          </a:bodyPr>
-          <a:lstStyle/>
-          <a:p>
-            <a:pPr algn="l">
-              <a:lnSpc>
-                <a:spcPct val="110000"/>
-              </a:lnSpc>
-              <a:spcAft>
-                <a:spcPts val="0"/>
-              </a:spcAft>
-            </a:pPr>
-            <a:r>
-              <a:rPr sz="1400" b="1">
-                <a:solidFill>
-                  <a:srgbClr val="F7B0AC"/>
-                </a:solidFill>
-                <a:latin typeface="Arial"/>
-              </a:rPr>
-              <a:t>THE FINAL GRADE</a:t>
-            </a:r>
-          </a:p>
-        </p:txBody>
-      </p:sp>
-      <p:sp>
-        <p:nvSpPr>
-          <p:cNvPr id="17" name="Oval 16"/>
+          <p:cNvPr id="24" name="Oval 23"/>
           <p:cNvSpPr/>
           <p:nvPr/>
         </p:nvSpPr>
         <p:spPr>
           <a:xfrm>
-            <a:off x="6986016" y="2816352"/>
-            <a:ext cx="466344" cy="466344"/>
+            <a:off x="10241280" y="2176272"/>
+            <a:ext cx="713232" cy="713232"/>
           </a:xfrm>
           <a:prstGeom prst="ellipse">
             <a:avLst/>
@@ -6140,14 +5626,14 @@
       </p:sp>
       <p:sp>
         <p:nvSpPr>
-          <p:cNvPr id="18" name="TextBox 17"/>
+          <p:cNvPr id="25" name="TextBox 24"/>
           <p:cNvSpPr txBox="1"/>
           <p:nvPr/>
         </p:nvSpPr>
         <p:spPr>
           <a:xfrm>
-            <a:off x="7040880" y="2788920"/>
-            <a:ext cx="347472" cy="493776"/>
+            <a:off x="10351008" y="2267712"/>
+            <a:ext cx="475488" cy="457200"/>
           </a:xfrm>
           <a:prstGeom prst="rect">
             <a:avLst/>
@@ -6162,34 +5648,34 @@
           <a:p>
             <a:pPr algn="ctr">
               <a:lnSpc>
-                <a:spcPct val="110000"/>
+                <a:spcPct val="108000"/>
               </a:lnSpc>
               <a:spcAft>
                 <a:spcPts val="0"/>
               </a:spcAft>
             </a:pPr>
             <a:r>
-              <a:rPr sz="3000" b="1">
+              <a:rPr sz="2400" b="1">
                 <a:solidFill>
                   <a:srgbClr val="0B1220"/>
                 </a:solidFill>
                 <a:latin typeface="Arial"/>
               </a:rPr>
-              <a:t>×</a:t>
-            </a:r>
-          </a:p>
-        </p:txBody>
-      </p:sp>
-      <p:sp>
-        <p:nvSpPr>
-          <p:cNvPr id="19" name="TextBox 18"/>
+              <a:t>4</a:t>
+            </a:r>
+          </a:p>
+        </p:txBody>
+      </p:sp>
+      <p:sp>
+        <p:nvSpPr>
+          <p:cNvPr id="26" name="TextBox 25"/>
           <p:cNvSpPr txBox="1"/>
           <p:nvPr/>
         </p:nvSpPr>
         <p:spPr>
           <a:xfrm>
-            <a:off x="7635240" y="2825496"/>
-            <a:ext cx="3429000" cy="493776"/>
+            <a:off x="9537192" y="3273552"/>
+            <a:ext cx="2176272" cy="987552"/>
           </a:xfrm>
           <a:prstGeom prst="rect">
             <a:avLst/>
@@ -6202,9 +5688,9 @@
           </a:bodyPr>
           <a:lstStyle/>
           <a:p>
-            <a:pPr algn="l">
+            <a:pPr algn="ctr">
               <a:lnSpc>
-                <a:spcPct val="110000"/>
+                <a:spcPct val="108000"/>
               </a:lnSpc>
               <a:spcAft>
                 <a:spcPts val="0"/>
@@ -6217,82 +5703,40 @@
                 </a:solidFill>
                 <a:latin typeface="Arial"/>
               </a:rPr>
-              <a:t>Still marked FAIL</a:t>
-            </a:r>
-          </a:p>
-        </p:txBody>
-      </p:sp>
-      <p:sp>
-        <p:nvSpPr>
-          <p:cNvPr id="20" name="TextBox 19"/>
-          <p:cNvSpPr txBox="1"/>
-          <p:nvPr/>
-        </p:nvSpPr>
-        <p:spPr>
-          <a:xfrm>
-            <a:off x="6986016" y="3749039"/>
-            <a:ext cx="3977639" cy="868680"/>
-          </a:xfrm>
-          <a:prstGeom prst="rect">
-            <a:avLst/>
-          </a:prstGeom>
-          <a:noFill/>
-        </p:spPr>
-        <p:txBody>
-          <a:bodyPr wrap="square" lIns="0" rIns="0" tIns="0" bIns="0" anchor="ctr">
-            <a:spAutoFit/>
-          </a:bodyPr>
-          <a:lstStyle/>
-          <a:p>
-            <a:pPr algn="l">
+              <a:t>Stop or</a:t>
+            </a:r>
+          </a:p>
+          <a:p>
+            <a:pPr algn="ctr">
               <a:lnSpc>
-                <a:spcPct val="110000"/>
+                <a:spcPct val="108000"/>
               </a:lnSpc>
               <a:spcAft>
                 <a:spcPts val="0"/>
               </a:spcAft>
             </a:pPr>
             <a:r>
-              <a:rPr sz="1700" b="0">
-                <a:solidFill>
-                  <a:srgbClr val="E7B7BC"/>
+              <a:rPr sz="2200" b="1">
+                <a:solidFill>
+                  <a:srgbClr val="F6F4EF"/>
                 </a:solidFill>
                 <a:latin typeface="Arial"/>
               </a:rPr>
-              <a:t>An extra rule makes the final</a:t>
-            </a:r>
-          </a:p>
-          <a:p>
-            <a:pPr algn="l">
-              <a:lnSpc>
-                <a:spcPct val="110000"/>
-              </a:lnSpc>
-              <a:spcAft>
-                <a:spcPts val="0"/>
-              </a:spcAft>
-            </a:pPr>
-            <a:r>
-              <a:rPr sz="1700" b="0">
-                <a:solidFill>
-                  <a:srgbClr val="E7B7BC"/>
-                </a:solidFill>
-                <a:latin typeface="Arial"/>
-              </a:rPr>
-              <a:t>grade disagree with the checks.</a:t>
-            </a:r>
-          </a:p>
-        </p:txBody>
-      </p:sp>
-      <p:sp>
-        <p:nvSpPr>
-          <p:cNvPr id="21" name="Rounded Rectangle 20"/>
+              <a:t>try again</a:t>
+            </a:r>
+          </a:p>
+        </p:txBody>
+      </p:sp>
+      <p:sp>
+        <p:nvSpPr>
+          <p:cNvPr id="27" name="Rounded Rectangle 26"/>
           <p:cNvSpPr/>
           <p:nvPr/>
         </p:nvSpPr>
         <p:spPr>
           <a:xfrm>
-            <a:off x="2084831" y="5504688"/>
-            <a:ext cx="8028431" cy="420624"/>
+            <a:off x="2139696" y="5532120"/>
+            <a:ext cx="7918704" cy="457200"/>
           </a:xfrm>
           <a:prstGeom prst="roundRect">
             <a:avLst>
@@ -6330,14 +5774,14 @@
       </p:sp>
       <p:sp>
         <p:nvSpPr>
-          <p:cNvPr id="22" name="TextBox 21"/>
+          <p:cNvPr id="28" name="TextBox 27"/>
           <p:cNvSpPr txBox="1"/>
           <p:nvPr/>
         </p:nvSpPr>
         <p:spPr>
           <a:xfrm>
-            <a:off x="2176272" y="5522975"/>
-            <a:ext cx="7845552" cy="384048"/>
+            <a:off x="2240279" y="5550407"/>
+            <a:ext cx="7717536" cy="420624"/>
           </a:xfrm>
           <a:prstGeom prst="rect">
             <a:avLst/>
@@ -6352,20 +5796,20 @@
           <a:p>
             <a:pPr algn="ctr">
               <a:lnSpc>
-                <a:spcPct val="110000"/>
+                <a:spcPct val="108000"/>
               </a:lnSpc>
               <a:spcAft>
                 <a:spcPts val="0"/>
               </a:spcAft>
             </a:pPr>
             <a:r>
-              <a:rPr sz="1400" b="1">
-                <a:solidFill>
-                  <a:srgbClr val="FFC96E"/>
+              <a:rPr sz="1600" b="1">
+                <a:solidFill>
+                  <a:srgbClr val="F6F4EF"/>
                 </a:solidFill>
                 <a:latin typeface="Arial"/>
               </a:rPr>
-              <a:t>A checklist can also miss important problems.</a:t>
+              <a:t>This can happen several times in one run.</a:t>
             </a:r>
           </a:p>
         </p:txBody>
@@ -6439,8 +5883,8 @@
         </p:nvSpPr>
         <p:spPr>
           <a:xfrm>
-            <a:off x="640080" y="329184"/>
-            <a:ext cx="9966960" cy="274320"/>
+            <a:off x="640080" y="320040"/>
+            <a:ext cx="9875520" cy="274320"/>
           </a:xfrm>
           <a:prstGeom prst="rect">
             <a:avLst/>
@@ -6455,7 +5899,7 @@
           <a:p>
             <a:pPr algn="l">
               <a:lnSpc>
-                <a:spcPct val="110000"/>
+                <a:spcPct val="108000"/>
               </a:lnSpc>
               <a:spcAft>
                 <a:spcPts val="0"/>
@@ -6468,7 +5912,7 @@
                 </a:solidFill>
                 <a:latin typeface="Arial"/>
               </a:rPr>
-              <a:t>HOW IT WORKS</a:t>
+              <a:t>IMAGINE THIS</a:t>
             </a:r>
           </a:p>
         </p:txBody>
@@ -6481,8 +5925,8 @@
         </p:nvSpPr>
         <p:spPr>
           <a:xfrm>
-            <a:off x="640080" y="740664"/>
-            <a:ext cx="10927080" cy="841248"/>
+            <a:off x="640080" y="758952"/>
+            <a:ext cx="10954512" cy="822960"/>
           </a:xfrm>
           <a:prstGeom prst="rect">
             <a:avLst/>
@@ -6497,20 +5941,20 @@
           <a:p>
             <a:pPr algn="l">
               <a:lnSpc>
-                <a:spcPct val="110000"/>
+                <a:spcPct val="108000"/>
               </a:lnSpc>
               <a:spcAft>
                 <a:spcPts val="0"/>
               </a:spcAft>
             </a:pPr>
             <a:r>
-              <a:rPr sz="3300" b="1">
+              <a:rPr sz="3500" b="1">
                 <a:solidFill>
                   <a:srgbClr val="F6F4EF"/>
                 </a:solidFill>
                 <a:latin typeface="Arial"/>
               </a:rPr>
-              <a:t>An AI coder responds to the checker</a:t>
+              <a:t>A teacher checks every box...</a:t>
             </a:r>
           </a:p>
         </p:txBody>
@@ -6523,7 +5967,7 @@
         </p:nvCxnSpPr>
         <p:spPr>
           <a:xfrm>
-            <a:off x="640080" y="6473952"/>
+            <a:off x="640080" y="6464808"/>
             <a:ext cx="10908792" cy="0"/>
           </a:xfrm>
           <a:prstGeom prst="line">
@@ -6559,7 +6003,7 @@
         <p:spPr>
           <a:xfrm>
             <a:off x="658368" y="6528816"/>
-            <a:ext cx="10424160" cy="173736"/>
+            <a:ext cx="10332720" cy="173736"/>
           </a:xfrm>
           <a:prstGeom prst="rect">
             <a:avLst/>
@@ -6574,20 +6018,20 @@
           <a:p>
             <a:pPr algn="l">
               <a:lnSpc>
-                <a:spcPct val="110000"/>
+                <a:spcPct val="108000"/>
               </a:lnSpc>
               <a:spcAft>
                 <a:spcPts val="0"/>
               </a:spcAft>
             </a:pPr>
             <a:r>
-              <a:rPr sz="850" b="0">
-                <a:solidFill>
-                  <a:srgbClr val="A8B5C8"/>
+              <a:rPr sz="819" b="0">
+                <a:solidFill>
+                  <a:srgbClr val="ADB9CA"/>
                 </a:solidFill>
                 <a:latin typeface="Arial"/>
               </a:rPr>
-              <a:t>Study process: paper/final.md, Methods; README.md.</a:t>
+              <a:t>Analogy of the historical checker; source: paper/final.md, Results.</a:t>
             </a:r>
           </a:p>
         </p:txBody>
@@ -6600,8 +6044,8 @@
         </p:nvSpPr>
         <p:spPr>
           <a:xfrm>
-            <a:off x="11064240" y="6501384"/>
-            <a:ext cx="457200" cy="219456"/>
+            <a:off x="11045952" y="6510528"/>
+            <a:ext cx="457200" cy="201168"/>
           </a:xfrm>
           <a:prstGeom prst="rect">
             <a:avLst/>
@@ -6616,7 +6060,7 @@
           <a:p>
             <a:pPr algn="r">
               <a:lnSpc>
-                <a:spcPct val="110000"/>
+                <a:spcPct val="108000"/>
               </a:lnSpc>
               <a:spcAft>
                 <a:spcPts val="0"/>
@@ -6625,7 +6069,7 @@
             <a:r>
               <a:rPr sz="1000" b="0">
                 <a:solidFill>
-                  <a:srgbClr val="A8B5C8"/>
+                  <a:srgbClr val="ADB9CA"/>
                 </a:solidFill>
                 <a:latin typeface="Arial"/>
               </a:rPr>
@@ -6642,8 +6086,8 @@
         </p:nvSpPr>
         <p:spPr>
           <a:xfrm>
-            <a:off x="694944" y="2002536"/>
-            <a:ext cx="2212848" cy="2962656"/>
+            <a:off x="713232" y="1920240"/>
+            <a:ext cx="4818888" cy="3054096"/>
           </a:xfrm>
           <a:prstGeom prst="roundRect">
             <a:avLst>
@@ -6651,10 +6095,12 @@
             </a:avLst>
           </a:prstGeom>
           <a:solidFill>
-            <a:srgbClr val="172238"/>
+            <a:srgbClr val="173D3B"/>
           </a:solidFill>
-          <a:ln>
-            <a:noFill/>
+          <a:ln w="15240">
+            <a:solidFill>
+              <a:srgbClr val="2A716C"/>
+            </a:solidFill>
           </a:ln>
         </p:spPr>
         <p:style>
@@ -6681,23 +6127,195 @@
       </p:sp>
       <p:sp>
         <p:nvSpPr>
-          <p:cNvPr id="9" name="Oval 8"/>
+          <p:cNvPr id="9" name="TextBox 8"/>
+          <p:cNvSpPr txBox="1"/>
+          <p:nvPr/>
+        </p:nvSpPr>
+        <p:spPr>
+          <a:xfrm>
+            <a:off x="996696" y="2240280"/>
+            <a:ext cx="4178808" cy="384048"/>
+          </a:xfrm>
+          <a:prstGeom prst="rect">
+            <a:avLst/>
+          </a:prstGeom>
+          <a:noFill/>
+        </p:spPr>
+        <p:txBody>
+          <a:bodyPr wrap="square" lIns="0" rIns="0" tIns="0" bIns="0" anchor="ctr">
+            <a:spAutoFit/>
+          </a:bodyPr>
+          <a:lstStyle/>
+          <a:p>
+            <a:pPr algn="l">
+              <a:lnSpc>
+                <a:spcPct val="108000"/>
+              </a:lnSpc>
+              <a:spcAft>
+                <a:spcPts val="0"/>
+              </a:spcAft>
+            </a:pPr>
+            <a:r>
+              <a:rPr sz="1500" b="1">
+                <a:solidFill>
+                  <a:srgbClr val="5DDFC4"/>
+                </a:solidFill>
+                <a:latin typeface="Arial"/>
+              </a:rPr>
+              <a:t>THE CHECKLIST</a:t>
+            </a:r>
+          </a:p>
+        </p:txBody>
+      </p:sp>
+      <p:sp>
+        <p:nvSpPr>
+          <p:cNvPr id="10" name="TextBox 9"/>
+          <p:cNvSpPr txBox="1"/>
+          <p:nvPr/>
+        </p:nvSpPr>
+        <p:spPr>
+          <a:xfrm>
+            <a:off x="1143000" y="2935224"/>
+            <a:ext cx="3886200" cy="713232"/>
+          </a:xfrm>
+          <a:prstGeom prst="rect">
+            <a:avLst/>
+          </a:prstGeom>
+          <a:noFill/>
+        </p:spPr>
+        <p:txBody>
+          <a:bodyPr wrap="square" lIns="0" rIns="0" tIns="0" bIns="0" anchor="ctr">
+            <a:spAutoFit/>
+          </a:bodyPr>
+          <a:lstStyle/>
+          <a:p>
+            <a:pPr algn="ctr">
+              <a:lnSpc>
+                <a:spcPct val="108000"/>
+              </a:lnSpc>
+              <a:spcAft>
+                <a:spcPts val="0"/>
+              </a:spcAft>
+            </a:pPr>
+            <a:r>
+              <a:rPr sz="4400" b="1">
+                <a:solidFill>
+                  <a:srgbClr val="5DDFC4"/>
+                </a:solidFill>
+                <a:latin typeface="Arial"/>
+              </a:rPr>
+              <a:t>✓  ✓  ✓</a:t>
+            </a:r>
+          </a:p>
+        </p:txBody>
+      </p:sp>
+      <p:sp>
+        <p:nvSpPr>
+          <p:cNvPr id="11" name="TextBox 10"/>
+          <p:cNvSpPr txBox="1"/>
+          <p:nvPr/>
+        </p:nvSpPr>
+        <p:spPr>
+          <a:xfrm>
+            <a:off x="1069848" y="3977639"/>
+            <a:ext cx="4169663" cy="493776"/>
+          </a:xfrm>
+          <a:prstGeom prst="rect">
+            <a:avLst/>
+          </a:prstGeom>
+          <a:noFill/>
+        </p:spPr>
+        <p:txBody>
+          <a:bodyPr wrap="square" lIns="0" rIns="0" tIns="0" bIns="0" anchor="ctr">
+            <a:spAutoFit/>
+          </a:bodyPr>
+          <a:lstStyle/>
+          <a:p>
+            <a:pPr algn="ctr">
+              <a:lnSpc>
+                <a:spcPct val="108000"/>
+              </a:lnSpc>
+              <a:spcAft>
+                <a:spcPts val="0"/>
+              </a:spcAft>
+            </a:pPr>
+            <a:r>
+              <a:rPr sz="2400" b="1">
+                <a:solidFill>
+                  <a:srgbClr val="F6F4EF"/>
+                </a:solidFill>
+                <a:latin typeface="Arial"/>
+              </a:rPr>
+              <a:t>All listed checks pass.</a:t>
+            </a:r>
+          </a:p>
+        </p:txBody>
+      </p:sp>
+      <p:sp>
+        <p:nvSpPr>
+          <p:cNvPr id="12" name="TextBox 11"/>
+          <p:cNvSpPr txBox="1"/>
+          <p:nvPr/>
+        </p:nvSpPr>
+        <p:spPr>
+          <a:xfrm>
+            <a:off x="5696712" y="2916936"/>
+            <a:ext cx="777240" cy="694944"/>
+          </a:xfrm>
+          <a:prstGeom prst="rect">
+            <a:avLst/>
+          </a:prstGeom>
+          <a:noFill/>
+        </p:spPr>
+        <p:txBody>
+          <a:bodyPr wrap="square" lIns="0" rIns="0" tIns="0" bIns="0" anchor="ctr">
+            <a:spAutoFit/>
+          </a:bodyPr>
+          <a:lstStyle/>
+          <a:p>
+            <a:pPr algn="ctr">
+              <a:lnSpc>
+                <a:spcPct val="108000"/>
+              </a:lnSpc>
+              <a:spcAft>
+                <a:spcPts val="0"/>
+              </a:spcAft>
+            </a:pPr>
+            <a:r>
+              <a:rPr sz="3800" b="0">
+                <a:solidFill>
+                  <a:srgbClr val="77A9FF"/>
+                </a:solidFill>
+                <a:latin typeface="Arial"/>
+              </a:rPr>
+              <a:t>→</a:t>
+            </a:r>
+          </a:p>
+        </p:txBody>
+      </p:sp>
+      <p:sp>
+        <p:nvSpPr>
+          <p:cNvPr id="13" name="Rounded Rectangle 12"/>
           <p:cNvSpPr/>
           <p:nvPr/>
         </p:nvSpPr>
         <p:spPr>
           <a:xfrm>
-            <a:off x="1472184" y="2295144"/>
-            <a:ext cx="640080" cy="640080"/>
-          </a:xfrm>
-          <a:prstGeom prst="ellipse">
-            <a:avLst/>
+            <a:off x="6611112" y="1920240"/>
+            <a:ext cx="4818888" cy="3054096"/>
+          </a:xfrm>
+          <a:prstGeom prst="roundRect">
+            <a:avLst>
+              <a:gd name="adj" fmla="val 12000"/>
+            </a:avLst>
           </a:prstGeom>
           <a:solidFill>
-            <a:srgbClr val="77A9FF"/>
+            <a:srgbClr val="3D2634"/>
           </a:solidFill>
-          <a:ln>
-            <a:noFill/>
+          <a:ln w="15240">
+            <a:solidFill>
+              <a:srgbClr val="794458"/>
+            </a:solidFill>
           </a:ln>
         </p:spPr>
         <p:style>
@@ -6724,14 +6342,14 @@
       </p:sp>
       <p:sp>
         <p:nvSpPr>
-          <p:cNvPr id="10" name="TextBox 9"/>
+          <p:cNvPr id="14" name="TextBox 13"/>
           <p:cNvSpPr txBox="1"/>
           <p:nvPr/>
         </p:nvSpPr>
         <p:spPr>
           <a:xfrm>
-            <a:off x="1527048" y="2331720"/>
-            <a:ext cx="530352" cy="530352"/>
+            <a:off x="6940296" y="2240280"/>
+            <a:ext cx="4114800" cy="384048"/>
           </a:xfrm>
           <a:prstGeom prst="rect">
             <a:avLst/>
@@ -6744,36 +6362,36 @@
           </a:bodyPr>
           <a:lstStyle/>
           <a:p>
-            <a:pPr algn="ctr">
+            <a:pPr algn="l">
               <a:lnSpc>
-                <a:spcPct val="110000"/>
+                <a:spcPct val="108000"/>
               </a:lnSpc>
               <a:spcAft>
                 <a:spcPts val="0"/>
               </a:spcAft>
             </a:pPr>
             <a:r>
-              <a:rPr sz="2300" b="1">
-                <a:solidFill>
-                  <a:srgbClr val="0B1220"/>
+              <a:rPr sz="1500" b="1">
+                <a:solidFill>
+                  <a:srgbClr val="FF7773"/>
                 </a:solidFill>
                 <a:latin typeface="Arial"/>
               </a:rPr>
-              <a:t>1</a:t>
-            </a:r>
-          </a:p>
-        </p:txBody>
-      </p:sp>
-      <p:sp>
-        <p:nvSpPr>
-          <p:cNvPr id="11" name="TextBox 10"/>
+              <a:t>THE FINAL GRADE</a:t>
+            </a:r>
+          </a:p>
+        </p:txBody>
+      </p:sp>
+      <p:sp>
+        <p:nvSpPr>
+          <p:cNvPr id="15" name="TextBox 14"/>
           <p:cNvSpPr txBox="1"/>
           <p:nvPr/>
         </p:nvSpPr>
         <p:spPr>
           <a:xfrm>
-            <a:off x="850392" y="3154680"/>
-            <a:ext cx="1901952" cy="502920"/>
+            <a:off x="7205472" y="2944368"/>
+            <a:ext cx="3630168" cy="786384"/>
           </a:xfrm>
           <a:prstGeom prst="rect">
             <a:avLst/>
@@ -6788,34 +6406,34 @@
           <a:p>
             <a:pPr algn="ctr">
               <a:lnSpc>
-                <a:spcPct val="110000"/>
+                <a:spcPct val="108000"/>
               </a:lnSpc>
               <a:spcAft>
                 <a:spcPts val="0"/>
               </a:spcAft>
             </a:pPr>
             <a:r>
-              <a:rPr sz="1750" b="1">
-                <a:solidFill>
-                  <a:srgbClr val="F6F4EF"/>
+              <a:rPr sz="4800" b="1">
+                <a:solidFill>
+                  <a:srgbClr val="FF7773"/>
                 </a:solidFill>
                 <a:latin typeface="Arial"/>
               </a:rPr>
-              <a:t>A security task</a:t>
-            </a:r>
-          </a:p>
-        </p:txBody>
-      </p:sp>
-      <p:sp>
-        <p:nvSpPr>
-          <p:cNvPr id="12" name="TextBox 11"/>
+              <a:t>FAIL</a:t>
+            </a:r>
+          </a:p>
+        </p:txBody>
+      </p:sp>
+      <p:sp>
+        <p:nvSpPr>
+          <p:cNvPr id="16" name="TextBox 15"/>
           <p:cNvSpPr txBox="1"/>
           <p:nvPr/>
         </p:nvSpPr>
         <p:spPr>
           <a:xfrm>
-            <a:off x="850392" y="3822191"/>
-            <a:ext cx="1901952" cy="722376"/>
+            <a:off x="6912864" y="3977639"/>
+            <a:ext cx="4187952" cy="493776"/>
           </a:xfrm>
           <a:prstGeom prst="rect">
             <a:avLst/>
@@ -6830,906 +6448,107 @@
           <a:p>
             <a:pPr algn="ctr">
               <a:lnSpc>
-                <a:spcPct val="110000"/>
+                <a:spcPct val="108000"/>
               </a:lnSpc>
               <a:spcAft>
                 <a:spcPts val="0"/>
               </a:spcAft>
             </a:pPr>
             <a:r>
-              <a:rPr sz="1350" b="0">
-                <a:solidFill>
-                  <a:srgbClr val="A8B5C8"/>
+              <a:rPr sz="2400" b="1">
+                <a:solidFill>
+                  <a:srgbClr val="F6F4EF"/>
                 </a:solidFill>
                 <a:latin typeface="Arial"/>
               </a:rPr>
-              <a:t>A small piece of code</a:t>
-            </a:r>
-          </a:p>
+              <a:t>Another rule says no.</a:t>
+            </a:r>
+          </a:p>
+        </p:txBody>
+      </p:sp>
+      <p:sp>
+        <p:nvSpPr>
+          <p:cNvPr id="17" name="Rounded Rectangle 16"/>
+          <p:cNvSpPr/>
+          <p:nvPr/>
+        </p:nvSpPr>
+        <p:spPr>
+          <a:xfrm>
+            <a:off x="1874519" y="5431536"/>
+            <a:ext cx="8412480" cy="530352"/>
+          </a:xfrm>
+          <a:prstGeom prst="roundRect">
+            <a:avLst>
+              <a:gd name="adj" fmla="val 12000"/>
+            </a:avLst>
+          </a:prstGeom>
+          <a:solidFill>
+            <a:srgbClr val="1D2B45"/>
+          </a:solidFill>
+          <a:ln>
+            <a:noFill/>
+          </a:ln>
+        </p:spPr>
+        <p:style>
+          <a:lnRef idx="1">
+            <a:schemeClr val="accent1"/>
+          </a:lnRef>
+          <a:fillRef idx="3">
+            <a:schemeClr val="accent1"/>
+          </a:fillRef>
+          <a:effectRef idx="2">
+            <a:schemeClr val="accent1"/>
+          </a:effectRef>
+          <a:fontRef idx="minor">
+            <a:schemeClr val="lt1"/>
+          </a:fontRef>
+        </p:style>
+        <p:txBody>
+          <a:bodyPr rtlCol="0" anchor="ctr"/>
+          <a:lstStyle/>
+          <a:p>
+            <a:pPr algn="ctr"/>
+          </a:p>
+        </p:txBody>
+      </p:sp>
+      <p:sp>
+        <p:nvSpPr>
+          <p:cNvPr id="18" name="TextBox 17"/>
+          <p:cNvSpPr txBox="1"/>
+          <p:nvPr/>
+        </p:nvSpPr>
+        <p:spPr>
+          <a:xfrm>
+            <a:off x="1975103" y="5449824"/>
+            <a:ext cx="8211311" cy="493775"/>
+          </a:xfrm>
+          <a:prstGeom prst="rect">
+            <a:avLst/>
+          </a:prstGeom>
+          <a:noFill/>
+        </p:spPr>
+        <p:txBody>
+          <a:bodyPr wrap="square" lIns="0" rIns="0" tIns="0" bIns="0" anchor="ctr">
+            <a:spAutoFit/>
+          </a:bodyPr>
+          <a:lstStyle/>
           <a:p>
             <a:pPr algn="ctr">
               <a:lnSpc>
-                <a:spcPct val="110000"/>
+                <a:spcPct val="108000"/>
               </a:lnSpc>
               <a:spcAft>
                 <a:spcPts val="0"/>
               </a:spcAft>
             </a:pPr>
             <a:r>
-              <a:rPr sz="1350" b="0">
-                <a:solidFill>
-                  <a:srgbClr val="A8B5C8"/>
+              <a:rPr sz="1700" b="1">
+                <a:solidFill>
+                  <a:srgbClr val="FFC96E"/>
                 </a:solidFill>
                 <a:latin typeface="Arial"/>
               </a:rPr>
-              <a:t>needs repair.</a:t>
-            </a:r>
-          </a:p>
-        </p:txBody>
-      </p:sp>
-      <p:sp>
-        <p:nvSpPr>
-          <p:cNvPr id="13" name="Rounded Rectangle 12"/>
-          <p:cNvSpPr/>
-          <p:nvPr/>
-        </p:nvSpPr>
-        <p:spPr>
-          <a:xfrm>
-            <a:off x="3557016" y="2002536"/>
-            <a:ext cx="2212848" cy="2962656"/>
-          </a:xfrm>
-          <a:prstGeom prst="roundRect">
-            <a:avLst>
-              <a:gd name="adj" fmla="val 12000"/>
-            </a:avLst>
-          </a:prstGeom>
-          <a:solidFill>
-            <a:srgbClr val="172238"/>
-          </a:solidFill>
-          <a:ln>
-            <a:noFill/>
-          </a:ln>
-        </p:spPr>
-        <p:style>
-          <a:lnRef idx="1">
-            <a:schemeClr val="accent1"/>
-          </a:lnRef>
-          <a:fillRef idx="3">
-            <a:schemeClr val="accent1"/>
-          </a:fillRef>
-          <a:effectRef idx="2">
-            <a:schemeClr val="accent1"/>
-          </a:effectRef>
-          <a:fontRef idx="minor">
-            <a:schemeClr val="lt1"/>
-          </a:fontRef>
-        </p:style>
-        <p:txBody>
-          <a:bodyPr rtlCol="0" anchor="ctr"/>
-          <a:lstStyle/>
-          <a:p>
-            <a:pPr algn="ctr"/>
-          </a:p>
-        </p:txBody>
-      </p:sp>
-      <p:sp>
-        <p:nvSpPr>
-          <p:cNvPr id="14" name="Oval 13"/>
-          <p:cNvSpPr/>
-          <p:nvPr/>
-        </p:nvSpPr>
-        <p:spPr>
-          <a:xfrm>
-            <a:off x="4334256" y="2295144"/>
-            <a:ext cx="640080" cy="640080"/>
-          </a:xfrm>
-          <a:prstGeom prst="ellipse">
-            <a:avLst/>
-          </a:prstGeom>
-          <a:solidFill>
-            <a:srgbClr val="5DDFC4"/>
-          </a:solidFill>
-          <a:ln>
-            <a:noFill/>
-          </a:ln>
-        </p:spPr>
-        <p:style>
-          <a:lnRef idx="1">
-            <a:schemeClr val="accent1"/>
-          </a:lnRef>
-          <a:fillRef idx="3">
-            <a:schemeClr val="accent1"/>
-          </a:fillRef>
-          <a:effectRef idx="2">
-            <a:schemeClr val="accent1"/>
-          </a:effectRef>
-          <a:fontRef idx="minor">
-            <a:schemeClr val="lt1"/>
-          </a:fontRef>
-        </p:style>
-        <p:txBody>
-          <a:bodyPr rtlCol="0" anchor="ctr"/>
-          <a:lstStyle/>
-          <a:p>
-            <a:pPr algn="ctr"/>
-          </a:p>
-        </p:txBody>
-      </p:sp>
-      <p:sp>
-        <p:nvSpPr>
-          <p:cNvPr id="15" name="TextBox 14"/>
-          <p:cNvSpPr txBox="1"/>
-          <p:nvPr/>
-        </p:nvSpPr>
-        <p:spPr>
-          <a:xfrm>
-            <a:off x="4389120" y="2331720"/>
-            <a:ext cx="530352" cy="530352"/>
-          </a:xfrm>
-          <a:prstGeom prst="rect">
-            <a:avLst/>
-          </a:prstGeom>
-          <a:noFill/>
-        </p:spPr>
-        <p:txBody>
-          <a:bodyPr wrap="square" lIns="0" rIns="0" tIns="0" bIns="0" anchor="ctr">
-            <a:spAutoFit/>
-          </a:bodyPr>
-          <a:lstStyle/>
-          <a:p>
-            <a:pPr algn="ctr">
-              <a:lnSpc>
-                <a:spcPct val="110000"/>
-              </a:lnSpc>
-              <a:spcAft>
-                <a:spcPts val="0"/>
-              </a:spcAft>
-            </a:pPr>
-            <a:r>
-              <a:rPr sz="2300" b="1">
-                <a:solidFill>
-                  <a:srgbClr val="0B1220"/>
-                </a:solidFill>
-                <a:latin typeface="Arial"/>
-              </a:rPr>
-              <a:t>2</a:t>
-            </a:r>
-          </a:p>
-        </p:txBody>
-      </p:sp>
-      <p:sp>
-        <p:nvSpPr>
-          <p:cNvPr id="16" name="TextBox 15"/>
-          <p:cNvSpPr txBox="1"/>
-          <p:nvPr/>
-        </p:nvSpPr>
-        <p:spPr>
-          <a:xfrm>
-            <a:off x="3712464" y="3154680"/>
-            <a:ext cx="1901952" cy="502920"/>
-          </a:xfrm>
-          <a:prstGeom prst="rect">
-            <a:avLst/>
-          </a:prstGeom>
-          <a:noFill/>
-        </p:spPr>
-        <p:txBody>
-          <a:bodyPr wrap="square" lIns="0" rIns="0" tIns="0" bIns="0" anchor="ctr">
-            <a:spAutoFit/>
-          </a:bodyPr>
-          <a:lstStyle/>
-          <a:p>
-            <a:pPr algn="ctr">
-              <a:lnSpc>
-                <a:spcPct val="110000"/>
-              </a:lnSpc>
-              <a:spcAft>
-                <a:spcPts val="0"/>
-              </a:spcAft>
-            </a:pPr>
-            <a:r>
-              <a:rPr sz="1750" b="1">
-                <a:solidFill>
-                  <a:srgbClr val="F6F4EF"/>
-                </a:solidFill>
-                <a:latin typeface="Arial"/>
-              </a:rPr>
-              <a:t>AI proposes code</a:t>
-            </a:r>
-          </a:p>
-        </p:txBody>
-      </p:sp>
-      <p:sp>
-        <p:nvSpPr>
-          <p:cNvPr id="17" name="TextBox 16"/>
-          <p:cNvSpPr txBox="1"/>
-          <p:nvPr/>
-        </p:nvSpPr>
-        <p:spPr>
-          <a:xfrm>
-            <a:off x="3712464" y="3822191"/>
-            <a:ext cx="1901952" cy="722376"/>
-          </a:xfrm>
-          <a:prstGeom prst="rect">
-            <a:avLst/>
-          </a:prstGeom>
-          <a:noFill/>
-        </p:spPr>
-        <p:txBody>
-          <a:bodyPr wrap="square" lIns="0" rIns="0" tIns="0" bIns="0" anchor="ctr">
-            <a:spAutoFit/>
-          </a:bodyPr>
-          <a:lstStyle/>
-          <a:p>
-            <a:pPr algn="ctr">
-              <a:lnSpc>
-                <a:spcPct val="110000"/>
-              </a:lnSpc>
-              <a:spcAft>
-                <a:spcPts val="0"/>
-              </a:spcAft>
-            </a:pPr>
-            <a:r>
-              <a:rPr sz="1350" b="0">
-                <a:solidFill>
-                  <a:srgbClr val="A8B5C8"/>
-                </a:solidFill>
-                <a:latin typeface="Arial"/>
-              </a:rPr>
-              <a:t>The agent submits</a:t>
-            </a:r>
-          </a:p>
-          <a:p>
-            <a:pPr algn="ctr">
-              <a:lnSpc>
-                <a:spcPct val="110000"/>
-              </a:lnSpc>
-              <a:spcAft>
-                <a:spcPts val="0"/>
-              </a:spcAft>
-            </a:pPr>
-            <a:r>
-              <a:rPr sz="1350" b="0">
-                <a:solidFill>
-                  <a:srgbClr val="A8B5C8"/>
-                </a:solidFill>
-                <a:latin typeface="Arial"/>
-              </a:rPr>
-              <a:t>a candidate fix.</a:t>
-            </a:r>
-          </a:p>
-        </p:txBody>
-      </p:sp>
-      <p:sp>
-        <p:nvSpPr>
-          <p:cNvPr id="18" name="Rounded Rectangle 17"/>
-          <p:cNvSpPr/>
-          <p:nvPr/>
-        </p:nvSpPr>
-        <p:spPr>
-          <a:xfrm>
-            <a:off x="6419088" y="2002536"/>
-            <a:ext cx="2212848" cy="2962656"/>
-          </a:xfrm>
-          <a:prstGeom prst="roundRect">
-            <a:avLst>
-              <a:gd name="adj" fmla="val 12000"/>
-            </a:avLst>
-          </a:prstGeom>
-          <a:solidFill>
-            <a:srgbClr val="172238"/>
-          </a:solidFill>
-          <a:ln>
-            <a:noFill/>
-          </a:ln>
-        </p:spPr>
-        <p:style>
-          <a:lnRef idx="1">
-            <a:schemeClr val="accent1"/>
-          </a:lnRef>
-          <a:fillRef idx="3">
-            <a:schemeClr val="accent1"/>
-          </a:fillRef>
-          <a:effectRef idx="2">
-            <a:schemeClr val="accent1"/>
-          </a:effectRef>
-          <a:fontRef idx="minor">
-            <a:schemeClr val="lt1"/>
-          </a:fontRef>
-        </p:style>
-        <p:txBody>
-          <a:bodyPr rtlCol="0" anchor="ctr"/>
-          <a:lstStyle/>
-          <a:p>
-            <a:pPr algn="ctr"/>
-          </a:p>
-        </p:txBody>
-      </p:sp>
-      <p:sp>
-        <p:nvSpPr>
-          <p:cNvPr id="19" name="Oval 18"/>
-          <p:cNvSpPr/>
-          <p:nvPr/>
-        </p:nvSpPr>
-        <p:spPr>
-          <a:xfrm>
-            <a:off x="7196327" y="2295144"/>
-            <a:ext cx="640080" cy="640080"/>
-          </a:xfrm>
-          <a:prstGeom prst="ellipse">
-            <a:avLst/>
-          </a:prstGeom>
-          <a:solidFill>
-            <a:srgbClr val="FFC96E"/>
-          </a:solidFill>
-          <a:ln>
-            <a:noFill/>
-          </a:ln>
-        </p:spPr>
-        <p:style>
-          <a:lnRef idx="1">
-            <a:schemeClr val="accent1"/>
-          </a:lnRef>
-          <a:fillRef idx="3">
-            <a:schemeClr val="accent1"/>
-          </a:fillRef>
-          <a:effectRef idx="2">
-            <a:schemeClr val="accent1"/>
-          </a:effectRef>
-          <a:fontRef idx="minor">
-            <a:schemeClr val="lt1"/>
-          </a:fontRef>
-        </p:style>
-        <p:txBody>
-          <a:bodyPr rtlCol="0" anchor="ctr"/>
-          <a:lstStyle/>
-          <a:p>
-            <a:pPr algn="ctr"/>
-          </a:p>
-        </p:txBody>
-      </p:sp>
-      <p:sp>
-        <p:nvSpPr>
-          <p:cNvPr id="20" name="TextBox 19"/>
-          <p:cNvSpPr txBox="1"/>
-          <p:nvPr/>
-        </p:nvSpPr>
-        <p:spPr>
-          <a:xfrm>
-            <a:off x="7251192" y="2331720"/>
-            <a:ext cx="530352" cy="530352"/>
-          </a:xfrm>
-          <a:prstGeom prst="rect">
-            <a:avLst/>
-          </a:prstGeom>
-          <a:noFill/>
-        </p:spPr>
-        <p:txBody>
-          <a:bodyPr wrap="square" lIns="0" rIns="0" tIns="0" bIns="0" anchor="ctr">
-            <a:spAutoFit/>
-          </a:bodyPr>
-          <a:lstStyle/>
-          <a:p>
-            <a:pPr algn="ctr">
-              <a:lnSpc>
-                <a:spcPct val="110000"/>
-              </a:lnSpc>
-              <a:spcAft>
-                <a:spcPts val="0"/>
-              </a:spcAft>
-            </a:pPr>
-            <a:r>
-              <a:rPr sz="2300" b="1">
-                <a:solidFill>
-                  <a:srgbClr val="0B1220"/>
-                </a:solidFill>
-                <a:latin typeface="Arial"/>
-              </a:rPr>
-              <a:t>3</a:t>
-            </a:r>
-          </a:p>
-        </p:txBody>
-      </p:sp>
-      <p:sp>
-        <p:nvSpPr>
-          <p:cNvPr id="21" name="TextBox 20"/>
-          <p:cNvSpPr txBox="1"/>
-          <p:nvPr/>
-        </p:nvSpPr>
-        <p:spPr>
-          <a:xfrm>
-            <a:off x="6574536" y="3154680"/>
-            <a:ext cx="1901952" cy="502920"/>
-          </a:xfrm>
-          <a:prstGeom prst="rect">
-            <a:avLst/>
-          </a:prstGeom>
-          <a:noFill/>
-        </p:spPr>
-        <p:txBody>
-          <a:bodyPr wrap="square" lIns="0" rIns="0" tIns="0" bIns="0" anchor="ctr">
-            <a:spAutoFit/>
-          </a:bodyPr>
-          <a:lstStyle/>
-          <a:p>
-            <a:pPr algn="ctr">
-              <a:lnSpc>
-                <a:spcPct val="110000"/>
-              </a:lnSpc>
-              <a:spcAft>
-                <a:spcPts val="0"/>
-              </a:spcAft>
-            </a:pPr>
-            <a:r>
-              <a:rPr sz="1750" b="1">
-                <a:solidFill>
-                  <a:srgbClr val="F6F4EF"/>
-                </a:solidFill>
-                <a:latin typeface="Arial"/>
-              </a:rPr>
-              <a:t>Checker responds</a:t>
-            </a:r>
-          </a:p>
-        </p:txBody>
-      </p:sp>
-      <p:sp>
-        <p:nvSpPr>
-          <p:cNvPr id="22" name="TextBox 21"/>
-          <p:cNvSpPr txBox="1"/>
-          <p:nvPr/>
-        </p:nvSpPr>
-        <p:spPr>
-          <a:xfrm>
-            <a:off x="6574536" y="3822191"/>
-            <a:ext cx="1901952" cy="722376"/>
-          </a:xfrm>
-          <a:prstGeom prst="rect">
-            <a:avLst/>
-          </a:prstGeom>
-          <a:noFill/>
-        </p:spPr>
-        <p:txBody>
-          <a:bodyPr wrap="square" lIns="0" rIns="0" tIns="0" bIns="0" anchor="ctr">
-            <a:spAutoFit/>
-          </a:bodyPr>
-          <a:lstStyle/>
-          <a:p>
-            <a:pPr algn="ctr">
-              <a:lnSpc>
-                <a:spcPct val="110000"/>
-              </a:lnSpc>
-              <a:spcAft>
-                <a:spcPts val="0"/>
-              </a:spcAft>
-            </a:pPr>
-            <a:r>
-              <a:rPr sz="1350" b="0">
-                <a:solidFill>
-                  <a:srgbClr val="A8B5C8"/>
-                </a:solidFill>
-                <a:latin typeface="Arial"/>
-              </a:rPr>
-              <a:t>Tests and final rule</a:t>
-            </a:r>
-          </a:p>
-          <a:p>
-            <a:pPr algn="ctr">
-              <a:lnSpc>
-                <a:spcPct val="110000"/>
-              </a:lnSpc>
-              <a:spcAft>
-                <a:spcPts val="0"/>
-              </a:spcAft>
-            </a:pPr>
-            <a:r>
-              <a:rPr sz="1350" b="0">
-                <a:solidFill>
-                  <a:srgbClr val="A8B5C8"/>
-                </a:solidFill>
-                <a:latin typeface="Arial"/>
-              </a:rPr>
-              <a:t>produce feedback.</a:t>
-            </a:r>
-          </a:p>
-        </p:txBody>
-      </p:sp>
-      <p:sp>
-        <p:nvSpPr>
-          <p:cNvPr id="23" name="Rounded Rectangle 22"/>
-          <p:cNvSpPr/>
-          <p:nvPr/>
-        </p:nvSpPr>
-        <p:spPr>
-          <a:xfrm>
-            <a:off x="9281160" y="2002536"/>
-            <a:ext cx="2212848" cy="2962656"/>
-          </a:xfrm>
-          <a:prstGeom prst="roundRect">
-            <a:avLst>
-              <a:gd name="adj" fmla="val 12000"/>
-            </a:avLst>
-          </a:prstGeom>
-          <a:solidFill>
-            <a:srgbClr val="172238"/>
-          </a:solidFill>
-          <a:ln>
-            <a:noFill/>
-          </a:ln>
-        </p:spPr>
-        <p:style>
-          <a:lnRef idx="1">
-            <a:schemeClr val="accent1"/>
-          </a:lnRef>
-          <a:fillRef idx="3">
-            <a:schemeClr val="accent1"/>
-          </a:fillRef>
-          <a:effectRef idx="2">
-            <a:schemeClr val="accent1"/>
-          </a:effectRef>
-          <a:fontRef idx="minor">
-            <a:schemeClr val="lt1"/>
-          </a:fontRef>
-        </p:style>
-        <p:txBody>
-          <a:bodyPr rtlCol="0" anchor="ctr"/>
-          <a:lstStyle/>
-          <a:p>
-            <a:pPr algn="ctr"/>
-          </a:p>
-        </p:txBody>
-      </p:sp>
-      <p:sp>
-        <p:nvSpPr>
-          <p:cNvPr id="24" name="Oval 23"/>
-          <p:cNvSpPr/>
-          <p:nvPr/>
-        </p:nvSpPr>
-        <p:spPr>
-          <a:xfrm>
-            <a:off x="10058400" y="2295144"/>
-            <a:ext cx="640080" cy="640080"/>
-          </a:xfrm>
-          <a:prstGeom prst="ellipse">
-            <a:avLst/>
-          </a:prstGeom>
-          <a:solidFill>
-            <a:srgbClr val="FF7773"/>
-          </a:solidFill>
-          <a:ln>
-            <a:noFill/>
-          </a:ln>
-        </p:spPr>
-        <p:style>
-          <a:lnRef idx="1">
-            <a:schemeClr val="accent1"/>
-          </a:lnRef>
-          <a:fillRef idx="3">
-            <a:schemeClr val="accent1"/>
-          </a:fillRef>
-          <a:effectRef idx="2">
-            <a:schemeClr val="accent1"/>
-          </a:effectRef>
-          <a:fontRef idx="minor">
-            <a:schemeClr val="lt1"/>
-          </a:fontRef>
-        </p:style>
-        <p:txBody>
-          <a:bodyPr rtlCol="0" anchor="ctr"/>
-          <a:lstStyle/>
-          <a:p>
-            <a:pPr algn="ctr"/>
-          </a:p>
-        </p:txBody>
-      </p:sp>
-      <p:sp>
-        <p:nvSpPr>
-          <p:cNvPr id="25" name="TextBox 24"/>
-          <p:cNvSpPr txBox="1"/>
-          <p:nvPr/>
-        </p:nvSpPr>
-        <p:spPr>
-          <a:xfrm>
-            <a:off x="10113264" y="2331720"/>
-            <a:ext cx="530352" cy="530352"/>
-          </a:xfrm>
-          <a:prstGeom prst="rect">
-            <a:avLst/>
-          </a:prstGeom>
-          <a:noFill/>
-        </p:spPr>
-        <p:txBody>
-          <a:bodyPr wrap="square" lIns="0" rIns="0" tIns="0" bIns="0" anchor="ctr">
-            <a:spAutoFit/>
-          </a:bodyPr>
-          <a:lstStyle/>
-          <a:p>
-            <a:pPr algn="ctr">
-              <a:lnSpc>
-                <a:spcPct val="110000"/>
-              </a:lnSpc>
-              <a:spcAft>
-                <a:spcPts val="0"/>
-              </a:spcAft>
-            </a:pPr>
-            <a:r>
-              <a:rPr sz="2300" b="1">
-                <a:solidFill>
-                  <a:srgbClr val="0B1220"/>
-                </a:solidFill>
-                <a:latin typeface="Arial"/>
-              </a:rPr>
-              <a:t>4</a:t>
-            </a:r>
-          </a:p>
-        </p:txBody>
-      </p:sp>
-      <p:sp>
-        <p:nvSpPr>
-          <p:cNvPr id="26" name="TextBox 25"/>
-          <p:cNvSpPr txBox="1"/>
-          <p:nvPr/>
-        </p:nvSpPr>
-        <p:spPr>
-          <a:xfrm>
-            <a:off x="9436608" y="3154680"/>
-            <a:ext cx="1901952" cy="502920"/>
-          </a:xfrm>
-          <a:prstGeom prst="rect">
-            <a:avLst/>
-          </a:prstGeom>
-          <a:noFill/>
-        </p:spPr>
-        <p:txBody>
-          <a:bodyPr wrap="square" lIns="0" rIns="0" tIns="0" bIns="0" anchor="ctr">
-            <a:spAutoFit/>
-          </a:bodyPr>
-          <a:lstStyle/>
-          <a:p>
-            <a:pPr algn="ctr">
-              <a:lnSpc>
-                <a:spcPct val="110000"/>
-              </a:lnSpc>
-              <a:spcAft>
-                <a:spcPts val="0"/>
-              </a:spcAft>
-            </a:pPr>
-            <a:r>
-              <a:rPr sz="1750" b="1">
-                <a:solidFill>
-                  <a:srgbClr val="F6F4EF"/>
-                </a:solidFill>
-                <a:latin typeface="Arial"/>
-              </a:rPr>
-              <a:t>AI acts again</a:t>
-            </a:r>
-          </a:p>
-        </p:txBody>
-      </p:sp>
-      <p:sp>
-        <p:nvSpPr>
-          <p:cNvPr id="27" name="TextBox 26"/>
-          <p:cNvSpPr txBox="1"/>
-          <p:nvPr/>
-        </p:nvSpPr>
-        <p:spPr>
-          <a:xfrm>
-            <a:off x="9436608" y="3822191"/>
-            <a:ext cx="1901952" cy="722376"/>
-          </a:xfrm>
-          <a:prstGeom prst="rect">
-            <a:avLst/>
-          </a:prstGeom>
-          <a:noFill/>
-        </p:spPr>
-        <p:txBody>
-          <a:bodyPr wrap="square" lIns="0" rIns="0" tIns="0" bIns="0" anchor="ctr">
-            <a:spAutoFit/>
-          </a:bodyPr>
-          <a:lstStyle/>
-          <a:p>
-            <a:pPr algn="ctr">
-              <a:lnSpc>
-                <a:spcPct val="110000"/>
-              </a:lnSpc>
-              <a:spcAft>
-                <a:spcPts val="0"/>
-              </a:spcAft>
-            </a:pPr>
-            <a:r>
-              <a:rPr sz="1350" b="0">
-                <a:solidFill>
-                  <a:srgbClr val="A8B5C8"/>
-                </a:solidFill>
-                <a:latin typeface="Arial"/>
-              </a:rPr>
-              <a:t>It may revise, stop,</a:t>
-            </a:r>
-          </a:p>
-          <a:p>
-            <a:pPr algn="ctr">
-              <a:lnSpc>
-                <a:spcPct val="110000"/>
-              </a:lnSpc>
-              <a:spcAft>
-                <a:spcPts val="0"/>
-              </a:spcAft>
-            </a:pPr>
-            <a:r>
-              <a:rPr sz="1350" b="0">
-                <a:solidFill>
-                  <a:srgbClr val="A8B5C8"/>
-                </a:solidFill>
-                <a:latin typeface="Arial"/>
-              </a:rPr>
-              <a:t>or run out of time.</a:t>
-            </a:r>
-          </a:p>
-        </p:txBody>
-      </p:sp>
-      <p:sp>
-        <p:nvSpPr>
-          <p:cNvPr id="28" name="TextBox 27"/>
-          <p:cNvSpPr txBox="1"/>
-          <p:nvPr/>
-        </p:nvSpPr>
-        <p:spPr>
-          <a:xfrm>
-            <a:off x="3090672" y="2962656"/>
-            <a:ext cx="329184" cy="594360"/>
-          </a:xfrm>
-          <a:prstGeom prst="rect">
-            <a:avLst/>
-          </a:prstGeom>
-          <a:noFill/>
-        </p:spPr>
-        <p:txBody>
-          <a:bodyPr wrap="square" lIns="0" rIns="0" tIns="0" bIns="0" anchor="ctr">
-            <a:spAutoFit/>
-          </a:bodyPr>
-          <a:lstStyle/>
-          <a:p>
-            <a:pPr algn="ctr">
-              <a:lnSpc>
-                <a:spcPct val="110000"/>
-              </a:lnSpc>
-              <a:spcAft>
-                <a:spcPts val="0"/>
-              </a:spcAft>
-            </a:pPr>
-            <a:r>
-              <a:rPr sz="2700" b="0">
-                <a:solidFill>
-                  <a:srgbClr val="77A9FF"/>
-                </a:solidFill>
-                <a:latin typeface="Arial"/>
-              </a:rPr>
-              <a:t>→</a:t>
-            </a:r>
-          </a:p>
-        </p:txBody>
-      </p:sp>
-      <p:sp>
-        <p:nvSpPr>
-          <p:cNvPr id="29" name="TextBox 28"/>
-          <p:cNvSpPr txBox="1"/>
-          <p:nvPr/>
-        </p:nvSpPr>
-        <p:spPr>
-          <a:xfrm>
-            <a:off x="5952744" y="2962656"/>
-            <a:ext cx="329184" cy="594360"/>
-          </a:xfrm>
-          <a:prstGeom prst="rect">
-            <a:avLst/>
-          </a:prstGeom>
-          <a:noFill/>
-        </p:spPr>
-        <p:txBody>
-          <a:bodyPr wrap="square" lIns="0" rIns="0" tIns="0" bIns="0" anchor="ctr">
-            <a:spAutoFit/>
-          </a:bodyPr>
-          <a:lstStyle/>
-          <a:p>
-            <a:pPr algn="ctr">
-              <a:lnSpc>
-                <a:spcPct val="110000"/>
-              </a:lnSpc>
-              <a:spcAft>
-                <a:spcPts val="0"/>
-              </a:spcAft>
-            </a:pPr>
-            <a:r>
-              <a:rPr sz="2700" b="0">
-                <a:solidFill>
-                  <a:srgbClr val="77A9FF"/>
-                </a:solidFill>
-                <a:latin typeface="Arial"/>
-              </a:rPr>
-              <a:t>→</a:t>
-            </a:r>
-          </a:p>
-        </p:txBody>
-      </p:sp>
-      <p:sp>
-        <p:nvSpPr>
-          <p:cNvPr id="30" name="TextBox 29"/>
-          <p:cNvSpPr txBox="1"/>
-          <p:nvPr/>
-        </p:nvSpPr>
-        <p:spPr>
-          <a:xfrm>
-            <a:off x="8814816" y="2962656"/>
-            <a:ext cx="329184" cy="594360"/>
-          </a:xfrm>
-          <a:prstGeom prst="rect">
-            <a:avLst/>
-          </a:prstGeom>
-          <a:noFill/>
-        </p:spPr>
-        <p:txBody>
-          <a:bodyPr wrap="square" lIns="0" rIns="0" tIns="0" bIns="0" anchor="ctr">
-            <a:spAutoFit/>
-          </a:bodyPr>
-          <a:lstStyle/>
-          <a:p>
-            <a:pPr algn="ctr">
-              <a:lnSpc>
-                <a:spcPct val="110000"/>
-              </a:lnSpc>
-              <a:spcAft>
-                <a:spcPts val="0"/>
-              </a:spcAft>
-            </a:pPr>
-            <a:r>
-              <a:rPr sz="2700" b="0">
-                <a:solidFill>
-                  <a:srgbClr val="77A9FF"/>
-                </a:solidFill>
-                <a:latin typeface="Arial"/>
-              </a:rPr>
-              <a:t>→</a:t>
-            </a:r>
-          </a:p>
-        </p:txBody>
-      </p:sp>
-      <p:sp>
-        <p:nvSpPr>
-          <p:cNvPr id="31" name="TextBox 30"/>
-          <p:cNvSpPr txBox="1"/>
-          <p:nvPr/>
-        </p:nvSpPr>
-        <p:spPr>
-          <a:xfrm>
-            <a:off x="969264" y="5413248"/>
-            <a:ext cx="10250424" cy="621792"/>
-          </a:xfrm>
-          <a:prstGeom prst="rect">
-            <a:avLst/>
-          </a:prstGeom>
-          <a:noFill/>
-        </p:spPr>
-        <p:txBody>
-          <a:bodyPr wrap="square" lIns="0" rIns="0" tIns="0" bIns="0" anchor="ctr">
-            <a:spAutoFit/>
-          </a:bodyPr>
-          <a:lstStyle/>
-          <a:p>
-            <a:pPr algn="ctr">
-              <a:lnSpc>
-                <a:spcPct val="110000"/>
-              </a:lnSpc>
-              <a:spcAft>
-                <a:spcPts val="0"/>
-              </a:spcAft>
-            </a:pPr>
-            <a:r>
-              <a:rPr sz="2200" b="1">
-                <a:solidFill>
-                  <a:srgbClr val="F6F4EF"/>
-                </a:solidFill>
-                <a:latin typeface="Arial"/>
-              </a:rPr>
-              <a:t>Our research asks: what can we infer from the AI's reaction if the feedback is wrong?</a:t>
+              <a:t>The checklist covers only the things it checks.</a:t>
             </a:r>
           </a:p>
         </p:txBody>
@@ -7803,8 +6622,8 @@
         </p:nvSpPr>
         <p:spPr>
           <a:xfrm>
-            <a:off x="640080" y="329184"/>
-            <a:ext cx="9966960" cy="274320"/>
+            <a:off x="640080" y="320040"/>
+            <a:ext cx="9875520" cy="274320"/>
           </a:xfrm>
           <a:prstGeom prst="rect">
             <a:avLst/>
@@ -7819,7 +6638,7 @@
           <a:p>
             <a:pPr algn="l">
               <a:lnSpc>
-                <a:spcPct val="110000"/>
+                <a:spcPct val="108000"/>
               </a:lnSpc>
               <a:spcAft>
                 <a:spcPts val="0"/>
@@ -7832,7 +6651,7 @@
                 </a:solidFill>
                 <a:latin typeface="Arial"/>
               </a:rPr>
-              <a:t>WHAT WE EXAMINED</a:t>
+              <a:t>WHAT WE FOUND</a:t>
             </a:r>
           </a:p>
         </p:txBody>
@@ -7845,8 +6664,8 @@
         </p:nvSpPr>
         <p:spPr>
           <a:xfrm>
-            <a:off x="640080" y="740664"/>
-            <a:ext cx="10927080" cy="841248"/>
+            <a:off x="640080" y="758952"/>
+            <a:ext cx="10954512" cy="822960"/>
           </a:xfrm>
           <a:prstGeom prst="rect">
             <a:avLst/>
@@ -7861,20 +6680,20 @@
           <a:p>
             <a:pPr algn="l">
               <a:lnSpc>
-                <a:spcPct val="110000"/>
+                <a:spcPct val="108000"/>
               </a:lnSpc>
               <a:spcAft>
                 <a:spcPts val="0"/>
               </a:spcAft>
             </a:pPr>
             <a:r>
-              <a:rPr sz="3300" b="1">
+              <a:rPr sz="3500" b="1">
                 <a:solidFill>
                   <a:srgbClr val="F6F4EF"/>
                 </a:solidFill>
                 <a:latin typeface="Arial"/>
               </a:rPr>
-              <a:t>One recorded study, clearly bounded</a:t>
+              <a:t>Nine times, tests and score disagreed</a:t>
             </a:r>
           </a:p>
         </p:txBody>
@@ -7887,7 +6706,7 @@
         </p:nvCxnSpPr>
         <p:spPr>
           <a:xfrm>
-            <a:off x="640080" y="6473952"/>
+            <a:off x="640080" y="6464808"/>
             <a:ext cx="10908792" cy="0"/>
           </a:xfrm>
           <a:prstGeom prst="line">
@@ -7923,7 +6742,7 @@
         <p:spPr>
           <a:xfrm>
             <a:off x="658368" y="6528816"/>
-            <a:ext cx="10424160" cy="173736"/>
+            <a:ext cx="10332720" cy="173736"/>
           </a:xfrm>
           <a:prstGeom prst="rect">
             <a:avLst/>
@@ -7938,20 +6757,20 @@
           <a:p>
             <a:pPr algn="l">
               <a:lnSpc>
-                <a:spcPct val="110000"/>
+                <a:spcPct val="108000"/>
               </a:lnSpc>
               <a:spcAft>
                 <a:spcPts val="0"/>
               </a:spcAft>
             </a:pPr>
             <a:r>
-              <a:rPr sz="850" b="0">
-                <a:solidFill>
-                  <a:srgbClr val="A8B5C8"/>
+              <a:rPr sz="819" b="0">
+                <a:solidFill>
+                  <a:srgbClr val="ADB9CA"/>
                 </a:solidFill>
                 <a:latin typeface="Arial"/>
               </a:rPr>
-              <a:t>Historical exploratory cohort: README.md, Current result; paper/final.md, Methods.</a:t>
+              <a:t>Source: docs/MEASUREMENT_FOLLOWUP_20261030.md, §1; paper/final.md, Results.</a:t>
             </a:r>
           </a:p>
         </p:txBody>
@@ -7964,8 +6783,8 @@
         </p:nvSpPr>
         <p:spPr>
           <a:xfrm>
-            <a:off x="11064240" y="6501384"/>
-            <a:ext cx="457200" cy="219456"/>
+            <a:off x="11045952" y="6510528"/>
+            <a:ext cx="457200" cy="201168"/>
           </a:xfrm>
           <a:prstGeom prst="rect">
             <a:avLst/>
@@ -7980,7 +6799,7 @@
           <a:p>
             <a:pPr algn="r">
               <a:lnSpc>
-                <a:spcPct val="110000"/>
+                <a:spcPct val="108000"/>
               </a:lnSpc>
               <a:spcAft>
                 <a:spcPts val="0"/>
@@ -7989,7 +6808,7 @@
             <a:r>
               <a:rPr sz="1000" b="0">
                 <a:solidFill>
-                  <a:srgbClr val="A8B5C8"/>
+                  <a:srgbClr val="ADB9CA"/>
                 </a:solidFill>
                 <a:latin typeface="Arial"/>
               </a:rPr>
@@ -8006,8 +6825,8 @@
         </p:nvSpPr>
         <p:spPr>
           <a:xfrm>
-            <a:off x="704088" y="1837943"/>
-            <a:ext cx="2907792" cy="2340864"/>
+            <a:off x="713232" y="1920240"/>
+            <a:ext cx="6492240" cy="3218688"/>
           </a:xfrm>
           <a:prstGeom prst="roundRect">
             <a:avLst>
@@ -8045,14 +6864,896 @@
       </p:sp>
       <p:sp>
         <p:nvSpPr>
-          <p:cNvPr id="9" name="TextBox 8"/>
+          <p:cNvPr id="9" name="Oval 8"/>
+          <p:cNvSpPr/>
+          <p:nvPr/>
+        </p:nvSpPr>
+        <p:spPr>
+          <a:xfrm>
+            <a:off x="1115568" y="2487168"/>
+            <a:ext cx="393192" cy="393192"/>
+          </a:xfrm>
+          <a:prstGeom prst="ellipse">
+            <a:avLst/>
+          </a:prstGeom>
+          <a:solidFill>
+            <a:srgbClr val="FF7773"/>
+          </a:solidFill>
+          <a:ln>
+            <a:noFill/>
+          </a:ln>
+        </p:spPr>
+        <p:style>
+          <a:lnRef idx="1">
+            <a:schemeClr val="accent1"/>
+          </a:lnRef>
+          <a:fillRef idx="3">
+            <a:schemeClr val="accent1"/>
+          </a:fillRef>
+          <a:effectRef idx="2">
+            <a:schemeClr val="accent1"/>
+          </a:effectRef>
+          <a:fontRef idx="minor">
+            <a:schemeClr val="lt1"/>
+          </a:fontRef>
+        </p:style>
+        <p:txBody>
+          <a:bodyPr rtlCol="0" anchor="ctr"/>
+          <a:lstStyle/>
+          <a:p>
+            <a:pPr algn="ctr"/>
+          </a:p>
+        </p:txBody>
+      </p:sp>
+      <p:sp>
+        <p:nvSpPr>
+          <p:cNvPr id="10" name="Oval 9"/>
+          <p:cNvSpPr/>
+          <p:nvPr/>
+        </p:nvSpPr>
+        <p:spPr>
+          <a:xfrm>
+            <a:off x="1664207" y="2487168"/>
+            <a:ext cx="393192" cy="393192"/>
+          </a:xfrm>
+          <a:prstGeom prst="ellipse">
+            <a:avLst/>
+          </a:prstGeom>
+          <a:solidFill>
+            <a:srgbClr val="FF7773"/>
+          </a:solidFill>
+          <a:ln>
+            <a:noFill/>
+          </a:ln>
+        </p:spPr>
+        <p:style>
+          <a:lnRef idx="1">
+            <a:schemeClr val="accent1"/>
+          </a:lnRef>
+          <a:fillRef idx="3">
+            <a:schemeClr val="accent1"/>
+          </a:fillRef>
+          <a:effectRef idx="2">
+            <a:schemeClr val="accent1"/>
+          </a:effectRef>
+          <a:fontRef idx="minor">
+            <a:schemeClr val="lt1"/>
+          </a:fontRef>
+        </p:style>
+        <p:txBody>
+          <a:bodyPr rtlCol="0" anchor="ctr"/>
+          <a:lstStyle/>
+          <a:p>
+            <a:pPr algn="ctr"/>
+          </a:p>
+        </p:txBody>
+      </p:sp>
+      <p:sp>
+        <p:nvSpPr>
+          <p:cNvPr id="11" name="Oval 10"/>
+          <p:cNvSpPr/>
+          <p:nvPr/>
+        </p:nvSpPr>
+        <p:spPr>
+          <a:xfrm>
+            <a:off x="2212848" y="2487168"/>
+            <a:ext cx="393192" cy="393192"/>
+          </a:xfrm>
+          <a:prstGeom prst="ellipse">
+            <a:avLst/>
+          </a:prstGeom>
+          <a:solidFill>
+            <a:srgbClr val="FF7773"/>
+          </a:solidFill>
+          <a:ln>
+            <a:noFill/>
+          </a:ln>
+        </p:spPr>
+        <p:style>
+          <a:lnRef idx="1">
+            <a:schemeClr val="accent1"/>
+          </a:lnRef>
+          <a:fillRef idx="3">
+            <a:schemeClr val="accent1"/>
+          </a:fillRef>
+          <a:effectRef idx="2">
+            <a:schemeClr val="accent1"/>
+          </a:effectRef>
+          <a:fontRef idx="minor">
+            <a:schemeClr val="lt1"/>
+          </a:fontRef>
+        </p:style>
+        <p:txBody>
+          <a:bodyPr rtlCol="0" anchor="ctr"/>
+          <a:lstStyle/>
+          <a:p>
+            <a:pPr algn="ctr"/>
+          </a:p>
+        </p:txBody>
+      </p:sp>
+      <p:sp>
+        <p:nvSpPr>
+          <p:cNvPr id="12" name="Oval 11"/>
+          <p:cNvSpPr/>
+          <p:nvPr/>
+        </p:nvSpPr>
+        <p:spPr>
+          <a:xfrm>
+            <a:off x="2761487" y="2487168"/>
+            <a:ext cx="393192" cy="393192"/>
+          </a:xfrm>
+          <a:prstGeom prst="ellipse">
+            <a:avLst/>
+          </a:prstGeom>
+          <a:solidFill>
+            <a:srgbClr val="FF7773"/>
+          </a:solidFill>
+          <a:ln>
+            <a:noFill/>
+          </a:ln>
+        </p:spPr>
+        <p:style>
+          <a:lnRef idx="1">
+            <a:schemeClr val="accent1"/>
+          </a:lnRef>
+          <a:fillRef idx="3">
+            <a:schemeClr val="accent1"/>
+          </a:fillRef>
+          <a:effectRef idx="2">
+            <a:schemeClr val="accent1"/>
+          </a:effectRef>
+          <a:fontRef idx="minor">
+            <a:schemeClr val="lt1"/>
+          </a:fontRef>
+        </p:style>
+        <p:txBody>
+          <a:bodyPr rtlCol="0" anchor="ctr"/>
+          <a:lstStyle/>
+          <a:p>
+            <a:pPr algn="ctr"/>
+          </a:p>
+        </p:txBody>
+      </p:sp>
+      <p:sp>
+        <p:nvSpPr>
+          <p:cNvPr id="13" name="Oval 12"/>
+          <p:cNvSpPr/>
+          <p:nvPr/>
+        </p:nvSpPr>
+        <p:spPr>
+          <a:xfrm>
+            <a:off x="3310128" y="2487168"/>
+            <a:ext cx="393192" cy="393192"/>
+          </a:xfrm>
+          <a:prstGeom prst="ellipse">
+            <a:avLst/>
+          </a:prstGeom>
+          <a:solidFill>
+            <a:srgbClr val="FF7773"/>
+          </a:solidFill>
+          <a:ln>
+            <a:noFill/>
+          </a:ln>
+        </p:spPr>
+        <p:style>
+          <a:lnRef idx="1">
+            <a:schemeClr val="accent1"/>
+          </a:lnRef>
+          <a:fillRef idx="3">
+            <a:schemeClr val="accent1"/>
+          </a:fillRef>
+          <a:effectRef idx="2">
+            <a:schemeClr val="accent1"/>
+          </a:effectRef>
+          <a:fontRef idx="minor">
+            <a:schemeClr val="lt1"/>
+          </a:fontRef>
+        </p:style>
+        <p:txBody>
+          <a:bodyPr rtlCol="0" anchor="ctr"/>
+          <a:lstStyle/>
+          <a:p>
+            <a:pPr algn="ctr"/>
+          </a:p>
+        </p:txBody>
+      </p:sp>
+      <p:sp>
+        <p:nvSpPr>
+          <p:cNvPr id="14" name="Oval 13"/>
+          <p:cNvSpPr/>
+          <p:nvPr/>
+        </p:nvSpPr>
+        <p:spPr>
+          <a:xfrm>
+            <a:off x="3858768" y="2487168"/>
+            <a:ext cx="393192" cy="393192"/>
+          </a:xfrm>
+          <a:prstGeom prst="ellipse">
+            <a:avLst/>
+          </a:prstGeom>
+          <a:solidFill>
+            <a:srgbClr val="FF7773"/>
+          </a:solidFill>
+          <a:ln>
+            <a:noFill/>
+          </a:ln>
+        </p:spPr>
+        <p:style>
+          <a:lnRef idx="1">
+            <a:schemeClr val="accent1"/>
+          </a:lnRef>
+          <a:fillRef idx="3">
+            <a:schemeClr val="accent1"/>
+          </a:fillRef>
+          <a:effectRef idx="2">
+            <a:schemeClr val="accent1"/>
+          </a:effectRef>
+          <a:fontRef idx="minor">
+            <a:schemeClr val="lt1"/>
+          </a:fontRef>
+        </p:style>
+        <p:txBody>
+          <a:bodyPr rtlCol="0" anchor="ctr"/>
+          <a:lstStyle/>
+          <a:p>
+            <a:pPr algn="ctr"/>
+          </a:p>
+        </p:txBody>
+      </p:sp>
+      <p:sp>
+        <p:nvSpPr>
+          <p:cNvPr id="15" name="Oval 14"/>
+          <p:cNvSpPr/>
+          <p:nvPr/>
+        </p:nvSpPr>
+        <p:spPr>
+          <a:xfrm>
+            <a:off x="4407407" y="2487168"/>
+            <a:ext cx="393192" cy="393192"/>
+          </a:xfrm>
+          <a:prstGeom prst="ellipse">
+            <a:avLst/>
+          </a:prstGeom>
+          <a:solidFill>
+            <a:srgbClr val="FF7773"/>
+          </a:solidFill>
+          <a:ln>
+            <a:noFill/>
+          </a:ln>
+        </p:spPr>
+        <p:style>
+          <a:lnRef idx="1">
+            <a:schemeClr val="accent1"/>
+          </a:lnRef>
+          <a:fillRef idx="3">
+            <a:schemeClr val="accent1"/>
+          </a:fillRef>
+          <a:effectRef idx="2">
+            <a:schemeClr val="accent1"/>
+          </a:effectRef>
+          <a:fontRef idx="minor">
+            <a:schemeClr val="lt1"/>
+          </a:fontRef>
+        </p:style>
+        <p:txBody>
+          <a:bodyPr rtlCol="0" anchor="ctr"/>
+          <a:lstStyle/>
+          <a:p>
+            <a:pPr algn="ctr"/>
+          </a:p>
+        </p:txBody>
+      </p:sp>
+      <p:sp>
+        <p:nvSpPr>
+          <p:cNvPr id="16" name="Oval 15"/>
+          <p:cNvSpPr/>
+          <p:nvPr/>
+        </p:nvSpPr>
+        <p:spPr>
+          <a:xfrm>
+            <a:off x="4956048" y="2487168"/>
+            <a:ext cx="393192" cy="393192"/>
+          </a:xfrm>
+          <a:prstGeom prst="ellipse">
+            <a:avLst/>
+          </a:prstGeom>
+          <a:solidFill>
+            <a:srgbClr val="FF7773"/>
+          </a:solidFill>
+          <a:ln>
+            <a:noFill/>
+          </a:ln>
+        </p:spPr>
+        <p:style>
+          <a:lnRef idx="1">
+            <a:schemeClr val="accent1"/>
+          </a:lnRef>
+          <a:fillRef idx="3">
+            <a:schemeClr val="accent1"/>
+          </a:fillRef>
+          <a:effectRef idx="2">
+            <a:schemeClr val="accent1"/>
+          </a:effectRef>
+          <a:fontRef idx="minor">
+            <a:schemeClr val="lt1"/>
+          </a:fontRef>
+        </p:style>
+        <p:txBody>
+          <a:bodyPr rtlCol="0" anchor="ctr"/>
+          <a:lstStyle/>
+          <a:p>
+            <a:pPr algn="ctr"/>
+          </a:p>
+        </p:txBody>
+      </p:sp>
+      <p:sp>
+        <p:nvSpPr>
+          <p:cNvPr id="17" name="Oval 16"/>
+          <p:cNvSpPr/>
+          <p:nvPr/>
+        </p:nvSpPr>
+        <p:spPr>
+          <a:xfrm>
+            <a:off x="5504688" y="2487168"/>
+            <a:ext cx="393192" cy="393192"/>
+          </a:xfrm>
+          <a:prstGeom prst="ellipse">
+            <a:avLst/>
+          </a:prstGeom>
+          <a:solidFill>
+            <a:srgbClr val="FF7773"/>
+          </a:solidFill>
+          <a:ln>
+            <a:noFill/>
+          </a:ln>
+        </p:spPr>
+        <p:style>
+          <a:lnRef idx="1">
+            <a:schemeClr val="accent1"/>
+          </a:lnRef>
+          <a:fillRef idx="3">
+            <a:schemeClr val="accent1"/>
+          </a:fillRef>
+          <a:effectRef idx="2">
+            <a:schemeClr val="accent1"/>
+          </a:effectRef>
+          <a:fontRef idx="minor">
+            <a:schemeClr val="lt1"/>
+          </a:fontRef>
+        </p:style>
+        <p:txBody>
+          <a:bodyPr rtlCol="0" anchor="ctr"/>
+          <a:lstStyle/>
+          <a:p>
+            <a:pPr algn="ctr"/>
+          </a:p>
+        </p:txBody>
+      </p:sp>
+      <p:sp>
+        <p:nvSpPr>
+          <p:cNvPr id="18" name="Oval 17"/>
+          <p:cNvSpPr/>
+          <p:nvPr/>
+        </p:nvSpPr>
+        <p:spPr>
+          <a:xfrm>
+            <a:off x="6053327" y="2487168"/>
+            <a:ext cx="393192" cy="393192"/>
+          </a:xfrm>
+          <a:prstGeom prst="ellipse">
+            <a:avLst/>
+          </a:prstGeom>
+          <a:solidFill>
+            <a:srgbClr val="1D2B45"/>
+          </a:solidFill>
+          <a:ln w="13970">
+            <a:solidFill>
+              <a:srgbClr val="34445D"/>
+            </a:solidFill>
+          </a:ln>
+        </p:spPr>
+        <p:style>
+          <a:lnRef idx="1">
+            <a:schemeClr val="accent1"/>
+          </a:lnRef>
+          <a:fillRef idx="3">
+            <a:schemeClr val="accent1"/>
+          </a:fillRef>
+          <a:effectRef idx="2">
+            <a:schemeClr val="accent1"/>
+          </a:effectRef>
+          <a:fontRef idx="minor">
+            <a:schemeClr val="lt1"/>
+          </a:fontRef>
+        </p:style>
+        <p:txBody>
+          <a:bodyPr rtlCol="0" anchor="ctr"/>
+          <a:lstStyle/>
+          <a:p>
+            <a:pPr algn="ctr"/>
+          </a:p>
+        </p:txBody>
+      </p:sp>
+      <p:sp>
+        <p:nvSpPr>
+          <p:cNvPr id="19" name="Oval 18"/>
+          <p:cNvSpPr/>
+          <p:nvPr/>
+        </p:nvSpPr>
+        <p:spPr>
+          <a:xfrm>
+            <a:off x="1115568" y="3264408"/>
+            <a:ext cx="393192" cy="393192"/>
+          </a:xfrm>
+          <a:prstGeom prst="ellipse">
+            <a:avLst/>
+          </a:prstGeom>
+          <a:solidFill>
+            <a:srgbClr val="1D2B45"/>
+          </a:solidFill>
+          <a:ln w="13970">
+            <a:solidFill>
+              <a:srgbClr val="34445D"/>
+            </a:solidFill>
+          </a:ln>
+        </p:spPr>
+        <p:style>
+          <a:lnRef idx="1">
+            <a:schemeClr val="accent1"/>
+          </a:lnRef>
+          <a:fillRef idx="3">
+            <a:schemeClr val="accent1"/>
+          </a:fillRef>
+          <a:effectRef idx="2">
+            <a:schemeClr val="accent1"/>
+          </a:effectRef>
+          <a:fontRef idx="minor">
+            <a:schemeClr val="lt1"/>
+          </a:fontRef>
+        </p:style>
+        <p:txBody>
+          <a:bodyPr rtlCol="0" anchor="ctr"/>
+          <a:lstStyle/>
+          <a:p>
+            <a:pPr algn="ctr"/>
+          </a:p>
+        </p:txBody>
+      </p:sp>
+      <p:sp>
+        <p:nvSpPr>
+          <p:cNvPr id="20" name="Oval 19"/>
+          <p:cNvSpPr/>
+          <p:nvPr/>
+        </p:nvSpPr>
+        <p:spPr>
+          <a:xfrm>
+            <a:off x="1664207" y="3264408"/>
+            <a:ext cx="393192" cy="393192"/>
+          </a:xfrm>
+          <a:prstGeom prst="ellipse">
+            <a:avLst/>
+          </a:prstGeom>
+          <a:solidFill>
+            <a:srgbClr val="1D2B45"/>
+          </a:solidFill>
+          <a:ln w="13970">
+            <a:solidFill>
+              <a:srgbClr val="34445D"/>
+            </a:solidFill>
+          </a:ln>
+        </p:spPr>
+        <p:style>
+          <a:lnRef idx="1">
+            <a:schemeClr val="accent1"/>
+          </a:lnRef>
+          <a:fillRef idx="3">
+            <a:schemeClr val="accent1"/>
+          </a:fillRef>
+          <a:effectRef idx="2">
+            <a:schemeClr val="accent1"/>
+          </a:effectRef>
+          <a:fontRef idx="minor">
+            <a:schemeClr val="lt1"/>
+          </a:fontRef>
+        </p:style>
+        <p:txBody>
+          <a:bodyPr rtlCol="0" anchor="ctr"/>
+          <a:lstStyle/>
+          <a:p>
+            <a:pPr algn="ctr"/>
+          </a:p>
+        </p:txBody>
+      </p:sp>
+      <p:sp>
+        <p:nvSpPr>
+          <p:cNvPr id="21" name="Oval 20"/>
+          <p:cNvSpPr/>
+          <p:nvPr/>
+        </p:nvSpPr>
+        <p:spPr>
+          <a:xfrm>
+            <a:off x="2212848" y="3264408"/>
+            <a:ext cx="393192" cy="393192"/>
+          </a:xfrm>
+          <a:prstGeom prst="ellipse">
+            <a:avLst/>
+          </a:prstGeom>
+          <a:solidFill>
+            <a:srgbClr val="1D2B45"/>
+          </a:solidFill>
+          <a:ln w="13970">
+            <a:solidFill>
+              <a:srgbClr val="34445D"/>
+            </a:solidFill>
+          </a:ln>
+        </p:spPr>
+        <p:style>
+          <a:lnRef idx="1">
+            <a:schemeClr val="accent1"/>
+          </a:lnRef>
+          <a:fillRef idx="3">
+            <a:schemeClr val="accent1"/>
+          </a:fillRef>
+          <a:effectRef idx="2">
+            <a:schemeClr val="accent1"/>
+          </a:effectRef>
+          <a:fontRef idx="minor">
+            <a:schemeClr val="lt1"/>
+          </a:fontRef>
+        </p:style>
+        <p:txBody>
+          <a:bodyPr rtlCol="0" anchor="ctr"/>
+          <a:lstStyle/>
+          <a:p>
+            <a:pPr algn="ctr"/>
+          </a:p>
+        </p:txBody>
+      </p:sp>
+      <p:sp>
+        <p:nvSpPr>
+          <p:cNvPr id="22" name="Oval 21"/>
+          <p:cNvSpPr/>
+          <p:nvPr/>
+        </p:nvSpPr>
+        <p:spPr>
+          <a:xfrm>
+            <a:off x="2761487" y="3264408"/>
+            <a:ext cx="393192" cy="393192"/>
+          </a:xfrm>
+          <a:prstGeom prst="ellipse">
+            <a:avLst/>
+          </a:prstGeom>
+          <a:solidFill>
+            <a:srgbClr val="1D2B45"/>
+          </a:solidFill>
+          <a:ln w="13970">
+            <a:solidFill>
+              <a:srgbClr val="34445D"/>
+            </a:solidFill>
+          </a:ln>
+        </p:spPr>
+        <p:style>
+          <a:lnRef idx="1">
+            <a:schemeClr val="accent1"/>
+          </a:lnRef>
+          <a:fillRef idx="3">
+            <a:schemeClr val="accent1"/>
+          </a:fillRef>
+          <a:effectRef idx="2">
+            <a:schemeClr val="accent1"/>
+          </a:effectRef>
+          <a:fontRef idx="minor">
+            <a:schemeClr val="lt1"/>
+          </a:fontRef>
+        </p:style>
+        <p:txBody>
+          <a:bodyPr rtlCol="0" anchor="ctr"/>
+          <a:lstStyle/>
+          <a:p>
+            <a:pPr algn="ctr"/>
+          </a:p>
+        </p:txBody>
+      </p:sp>
+      <p:sp>
+        <p:nvSpPr>
+          <p:cNvPr id="23" name="Oval 22"/>
+          <p:cNvSpPr/>
+          <p:nvPr/>
+        </p:nvSpPr>
+        <p:spPr>
+          <a:xfrm>
+            <a:off x="3310128" y="3264408"/>
+            <a:ext cx="393192" cy="393192"/>
+          </a:xfrm>
+          <a:prstGeom prst="ellipse">
+            <a:avLst/>
+          </a:prstGeom>
+          <a:solidFill>
+            <a:srgbClr val="1D2B45"/>
+          </a:solidFill>
+          <a:ln w="13970">
+            <a:solidFill>
+              <a:srgbClr val="34445D"/>
+            </a:solidFill>
+          </a:ln>
+        </p:spPr>
+        <p:style>
+          <a:lnRef idx="1">
+            <a:schemeClr val="accent1"/>
+          </a:lnRef>
+          <a:fillRef idx="3">
+            <a:schemeClr val="accent1"/>
+          </a:fillRef>
+          <a:effectRef idx="2">
+            <a:schemeClr val="accent1"/>
+          </a:effectRef>
+          <a:fontRef idx="minor">
+            <a:schemeClr val="lt1"/>
+          </a:fontRef>
+        </p:style>
+        <p:txBody>
+          <a:bodyPr rtlCol="0" anchor="ctr"/>
+          <a:lstStyle/>
+          <a:p>
+            <a:pPr algn="ctr"/>
+          </a:p>
+        </p:txBody>
+      </p:sp>
+      <p:sp>
+        <p:nvSpPr>
+          <p:cNvPr id="24" name="Oval 23"/>
+          <p:cNvSpPr/>
+          <p:nvPr/>
+        </p:nvSpPr>
+        <p:spPr>
+          <a:xfrm>
+            <a:off x="3858768" y="3264408"/>
+            <a:ext cx="393192" cy="393192"/>
+          </a:xfrm>
+          <a:prstGeom prst="ellipse">
+            <a:avLst/>
+          </a:prstGeom>
+          <a:solidFill>
+            <a:srgbClr val="1D2B45"/>
+          </a:solidFill>
+          <a:ln w="13970">
+            <a:solidFill>
+              <a:srgbClr val="34445D"/>
+            </a:solidFill>
+          </a:ln>
+        </p:spPr>
+        <p:style>
+          <a:lnRef idx="1">
+            <a:schemeClr val="accent1"/>
+          </a:lnRef>
+          <a:fillRef idx="3">
+            <a:schemeClr val="accent1"/>
+          </a:fillRef>
+          <a:effectRef idx="2">
+            <a:schemeClr val="accent1"/>
+          </a:effectRef>
+          <a:fontRef idx="minor">
+            <a:schemeClr val="lt1"/>
+          </a:fontRef>
+        </p:style>
+        <p:txBody>
+          <a:bodyPr rtlCol="0" anchor="ctr"/>
+          <a:lstStyle/>
+          <a:p>
+            <a:pPr algn="ctr"/>
+          </a:p>
+        </p:txBody>
+      </p:sp>
+      <p:sp>
+        <p:nvSpPr>
+          <p:cNvPr id="25" name="Oval 24"/>
+          <p:cNvSpPr/>
+          <p:nvPr/>
+        </p:nvSpPr>
+        <p:spPr>
+          <a:xfrm>
+            <a:off x="4407407" y="3264408"/>
+            <a:ext cx="393192" cy="393192"/>
+          </a:xfrm>
+          <a:prstGeom prst="ellipse">
+            <a:avLst/>
+          </a:prstGeom>
+          <a:solidFill>
+            <a:srgbClr val="1D2B45"/>
+          </a:solidFill>
+          <a:ln w="13970">
+            <a:solidFill>
+              <a:srgbClr val="34445D"/>
+            </a:solidFill>
+          </a:ln>
+        </p:spPr>
+        <p:style>
+          <a:lnRef idx="1">
+            <a:schemeClr val="accent1"/>
+          </a:lnRef>
+          <a:fillRef idx="3">
+            <a:schemeClr val="accent1"/>
+          </a:fillRef>
+          <a:effectRef idx="2">
+            <a:schemeClr val="accent1"/>
+          </a:effectRef>
+          <a:fontRef idx="minor">
+            <a:schemeClr val="lt1"/>
+          </a:fontRef>
+        </p:style>
+        <p:txBody>
+          <a:bodyPr rtlCol="0" anchor="ctr"/>
+          <a:lstStyle/>
+          <a:p>
+            <a:pPr algn="ctr"/>
+          </a:p>
+        </p:txBody>
+      </p:sp>
+      <p:sp>
+        <p:nvSpPr>
+          <p:cNvPr id="26" name="Oval 25"/>
+          <p:cNvSpPr/>
+          <p:nvPr/>
+        </p:nvSpPr>
+        <p:spPr>
+          <a:xfrm>
+            <a:off x="4956048" y="3264408"/>
+            <a:ext cx="393192" cy="393192"/>
+          </a:xfrm>
+          <a:prstGeom prst="ellipse">
+            <a:avLst/>
+          </a:prstGeom>
+          <a:solidFill>
+            <a:srgbClr val="1D2B45"/>
+          </a:solidFill>
+          <a:ln w="13970">
+            <a:solidFill>
+              <a:srgbClr val="34445D"/>
+            </a:solidFill>
+          </a:ln>
+        </p:spPr>
+        <p:style>
+          <a:lnRef idx="1">
+            <a:schemeClr val="accent1"/>
+          </a:lnRef>
+          <a:fillRef idx="3">
+            <a:schemeClr val="accent1"/>
+          </a:fillRef>
+          <a:effectRef idx="2">
+            <a:schemeClr val="accent1"/>
+          </a:effectRef>
+          <a:fontRef idx="minor">
+            <a:schemeClr val="lt1"/>
+          </a:fontRef>
+        </p:style>
+        <p:txBody>
+          <a:bodyPr rtlCol="0" anchor="ctr"/>
+          <a:lstStyle/>
+          <a:p>
+            <a:pPr algn="ctr"/>
+          </a:p>
+        </p:txBody>
+      </p:sp>
+      <p:sp>
+        <p:nvSpPr>
+          <p:cNvPr id="27" name="Oval 26"/>
+          <p:cNvSpPr/>
+          <p:nvPr/>
+        </p:nvSpPr>
+        <p:spPr>
+          <a:xfrm>
+            <a:off x="5504688" y="3264408"/>
+            <a:ext cx="393192" cy="393192"/>
+          </a:xfrm>
+          <a:prstGeom prst="ellipse">
+            <a:avLst/>
+          </a:prstGeom>
+          <a:solidFill>
+            <a:srgbClr val="1D2B45"/>
+          </a:solidFill>
+          <a:ln w="13970">
+            <a:solidFill>
+              <a:srgbClr val="34445D"/>
+            </a:solidFill>
+          </a:ln>
+        </p:spPr>
+        <p:style>
+          <a:lnRef idx="1">
+            <a:schemeClr val="accent1"/>
+          </a:lnRef>
+          <a:fillRef idx="3">
+            <a:schemeClr val="accent1"/>
+          </a:fillRef>
+          <a:effectRef idx="2">
+            <a:schemeClr val="accent1"/>
+          </a:effectRef>
+          <a:fontRef idx="minor">
+            <a:schemeClr val="lt1"/>
+          </a:fontRef>
+        </p:style>
+        <p:txBody>
+          <a:bodyPr rtlCol="0" anchor="ctr"/>
+          <a:lstStyle/>
+          <a:p>
+            <a:pPr algn="ctr"/>
+          </a:p>
+        </p:txBody>
+      </p:sp>
+      <p:sp>
+        <p:nvSpPr>
+          <p:cNvPr id="28" name="Oval 27"/>
+          <p:cNvSpPr/>
+          <p:nvPr/>
+        </p:nvSpPr>
+        <p:spPr>
+          <a:xfrm>
+            <a:off x="6053327" y="3264408"/>
+            <a:ext cx="393192" cy="393192"/>
+          </a:xfrm>
+          <a:prstGeom prst="ellipse">
+            <a:avLst/>
+          </a:prstGeom>
+          <a:solidFill>
+            <a:srgbClr val="1D2B45"/>
+          </a:solidFill>
+          <a:ln w="13970">
+            <a:solidFill>
+              <a:srgbClr val="34445D"/>
+            </a:solidFill>
+          </a:ln>
+        </p:spPr>
+        <p:style>
+          <a:lnRef idx="1">
+            <a:schemeClr val="accent1"/>
+          </a:lnRef>
+          <a:fillRef idx="3">
+            <a:schemeClr val="accent1"/>
+          </a:fillRef>
+          <a:effectRef idx="2">
+            <a:schemeClr val="accent1"/>
+          </a:effectRef>
+          <a:fontRef idx="minor">
+            <a:schemeClr val="lt1"/>
+          </a:fontRef>
+        </p:style>
+        <p:txBody>
+          <a:bodyPr rtlCol="0" anchor="ctr"/>
+          <a:lstStyle/>
+          <a:p>
+            <a:pPr algn="ctr"/>
+          </a:p>
+        </p:txBody>
+      </p:sp>
+      <p:sp>
+        <p:nvSpPr>
+          <p:cNvPr id="29" name="TextBox 28"/>
           <p:cNvSpPr txBox="1"/>
           <p:nvPr/>
         </p:nvSpPr>
         <p:spPr>
           <a:xfrm>
-            <a:off x="923544" y="2075688"/>
-            <a:ext cx="2468880" cy="896112"/>
+            <a:off x="1069848" y="4334256"/>
+            <a:ext cx="5650992" cy="475488"/>
           </a:xfrm>
           <a:prstGeom prst="rect">
             <a:avLst/>
@@ -8065,36 +7766,36 @@
           </a:bodyPr>
           <a:lstStyle/>
           <a:p>
-            <a:pPr algn="ctr">
+            <a:pPr algn="l">
               <a:lnSpc>
-                <a:spcPct val="110000"/>
+                <a:spcPct val="108000"/>
               </a:lnSpc>
               <a:spcAft>
                 <a:spcPts val="0"/>
               </a:spcAft>
             </a:pPr>
             <a:r>
-              <a:rPr sz="5500" b="1">
-                <a:solidFill>
-                  <a:srgbClr val="77A9FF"/>
+              <a:rPr sz="1900" b="0">
+                <a:solidFill>
+                  <a:srgbClr val="ADB9CA"/>
                 </a:solidFill>
                 <a:latin typeface="Arial"/>
               </a:rPr>
-              <a:t>40</a:t>
-            </a:r>
-          </a:p>
-        </p:txBody>
-      </p:sp>
-      <p:sp>
-        <p:nvSpPr>
-          <p:cNvPr id="10" name="TextBox 9"/>
+              <a:t>20 runs had the extra "no" rule</a:t>
+            </a:r>
+          </a:p>
+        </p:txBody>
+      </p:sp>
+      <p:sp>
+        <p:nvSpPr>
+          <p:cNvPr id="30" name="TextBox 29"/>
           <p:cNvSpPr txBox="1"/>
           <p:nvPr/>
         </p:nvSpPr>
         <p:spPr>
           <a:xfrm>
-            <a:off x="941832" y="3136392"/>
-            <a:ext cx="2432304" cy="713232"/>
+            <a:off x="7589520" y="2240280"/>
+            <a:ext cx="3794760" cy="868680"/>
           </a:xfrm>
           <a:prstGeom prst="rect">
             <a:avLst/>
@@ -8109,433 +7810,95 @@
           <a:p>
             <a:pPr algn="ctr">
               <a:lnSpc>
-                <a:spcPct val="110000"/>
+                <a:spcPct val="108000"/>
               </a:lnSpc>
               <a:spcAft>
                 <a:spcPts val="0"/>
               </a:spcAft>
             </a:pPr>
             <a:r>
-              <a:rPr sz="1700" b="1">
-                <a:solidFill>
-                  <a:srgbClr val="F6F4EF"/>
+              <a:rPr sz="4900" b="1">
+                <a:solidFill>
+                  <a:srgbClr val="FF7773"/>
                 </a:solidFill>
                 <a:latin typeface="Arial"/>
               </a:rPr>
-              <a:t>recorded repair</a:t>
-            </a:r>
-          </a:p>
+              <a:t>9 of 20</a:t>
+            </a:r>
+          </a:p>
+        </p:txBody>
+      </p:sp>
+      <p:sp>
+        <p:nvSpPr>
+          <p:cNvPr id="31" name="TextBox 30"/>
+          <p:cNvSpPr txBox="1"/>
+          <p:nvPr/>
+        </p:nvSpPr>
+        <p:spPr>
+          <a:xfrm>
+            <a:off x="7498079" y="3291840"/>
+            <a:ext cx="3913632" cy="1097280"/>
+          </a:xfrm>
+          <a:prstGeom prst="rect">
+            <a:avLst/>
+          </a:prstGeom>
+          <a:noFill/>
+        </p:spPr>
+        <p:txBody>
+          <a:bodyPr wrap="square" lIns="0" rIns="0" tIns="0" bIns="0" anchor="ctr">
+            <a:spAutoFit/>
+          </a:bodyPr>
+          <a:lstStyle/>
           <a:p>
             <a:pPr algn="ctr">
               <a:lnSpc>
-                <a:spcPct val="110000"/>
+                <a:spcPct val="108000"/>
               </a:lnSpc>
               <a:spcAft>
                 <a:spcPts val="0"/>
               </a:spcAft>
             </a:pPr>
             <a:r>
-              <a:rPr sz="1700" b="1">
+              <a:rPr sz="2400" b="1">
                 <a:solidFill>
                   <a:srgbClr val="F6F4EF"/>
                 </a:solidFill>
                 <a:latin typeface="Arial"/>
               </a:rPr>
-              <a:t>episodes</a:t>
-            </a:r>
-          </a:p>
-        </p:txBody>
-      </p:sp>
-      <p:sp>
-        <p:nvSpPr>
-          <p:cNvPr id="11" name="Rounded Rectangle 10"/>
-          <p:cNvSpPr/>
-          <p:nvPr/>
-        </p:nvSpPr>
-        <p:spPr>
-          <a:xfrm>
-            <a:off x="4151376" y="1837943"/>
-            <a:ext cx="2907792" cy="2340864"/>
-          </a:xfrm>
-          <a:prstGeom prst="roundRect">
-            <a:avLst>
-              <a:gd name="adj" fmla="val 12000"/>
-            </a:avLst>
-          </a:prstGeom>
-          <a:solidFill>
-            <a:srgbClr val="172238"/>
-          </a:solidFill>
-          <a:ln>
-            <a:noFill/>
-          </a:ln>
-        </p:spPr>
-        <p:style>
-          <a:lnRef idx="1">
-            <a:schemeClr val="accent1"/>
-          </a:lnRef>
-          <a:fillRef idx="3">
-            <a:schemeClr val="accent1"/>
-          </a:fillRef>
-          <a:effectRef idx="2">
-            <a:schemeClr val="accent1"/>
-          </a:effectRef>
-          <a:fontRef idx="minor">
-            <a:schemeClr val="lt1"/>
-          </a:fontRef>
-        </p:style>
-        <p:txBody>
-          <a:bodyPr rtlCol="0" anchor="ctr"/>
-          <a:lstStyle/>
-          <a:p>
-            <a:pPr algn="ctr"/>
-          </a:p>
-        </p:txBody>
-      </p:sp>
-      <p:sp>
-        <p:nvSpPr>
-          <p:cNvPr id="12" name="TextBox 11"/>
-          <p:cNvSpPr txBox="1"/>
-          <p:nvPr/>
-        </p:nvSpPr>
-        <p:spPr>
-          <a:xfrm>
-            <a:off x="4370832" y="2075688"/>
-            <a:ext cx="2468880" cy="896112"/>
-          </a:xfrm>
-          <a:prstGeom prst="rect">
-            <a:avLst/>
-          </a:prstGeom>
-          <a:noFill/>
-        </p:spPr>
-        <p:txBody>
-          <a:bodyPr wrap="square" lIns="0" rIns="0" tIns="0" bIns="0" anchor="ctr">
-            <a:spAutoFit/>
-          </a:bodyPr>
-          <a:lstStyle/>
+              <a:t>passed our written tests</a:t>
+            </a:r>
+          </a:p>
           <a:p>
             <a:pPr algn="ctr">
               <a:lnSpc>
-                <a:spcPct val="110000"/>
+                <a:spcPct val="108000"/>
               </a:lnSpc>
               <a:spcAft>
                 <a:spcPts val="0"/>
               </a:spcAft>
             </a:pPr>
             <a:r>
-              <a:rPr sz="5500" b="1">
-                <a:solidFill>
-                  <a:srgbClr val="5DDFC4"/>
+              <a:rPr sz="2400" b="1">
+                <a:solidFill>
+                  <a:srgbClr val="F6F4EF"/>
                 </a:solidFill>
                 <a:latin typeface="Arial"/>
               </a:rPr>
-              <a:t>5</a:t>
-            </a:r>
-          </a:p>
-        </p:txBody>
-      </p:sp>
-      <p:sp>
-        <p:nvSpPr>
-          <p:cNvPr id="13" name="TextBox 12"/>
-          <p:cNvSpPr txBox="1"/>
-          <p:nvPr/>
-        </p:nvSpPr>
-        <p:spPr>
-          <a:xfrm>
-            <a:off x="4389120" y="3136392"/>
-            <a:ext cx="2432304" cy="713232"/>
-          </a:xfrm>
-          <a:prstGeom prst="rect">
-            <a:avLst/>
-          </a:prstGeom>
-          <a:noFill/>
-        </p:spPr>
-        <p:txBody>
-          <a:bodyPr wrap="square" lIns="0" rIns="0" tIns="0" bIns="0" anchor="ctr">
-            <a:spAutoFit/>
-          </a:bodyPr>
-          <a:lstStyle/>
-          <a:p>
-            <a:pPr algn="ctr">
-              <a:lnSpc>
-                <a:spcPct val="110000"/>
-              </a:lnSpc>
-              <a:spcAft>
-                <a:spcPts val="0"/>
-              </a:spcAft>
-            </a:pPr>
-            <a:r>
-              <a:rPr sz="1700" b="1">
-                <a:solidFill>
-                  <a:srgbClr val="F6F4EF"/>
-                </a:solidFill>
-                <a:latin typeface="Arial"/>
-              </a:rPr>
-              <a:t>selected security</a:t>
-            </a:r>
-          </a:p>
-          <a:p>
-            <a:pPr algn="ctr">
-              <a:lnSpc>
-                <a:spcPct val="110000"/>
-              </a:lnSpc>
-              <a:spcAft>
-                <a:spcPts val="0"/>
-              </a:spcAft>
-            </a:pPr>
-            <a:r>
-              <a:rPr sz="1700" b="1">
-                <a:solidFill>
-                  <a:srgbClr val="F6F4EF"/>
-                </a:solidFill>
-                <a:latin typeface="Arial"/>
-              </a:rPr>
-              <a:t>task families</a:t>
-            </a:r>
-          </a:p>
-        </p:txBody>
-      </p:sp>
-      <p:sp>
-        <p:nvSpPr>
-          <p:cNvPr id="14" name="Rounded Rectangle 13"/>
+              <a:t>but still got FAIL</a:t>
+            </a:r>
+          </a:p>
+        </p:txBody>
+      </p:sp>
+      <p:sp>
+        <p:nvSpPr>
+          <p:cNvPr id="32" name="Rounded Rectangle 31"/>
           <p:cNvSpPr/>
           <p:nvPr/>
         </p:nvSpPr>
         <p:spPr>
           <a:xfrm>
-            <a:off x="7598664" y="1837943"/>
-            <a:ext cx="2907792" cy="2340864"/>
-          </a:xfrm>
-          <a:prstGeom prst="roundRect">
-            <a:avLst>
-              <a:gd name="adj" fmla="val 12000"/>
-            </a:avLst>
-          </a:prstGeom>
-          <a:solidFill>
-            <a:srgbClr val="172238"/>
-          </a:solidFill>
-          <a:ln>
-            <a:noFill/>
-          </a:ln>
-        </p:spPr>
-        <p:style>
-          <a:lnRef idx="1">
-            <a:schemeClr val="accent1"/>
-          </a:lnRef>
-          <a:fillRef idx="3">
-            <a:schemeClr val="accent1"/>
-          </a:fillRef>
-          <a:effectRef idx="2">
-            <a:schemeClr val="accent1"/>
-          </a:effectRef>
-          <a:fontRef idx="minor">
-            <a:schemeClr val="lt1"/>
-          </a:fontRef>
-        </p:style>
-        <p:txBody>
-          <a:bodyPr rtlCol="0" anchor="ctr"/>
-          <a:lstStyle/>
-          <a:p>
-            <a:pPr algn="ctr"/>
-          </a:p>
-        </p:txBody>
-      </p:sp>
-      <p:sp>
-        <p:nvSpPr>
-          <p:cNvPr id="15" name="TextBox 14"/>
-          <p:cNvSpPr txBox="1"/>
-          <p:nvPr/>
-        </p:nvSpPr>
-        <p:spPr>
-          <a:xfrm>
-            <a:off x="7818120" y="2075688"/>
-            <a:ext cx="2468880" cy="896112"/>
-          </a:xfrm>
-          <a:prstGeom prst="rect">
-            <a:avLst/>
-          </a:prstGeom>
-          <a:noFill/>
-        </p:spPr>
-        <p:txBody>
-          <a:bodyPr wrap="square" lIns="0" rIns="0" tIns="0" bIns="0" anchor="ctr">
-            <a:spAutoFit/>
-          </a:bodyPr>
-          <a:lstStyle/>
-          <a:p>
-            <a:pPr algn="ctr">
-              <a:lnSpc>
-                <a:spcPct val="110000"/>
-              </a:lnSpc>
-              <a:spcAft>
-                <a:spcPts val="0"/>
-              </a:spcAft>
-            </a:pPr>
-            <a:r>
-              <a:rPr sz="5500" b="1">
-                <a:solidFill>
-                  <a:srgbClr val="FFC96E"/>
-                </a:solidFill>
-                <a:latin typeface="Arial"/>
-              </a:rPr>
-              <a:t>1</a:t>
-            </a:r>
-          </a:p>
-        </p:txBody>
-      </p:sp>
-      <p:sp>
-        <p:nvSpPr>
-          <p:cNvPr id="16" name="TextBox 15"/>
-          <p:cNvSpPr txBox="1"/>
-          <p:nvPr/>
-        </p:nvSpPr>
-        <p:spPr>
-          <a:xfrm>
-            <a:off x="7836408" y="3136392"/>
-            <a:ext cx="2432304" cy="713232"/>
-          </a:xfrm>
-          <a:prstGeom prst="rect">
-            <a:avLst/>
-          </a:prstGeom>
-          <a:noFill/>
-        </p:spPr>
-        <p:txBody>
-          <a:bodyPr wrap="square" lIns="0" rIns="0" tIns="0" bIns="0" anchor="ctr">
-            <a:spAutoFit/>
-          </a:bodyPr>
-          <a:lstStyle/>
-          <a:p>
-            <a:pPr algn="ctr">
-              <a:lnSpc>
-                <a:spcPct val="110000"/>
-              </a:lnSpc>
-              <a:spcAft>
-                <a:spcPts val="0"/>
-              </a:spcAft>
-            </a:pPr>
-            <a:r>
-              <a:rPr sz="1700" b="1">
-                <a:solidFill>
-                  <a:srgbClr val="F6F4EF"/>
-                </a:solidFill>
-                <a:latin typeface="Arial"/>
-              </a:rPr>
-              <a:t>local coding</a:t>
-            </a:r>
-          </a:p>
-          <a:p>
-            <a:pPr algn="ctr">
-              <a:lnSpc>
-                <a:spcPct val="110000"/>
-              </a:lnSpc>
-              <a:spcAft>
-                <a:spcPts val="0"/>
-              </a:spcAft>
-            </a:pPr>
-            <a:r>
-              <a:rPr sz="1700" b="1">
-                <a:solidFill>
-                  <a:srgbClr val="F6F4EF"/>
-                </a:solidFill>
-                <a:latin typeface="Arial"/>
-              </a:rPr>
-              <a:t>model</a:t>
-            </a:r>
-          </a:p>
-        </p:txBody>
-      </p:sp>
-      <p:sp>
-        <p:nvSpPr>
-          <p:cNvPr id="17" name="TextBox 16"/>
-          <p:cNvSpPr txBox="1"/>
-          <p:nvPr/>
-        </p:nvSpPr>
-        <p:spPr>
-          <a:xfrm>
-            <a:off x="713232" y="4645152"/>
-            <a:ext cx="10789920" cy="347472"/>
-          </a:xfrm>
-          <a:prstGeom prst="rect">
-            <a:avLst/>
-          </a:prstGeom>
-          <a:noFill/>
-        </p:spPr>
-        <p:txBody>
-          <a:bodyPr wrap="square" lIns="0" rIns="0" tIns="0" bIns="0" anchor="ctr">
-            <a:spAutoFit/>
-          </a:bodyPr>
-          <a:lstStyle/>
-          <a:p>
-            <a:pPr algn="l">
-              <a:lnSpc>
-                <a:spcPct val="110000"/>
-              </a:lnSpc>
-              <a:spcAft>
-                <a:spcPts val="0"/>
-              </a:spcAft>
-            </a:pPr>
-            <a:r>
-              <a:rPr sz="1900" b="0">
-                <a:solidFill>
-                  <a:srgbClr val="A8B5C8"/>
-                </a:solidFill>
-                <a:latin typeface="Arial"/>
-              </a:rPr>
-              <a:t>The five families covered key derivation, nonce handling, weak randomness,</a:t>
-            </a:r>
-          </a:p>
-        </p:txBody>
-      </p:sp>
-      <p:sp>
-        <p:nvSpPr>
-          <p:cNvPr id="18" name="TextBox 17"/>
-          <p:cNvSpPr txBox="1"/>
-          <p:nvPr/>
-        </p:nvSpPr>
-        <p:spPr>
-          <a:xfrm>
-            <a:off x="713232" y="5010912"/>
-            <a:ext cx="10789920" cy="347472"/>
-          </a:xfrm>
-          <a:prstGeom prst="rect">
-            <a:avLst/>
-          </a:prstGeom>
-          <a:noFill/>
-        </p:spPr>
-        <p:txBody>
-          <a:bodyPr wrap="square" lIns="0" rIns="0" tIns="0" bIns="0" anchor="ctr">
-            <a:spAutoFit/>
-          </a:bodyPr>
-          <a:lstStyle/>
-          <a:p>
-            <a:pPr algn="l">
-              <a:lnSpc>
-                <a:spcPct val="110000"/>
-              </a:lnSpc>
-              <a:spcAft>
-                <a:spcPts val="0"/>
-              </a:spcAft>
-            </a:pPr>
-            <a:r>
-              <a:rPr sz="1900" b="0">
-                <a:solidFill>
-                  <a:srgbClr val="A8B5C8"/>
-                </a:solidFill>
-                <a:latin typeface="Arial"/>
-              </a:rPr>
-              <a:t>SQL injection, and cross-site scripting.</a:t>
-            </a:r>
-          </a:p>
-        </p:txBody>
-      </p:sp>
-      <p:sp>
-        <p:nvSpPr>
-          <p:cNvPr id="19" name="Rounded Rectangle 18"/>
-          <p:cNvSpPr/>
-          <p:nvPr/>
-        </p:nvSpPr>
-        <p:spPr>
-          <a:xfrm>
-            <a:off x="713232" y="5650992"/>
-            <a:ext cx="3767328" cy="411480"/>
+            <a:off x="3017520" y="5504688"/>
+            <a:ext cx="6144768" cy="484632"/>
           </a:xfrm>
           <a:prstGeom prst="roundRect">
             <a:avLst>
@@ -8573,14 +7936,14 @@
       </p:sp>
       <p:sp>
         <p:nvSpPr>
-          <p:cNvPr id="20" name="TextBox 19"/>
+          <p:cNvPr id="33" name="TextBox 32"/>
           <p:cNvSpPr txBox="1"/>
           <p:nvPr/>
         </p:nvSpPr>
         <p:spPr>
           <a:xfrm>
-            <a:off x="804672" y="5669279"/>
-            <a:ext cx="3584448" cy="374904"/>
+            <a:off x="3118103" y="5522975"/>
+            <a:ext cx="5943600" cy="448056"/>
           </a:xfrm>
           <a:prstGeom prst="rect">
             <a:avLst/>
@@ -8595,20 +7958,20 @@
           <a:p>
             <a:pPr algn="ctr">
               <a:lnSpc>
-                <a:spcPct val="110000"/>
+                <a:spcPct val="108000"/>
               </a:lnSpc>
               <a:spcAft>
                 <a:spcPts val="0"/>
               </a:spcAft>
             </a:pPr>
             <a:r>
-              <a:rPr sz="1200" b="1">
+              <a:rPr sz="1700" b="1">
                 <a:solidFill>
                   <a:srgbClr val="77A9FF"/>
                 </a:solidFill>
                 <a:latin typeface="Arial"/>
               </a:rPr>
-              <a:t>HISTORICAL EXPLORATORY DATA</a:t>
+              <a:t>We reviewed 40 AI runs in total.</a:t>
             </a:r>
           </a:p>
         </p:txBody>
@@ -8682,8 +8045,8 @@
         </p:nvSpPr>
         <p:spPr>
           <a:xfrm>
-            <a:off x="640080" y="329184"/>
-            <a:ext cx="9966960" cy="274320"/>
+            <a:off x="640080" y="320040"/>
+            <a:ext cx="9875520" cy="274320"/>
           </a:xfrm>
           <a:prstGeom prst="rect">
             <a:avLst/>
@@ -8698,7 +8061,7 @@
           <a:p>
             <a:pPr algn="l">
               <a:lnSpc>
-                <a:spcPct val="110000"/>
+                <a:spcPct val="108000"/>
               </a:lnSpc>
               <a:spcAft>
                 <a:spcPts val="0"/>
@@ -8711,7 +8074,7 @@
                 </a:solidFill>
                 <a:latin typeface="Arial"/>
               </a:rPr>
-              <a:t>THE FINDING</a:t>
+              <a:t>WHY</a:t>
             </a:r>
           </a:p>
         </p:txBody>
@@ -8724,8 +8087,8 @@
         </p:nvSpPr>
         <p:spPr>
           <a:xfrm>
-            <a:off x="640080" y="740664"/>
-            <a:ext cx="10927080" cy="841248"/>
+            <a:off x="640080" y="758952"/>
+            <a:ext cx="10954512" cy="822960"/>
           </a:xfrm>
           <a:prstGeom prst="rect">
             <a:avLst/>
@@ -8740,20 +8103,20 @@
           <a:p>
             <a:pPr algn="l">
               <a:lnSpc>
-                <a:spcPct val="110000"/>
+                <a:spcPct val="108000"/>
               </a:lnSpc>
               <a:spcAft>
                 <a:spcPts val="0"/>
               </a:spcAft>
             </a:pPr>
             <a:r>
-              <a:rPr sz="3000" b="1">
+              <a:rPr sz="3500" b="1">
                 <a:solidFill>
                   <a:srgbClr val="F6F4EF"/>
                 </a:solidFill>
                 <a:latin typeface="Arial"/>
               </a:rPr>
-              <a:t>Tests passed. The final answer was still FAIL.</a:t>
+              <a:t>Our checker had an extra rule</a:t>
             </a:r>
           </a:p>
         </p:txBody>
@@ -8766,7 +8129,7 @@
         </p:nvCxnSpPr>
         <p:spPr>
           <a:xfrm>
-            <a:off x="640080" y="6473952"/>
+            <a:off x="640080" y="6464808"/>
             <a:ext cx="10908792" cy="0"/>
           </a:xfrm>
           <a:prstGeom prst="line">
@@ -8802,7 +8165,7 @@
         <p:spPr>
           <a:xfrm>
             <a:off x="658368" y="6528816"/>
-            <a:ext cx="10424160" cy="173736"/>
+            <a:ext cx="10332720" cy="173736"/>
           </a:xfrm>
           <a:prstGeom prst="rect">
             <a:avLst/>
@@ -8817,20 +8180,20 @@
           <a:p>
             <a:pPr algn="l">
               <a:lnSpc>
-                <a:spcPct val="110000"/>
+                <a:spcPct val="108000"/>
               </a:lnSpc>
               <a:spcAft>
                 <a:spcPts val="0"/>
               </a:spcAft>
             </a:pPr>
             <a:r>
-              <a:rPr sz="850" b="0">
-                <a:solidFill>
-                  <a:srgbClr val="A8B5C8"/>
+              <a:rPr sz="819" b="0">
+                <a:solidFill>
+                  <a:srgbClr val="ADB9CA"/>
                 </a:solidFill>
                 <a:latin typeface="Arial"/>
               </a:rPr>
-              <a:t>Counts: docs/MEASUREMENT_FOLLOWUP_20261030.md, §1; paper/final.md, Results.</a:t>
+              <a:t>Source: paper/final.md, Results; docs/PROJECT_OVERVIEW_20261029.md.</a:t>
             </a:r>
           </a:p>
         </p:txBody>
@@ -8843,8 +8206,8 @@
         </p:nvSpPr>
         <p:spPr>
           <a:xfrm>
-            <a:off x="11064240" y="6501384"/>
-            <a:ext cx="457200" cy="219456"/>
+            <a:off x="11045952" y="6510528"/>
+            <a:ext cx="457200" cy="201168"/>
           </a:xfrm>
           <a:prstGeom prst="rect">
             <a:avLst/>
@@ -8859,7 +8222,7 @@
           <a:p>
             <a:pPr algn="r">
               <a:lnSpc>
-                <a:spcPct val="110000"/>
+                <a:spcPct val="108000"/>
               </a:lnSpc>
               <a:spcAft>
                 <a:spcPts val="0"/>
@@ -8868,7 +8231,7 @@
             <a:r>
               <a:rPr sz="1000" b="0">
                 <a:solidFill>
-                  <a:srgbClr val="A8B5C8"/>
+                  <a:srgbClr val="ADB9CA"/>
                 </a:solidFill>
                 <a:latin typeface="Arial"/>
               </a:rPr>
@@ -8885,8 +8248,8 @@
         </p:nvSpPr>
         <p:spPr>
           <a:xfrm>
-            <a:off x="713232" y="1810512"/>
-            <a:ext cx="6583680" cy="3410712"/>
+            <a:off x="749808" y="1892807"/>
+            <a:ext cx="4882896" cy="1856231"/>
           </a:xfrm>
           <a:prstGeom prst="roundRect">
             <a:avLst>
@@ -8894,10 +8257,12 @@
             </a:avLst>
           </a:prstGeom>
           <a:solidFill>
-            <a:srgbClr val="172238"/>
+            <a:srgbClr val="173D3B"/>
           </a:solidFill>
-          <a:ln>
-            <a:noFill/>
+          <a:ln w="15240">
+            <a:solidFill>
+              <a:srgbClr val="2A716C"/>
+            </a:solidFill>
           </a:ln>
         </p:spPr>
         <p:style>
@@ -8924,23 +8289,153 @@
       </p:sp>
       <p:sp>
         <p:nvSpPr>
-          <p:cNvPr id="9" name="Oval 8"/>
+          <p:cNvPr id="9" name="TextBox 8"/>
+          <p:cNvSpPr txBox="1"/>
+          <p:nvPr/>
+        </p:nvSpPr>
+        <p:spPr>
+          <a:xfrm>
+            <a:off x="1069848" y="2203704"/>
+            <a:ext cx="4261104" cy="393192"/>
+          </a:xfrm>
+          <a:prstGeom prst="rect">
+            <a:avLst/>
+          </a:prstGeom>
+          <a:noFill/>
+        </p:spPr>
+        <p:txBody>
+          <a:bodyPr wrap="square" lIns="0" rIns="0" tIns="0" bIns="0" anchor="ctr">
+            <a:spAutoFit/>
+          </a:bodyPr>
+          <a:lstStyle/>
+          <a:p>
+            <a:pPr algn="ctr">
+              <a:lnSpc>
+                <a:spcPct val="108000"/>
+              </a:lnSpc>
+              <a:spcAft>
+                <a:spcPts val="0"/>
+              </a:spcAft>
+            </a:pPr>
+            <a:r>
+              <a:rPr sz="1700" b="1">
+                <a:solidFill>
+                  <a:srgbClr val="5DDFC4"/>
+                </a:solidFill>
+                <a:latin typeface="Arial"/>
+              </a:rPr>
+              <a:t>WRITTEN TESTS</a:t>
+            </a:r>
+          </a:p>
+        </p:txBody>
+      </p:sp>
+      <p:sp>
+        <p:nvSpPr>
+          <p:cNvPr id="10" name="TextBox 9"/>
+          <p:cNvSpPr txBox="1"/>
+          <p:nvPr/>
+        </p:nvSpPr>
+        <p:spPr>
+          <a:xfrm>
+            <a:off x="1069848" y="2761488"/>
+            <a:ext cx="4261104" cy="640080"/>
+          </a:xfrm>
+          <a:prstGeom prst="rect">
+            <a:avLst/>
+          </a:prstGeom>
+          <a:noFill/>
+        </p:spPr>
+        <p:txBody>
+          <a:bodyPr wrap="square" lIns="0" rIns="0" tIns="0" bIns="0" anchor="ctr">
+            <a:spAutoFit/>
+          </a:bodyPr>
+          <a:lstStyle/>
+          <a:p>
+            <a:pPr algn="ctr">
+              <a:lnSpc>
+                <a:spcPct val="108000"/>
+              </a:lnSpc>
+              <a:spcAft>
+                <a:spcPts val="0"/>
+              </a:spcAft>
+            </a:pPr>
+            <a:r>
+              <a:rPr sz="3500" b="1">
+                <a:solidFill>
+                  <a:srgbClr val="5DDFC4"/>
+                </a:solidFill>
+                <a:latin typeface="Arial"/>
+              </a:rPr>
+              <a:t>PASS</a:t>
+            </a:r>
+          </a:p>
+        </p:txBody>
+      </p:sp>
+      <p:sp>
+        <p:nvSpPr>
+          <p:cNvPr id="11" name="TextBox 10"/>
+          <p:cNvSpPr txBox="1"/>
+          <p:nvPr/>
+        </p:nvSpPr>
+        <p:spPr>
+          <a:xfrm>
+            <a:off x="5742432" y="2478024"/>
+            <a:ext cx="621792" cy="603504"/>
+          </a:xfrm>
+          <a:prstGeom prst="rect">
+            <a:avLst/>
+          </a:prstGeom>
+          <a:noFill/>
+        </p:spPr>
+        <p:txBody>
+          <a:bodyPr wrap="square" lIns="0" rIns="0" tIns="0" bIns="0" anchor="ctr">
+            <a:spAutoFit/>
+          </a:bodyPr>
+          <a:lstStyle/>
+          <a:p>
+            <a:pPr algn="ctr">
+              <a:lnSpc>
+                <a:spcPct val="108000"/>
+              </a:lnSpc>
+              <a:spcAft>
+                <a:spcPts val="0"/>
+              </a:spcAft>
+            </a:pPr>
+            <a:r>
+              <a:rPr sz="3300" b="0">
+                <a:solidFill>
+                  <a:srgbClr val="ADB9CA"/>
+                </a:solidFill>
+                <a:latin typeface="Arial"/>
+              </a:rPr>
+              <a:t>+</a:t>
+            </a:r>
+          </a:p>
+        </p:txBody>
+      </p:sp>
+      <p:sp>
+        <p:nvSpPr>
+          <p:cNvPr id="12" name="Rounded Rectangle 11"/>
           <p:cNvSpPr/>
           <p:nvPr/>
         </p:nvSpPr>
         <p:spPr>
           <a:xfrm>
-            <a:off x="1152144" y="2450592"/>
-            <a:ext cx="393192" cy="393192"/>
-          </a:xfrm>
-          <a:prstGeom prst="ellipse">
-            <a:avLst/>
+            <a:off x="6464808" y="1892807"/>
+            <a:ext cx="4882896" cy="1856231"/>
+          </a:xfrm>
+          <a:prstGeom prst="roundRect">
+            <a:avLst>
+              <a:gd name="adj" fmla="val 12000"/>
+            </a:avLst>
           </a:prstGeom>
           <a:solidFill>
-            <a:srgbClr val="FF7773"/>
+            <a:srgbClr val="3D2634"/>
           </a:solidFill>
-          <a:ln>
-            <a:noFill/>
+          <a:ln w="15240">
+            <a:solidFill>
+              <a:srgbClr val="794458"/>
+            </a:solidFill>
           </a:ln>
         </p:spPr>
         <p:style>
@@ -8967,20 +8462,148 @@
       </p:sp>
       <p:sp>
         <p:nvSpPr>
-          <p:cNvPr id="10" name="Oval 9"/>
+          <p:cNvPr id="13" name="TextBox 12"/>
+          <p:cNvSpPr txBox="1"/>
+          <p:nvPr/>
+        </p:nvSpPr>
+        <p:spPr>
+          <a:xfrm>
+            <a:off x="6784848" y="2203704"/>
+            <a:ext cx="4242816" cy="393192"/>
+          </a:xfrm>
+          <a:prstGeom prst="rect">
+            <a:avLst/>
+          </a:prstGeom>
+          <a:noFill/>
+        </p:spPr>
+        <p:txBody>
+          <a:bodyPr wrap="square" lIns="0" rIns="0" tIns="0" bIns="0" anchor="ctr">
+            <a:spAutoFit/>
+          </a:bodyPr>
+          <a:lstStyle/>
+          <a:p>
+            <a:pPr algn="ctr">
+              <a:lnSpc>
+                <a:spcPct val="108000"/>
+              </a:lnSpc>
+              <a:spcAft>
+                <a:spcPts val="0"/>
+              </a:spcAft>
+            </a:pPr>
+            <a:r>
+              <a:rPr sz="1700" b="1">
+                <a:solidFill>
+                  <a:srgbClr val="FF7773"/>
+                </a:solidFill>
+                <a:latin typeface="Arial"/>
+              </a:rPr>
+              <a:t>OUR EXTRA RULE</a:t>
+            </a:r>
+          </a:p>
+        </p:txBody>
+      </p:sp>
+      <p:sp>
+        <p:nvSpPr>
+          <p:cNvPr id="14" name="TextBox 13"/>
+          <p:cNvSpPr txBox="1"/>
+          <p:nvPr/>
+        </p:nvSpPr>
+        <p:spPr>
+          <a:xfrm>
+            <a:off x="6784848" y="2761488"/>
+            <a:ext cx="4242816" cy="640080"/>
+          </a:xfrm>
+          <a:prstGeom prst="rect">
+            <a:avLst/>
+          </a:prstGeom>
+          <a:noFill/>
+        </p:spPr>
+        <p:txBody>
+          <a:bodyPr wrap="square" lIns="0" rIns="0" tIns="0" bIns="0" anchor="ctr">
+            <a:spAutoFit/>
+          </a:bodyPr>
+          <a:lstStyle/>
+          <a:p>
+            <a:pPr algn="ctr">
+              <a:lnSpc>
+                <a:spcPct val="108000"/>
+              </a:lnSpc>
+              <a:spcAft>
+                <a:spcPts val="0"/>
+              </a:spcAft>
+            </a:pPr>
+            <a:r>
+              <a:rPr sz="3500" b="1">
+                <a:solidFill>
+                  <a:srgbClr val="FF7773"/>
+                </a:solidFill>
+                <a:latin typeface="Arial"/>
+              </a:rPr>
+              <a:t>NO</a:t>
+            </a:r>
+          </a:p>
+        </p:txBody>
+      </p:sp>
+      <p:sp>
+        <p:nvSpPr>
+          <p:cNvPr id="15" name="TextBox 14"/>
+          <p:cNvSpPr txBox="1"/>
+          <p:nvPr/>
+        </p:nvSpPr>
+        <p:spPr>
+          <a:xfrm>
+            <a:off x="3145536" y="4078224"/>
+            <a:ext cx="5897880" cy="713232"/>
+          </a:xfrm>
+          <a:prstGeom prst="rect">
+            <a:avLst/>
+          </a:prstGeom>
+          <a:noFill/>
+        </p:spPr>
+        <p:txBody>
+          <a:bodyPr wrap="square" lIns="0" rIns="0" tIns="0" bIns="0" anchor="ctr">
+            <a:spAutoFit/>
+          </a:bodyPr>
+          <a:lstStyle/>
+          <a:p>
+            <a:pPr algn="ctr">
+              <a:lnSpc>
+                <a:spcPct val="108000"/>
+              </a:lnSpc>
+              <a:spcAft>
+                <a:spcPts val="0"/>
+              </a:spcAft>
+            </a:pPr>
+            <a:r>
+              <a:rPr sz="3200" b="1">
+                <a:solidFill>
+                  <a:srgbClr val="FF7773"/>
+                </a:solidFill>
+                <a:latin typeface="Arial"/>
+              </a:rPr>
+              <a:t>=  FINAL FAIL</a:t>
+            </a:r>
+          </a:p>
+        </p:txBody>
+      </p:sp>
+      <p:sp>
+        <p:nvSpPr>
+          <p:cNvPr id="16" name="Rounded Rectangle 15"/>
           <p:cNvSpPr/>
           <p:nvPr/>
         </p:nvSpPr>
         <p:spPr>
           <a:xfrm>
-            <a:off x="1709928" y="2450592"/>
-            <a:ext cx="393192" cy="393192"/>
-          </a:xfrm>
-          <a:prstGeom prst="ellipse">
-            <a:avLst/>
+            <a:off x="1874519" y="5458968"/>
+            <a:ext cx="8449056" cy="521207"/>
+          </a:xfrm>
+          <a:prstGeom prst="roundRect">
+            <a:avLst>
+              <a:gd name="adj" fmla="val 12000"/>
+            </a:avLst>
           </a:prstGeom>
           <a:solidFill>
-            <a:srgbClr val="FF7773"/>
+            <a:srgbClr val="1D2B45"/>
           </a:solidFill>
           <a:ln>
             <a:noFill/>
@@ -9010,810 +8633,14 @@
       </p:sp>
       <p:sp>
         <p:nvSpPr>
-          <p:cNvPr id="11" name="Oval 10"/>
-          <p:cNvSpPr/>
-          <p:nvPr/>
-        </p:nvSpPr>
-        <p:spPr>
-          <a:xfrm>
-            <a:off x="2267712" y="2450592"/>
-            <a:ext cx="393192" cy="393192"/>
-          </a:xfrm>
-          <a:prstGeom prst="ellipse">
-            <a:avLst/>
-          </a:prstGeom>
-          <a:solidFill>
-            <a:srgbClr val="FF7773"/>
-          </a:solidFill>
-          <a:ln>
-            <a:noFill/>
-          </a:ln>
-        </p:spPr>
-        <p:style>
-          <a:lnRef idx="1">
-            <a:schemeClr val="accent1"/>
-          </a:lnRef>
-          <a:fillRef idx="3">
-            <a:schemeClr val="accent1"/>
-          </a:fillRef>
-          <a:effectRef idx="2">
-            <a:schemeClr val="accent1"/>
-          </a:effectRef>
-          <a:fontRef idx="minor">
-            <a:schemeClr val="lt1"/>
-          </a:fontRef>
-        </p:style>
-        <p:txBody>
-          <a:bodyPr rtlCol="0" anchor="ctr"/>
-          <a:lstStyle/>
-          <a:p>
-            <a:pPr algn="ctr"/>
-          </a:p>
-        </p:txBody>
-      </p:sp>
-      <p:sp>
-        <p:nvSpPr>
-          <p:cNvPr id="12" name="Oval 11"/>
-          <p:cNvSpPr/>
-          <p:nvPr/>
-        </p:nvSpPr>
-        <p:spPr>
-          <a:xfrm>
-            <a:off x="2825496" y="2450592"/>
-            <a:ext cx="393192" cy="393192"/>
-          </a:xfrm>
-          <a:prstGeom prst="ellipse">
-            <a:avLst/>
-          </a:prstGeom>
-          <a:solidFill>
-            <a:srgbClr val="FF7773"/>
-          </a:solidFill>
-          <a:ln>
-            <a:noFill/>
-          </a:ln>
-        </p:spPr>
-        <p:style>
-          <a:lnRef idx="1">
-            <a:schemeClr val="accent1"/>
-          </a:lnRef>
-          <a:fillRef idx="3">
-            <a:schemeClr val="accent1"/>
-          </a:fillRef>
-          <a:effectRef idx="2">
-            <a:schemeClr val="accent1"/>
-          </a:effectRef>
-          <a:fontRef idx="minor">
-            <a:schemeClr val="lt1"/>
-          </a:fontRef>
-        </p:style>
-        <p:txBody>
-          <a:bodyPr rtlCol="0" anchor="ctr"/>
-          <a:lstStyle/>
-          <a:p>
-            <a:pPr algn="ctr"/>
-          </a:p>
-        </p:txBody>
-      </p:sp>
-      <p:sp>
-        <p:nvSpPr>
-          <p:cNvPr id="13" name="Oval 12"/>
-          <p:cNvSpPr/>
-          <p:nvPr/>
-        </p:nvSpPr>
-        <p:spPr>
-          <a:xfrm>
-            <a:off x="3383280" y="2450592"/>
-            <a:ext cx="393192" cy="393192"/>
-          </a:xfrm>
-          <a:prstGeom prst="ellipse">
-            <a:avLst/>
-          </a:prstGeom>
-          <a:solidFill>
-            <a:srgbClr val="FF7773"/>
-          </a:solidFill>
-          <a:ln>
-            <a:noFill/>
-          </a:ln>
-        </p:spPr>
-        <p:style>
-          <a:lnRef idx="1">
-            <a:schemeClr val="accent1"/>
-          </a:lnRef>
-          <a:fillRef idx="3">
-            <a:schemeClr val="accent1"/>
-          </a:fillRef>
-          <a:effectRef idx="2">
-            <a:schemeClr val="accent1"/>
-          </a:effectRef>
-          <a:fontRef idx="minor">
-            <a:schemeClr val="lt1"/>
-          </a:fontRef>
-        </p:style>
-        <p:txBody>
-          <a:bodyPr rtlCol="0" anchor="ctr"/>
-          <a:lstStyle/>
-          <a:p>
-            <a:pPr algn="ctr"/>
-          </a:p>
-        </p:txBody>
-      </p:sp>
-      <p:sp>
-        <p:nvSpPr>
-          <p:cNvPr id="14" name="Oval 13"/>
-          <p:cNvSpPr/>
-          <p:nvPr/>
-        </p:nvSpPr>
-        <p:spPr>
-          <a:xfrm>
-            <a:off x="3941063" y="2450592"/>
-            <a:ext cx="393192" cy="393192"/>
-          </a:xfrm>
-          <a:prstGeom prst="ellipse">
-            <a:avLst/>
-          </a:prstGeom>
-          <a:solidFill>
-            <a:srgbClr val="FF7773"/>
-          </a:solidFill>
-          <a:ln>
-            <a:noFill/>
-          </a:ln>
-        </p:spPr>
-        <p:style>
-          <a:lnRef idx="1">
-            <a:schemeClr val="accent1"/>
-          </a:lnRef>
-          <a:fillRef idx="3">
-            <a:schemeClr val="accent1"/>
-          </a:fillRef>
-          <a:effectRef idx="2">
-            <a:schemeClr val="accent1"/>
-          </a:effectRef>
-          <a:fontRef idx="minor">
-            <a:schemeClr val="lt1"/>
-          </a:fontRef>
-        </p:style>
-        <p:txBody>
-          <a:bodyPr rtlCol="0" anchor="ctr"/>
-          <a:lstStyle/>
-          <a:p>
-            <a:pPr algn="ctr"/>
-          </a:p>
-        </p:txBody>
-      </p:sp>
-      <p:sp>
-        <p:nvSpPr>
-          <p:cNvPr id="15" name="Oval 14"/>
-          <p:cNvSpPr/>
-          <p:nvPr/>
-        </p:nvSpPr>
-        <p:spPr>
-          <a:xfrm>
-            <a:off x="4498848" y="2450592"/>
-            <a:ext cx="393192" cy="393192"/>
-          </a:xfrm>
-          <a:prstGeom prst="ellipse">
-            <a:avLst/>
-          </a:prstGeom>
-          <a:solidFill>
-            <a:srgbClr val="FF7773"/>
-          </a:solidFill>
-          <a:ln>
-            <a:noFill/>
-          </a:ln>
-        </p:spPr>
-        <p:style>
-          <a:lnRef idx="1">
-            <a:schemeClr val="accent1"/>
-          </a:lnRef>
-          <a:fillRef idx="3">
-            <a:schemeClr val="accent1"/>
-          </a:fillRef>
-          <a:effectRef idx="2">
-            <a:schemeClr val="accent1"/>
-          </a:effectRef>
-          <a:fontRef idx="minor">
-            <a:schemeClr val="lt1"/>
-          </a:fontRef>
-        </p:style>
-        <p:txBody>
-          <a:bodyPr rtlCol="0" anchor="ctr"/>
-          <a:lstStyle/>
-          <a:p>
-            <a:pPr algn="ctr"/>
-          </a:p>
-        </p:txBody>
-      </p:sp>
-      <p:sp>
-        <p:nvSpPr>
-          <p:cNvPr id="16" name="Oval 15"/>
-          <p:cNvSpPr/>
-          <p:nvPr/>
-        </p:nvSpPr>
-        <p:spPr>
-          <a:xfrm>
-            <a:off x="5056631" y="2450592"/>
-            <a:ext cx="393192" cy="393192"/>
-          </a:xfrm>
-          <a:prstGeom prst="ellipse">
-            <a:avLst/>
-          </a:prstGeom>
-          <a:solidFill>
-            <a:srgbClr val="FF7773"/>
-          </a:solidFill>
-          <a:ln>
-            <a:noFill/>
-          </a:ln>
-        </p:spPr>
-        <p:style>
-          <a:lnRef idx="1">
-            <a:schemeClr val="accent1"/>
-          </a:lnRef>
-          <a:fillRef idx="3">
-            <a:schemeClr val="accent1"/>
-          </a:fillRef>
-          <a:effectRef idx="2">
-            <a:schemeClr val="accent1"/>
-          </a:effectRef>
-          <a:fontRef idx="minor">
-            <a:schemeClr val="lt1"/>
-          </a:fontRef>
-        </p:style>
-        <p:txBody>
-          <a:bodyPr rtlCol="0" anchor="ctr"/>
-          <a:lstStyle/>
-          <a:p>
-            <a:pPr algn="ctr"/>
-          </a:p>
-        </p:txBody>
-      </p:sp>
-      <p:sp>
-        <p:nvSpPr>
-          <p:cNvPr id="17" name="Oval 16"/>
-          <p:cNvSpPr/>
-          <p:nvPr/>
-        </p:nvSpPr>
-        <p:spPr>
-          <a:xfrm>
-            <a:off x="5614416" y="2450592"/>
-            <a:ext cx="393192" cy="393192"/>
-          </a:xfrm>
-          <a:prstGeom prst="ellipse">
-            <a:avLst/>
-          </a:prstGeom>
-          <a:solidFill>
-            <a:srgbClr val="FF7773"/>
-          </a:solidFill>
-          <a:ln>
-            <a:noFill/>
-          </a:ln>
-        </p:spPr>
-        <p:style>
-          <a:lnRef idx="1">
-            <a:schemeClr val="accent1"/>
-          </a:lnRef>
-          <a:fillRef idx="3">
-            <a:schemeClr val="accent1"/>
-          </a:fillRef>
-          <a:effectRef idx="2">
-            <a:schemeClr val="accent1"/>
-          </a:effectRef>
-          <a:fontRef idx="minor">
-            <a:schemeClr val="lt1"/>
-          </a:fontRef>
-        </p:style>
-        <p:txBody>
-          <a:bodyPr rtlCol="0" anchor="ctr"/>
-          <a:lstStyle/>
-          <a:p>
-            <a:pPr algn="ctr"/>
-          </a:p>
-        </p:txBody>
-      </p:sp>
-      <p:sp>
-        <p:nvSpPr>
-          <p:cNvPr id="18" name="Oval 17"/>
-          <p:cNvSpPr/>
-          <p:nvPr/>
-        </p:nvSpPr>
-        <p:spPr>
-          <a:xfrm>
-            <a:off x="6172200" y="2450592"/>
-            <a:ext cx="393192" cy="393192"/>
-          </a:xfrm>
-          <a:prstGeom prst="ellipse">
-            <a:avLst/>
-          </a:prstGeom>
-          <a:solidFill>
-            <a:srgbClr val="1D2B45"/>
-          </a:solidFill>
-          <a:ln w="13970">
-            <a:solidFill>
-              <a:srgbClr val="34445D"/>
-            </a:solidFill>
-          </a:ln>
-        </p:spPr>
-        <p:style>
-          <a:lnRef idx="1">
-            <a:schemeClr val="accent1"/>
-          </a:lnRef>
-          <a:fillRef idx="3">
-            <a:schemeClr val="accent1"/>
-          </a:fillRef>
-          <a:effectRef idx="2">
-            <a:schemeClr val="accent1"/>
-          </a:effectRef>
-          <a:fontRef idx="minor">
-            <a:schemeClr val="lt1"/>
-          </a:fontRef>
-        </p:style>
-        <p:txBody>
-          <a:bodyPr rtlCol="0" anchor="ctr"/>
-          <a:lstStyle/>
-          <a:p>
-            <a:pPr algn="ctr"/>
-          </a:p>
-        </p:txBody>
-      </p:sp>
-      <p:sp>
-        <p:nvSpPr>
-          <p:cNvPr id="19" name="Oval 18"/>
-          <p:cNvSpPr/>
-          <p:nvPr/>
-        </p:nvSpPr>
-        <p:spPr>
-          <a:xfrm>
-            <a:off x="1152144" y="3218688"/>
-            <a:ext cx="393192" cy="393192"/>
-          </a:xfrm>
-          <a:prstGeom prst="ellipse">
-            <a:avLst/>
-          </a:prstGeom>
-          <a:solidFill>
-            <a:srgbClr val="1D2B45"/>
-          </a:solidFill>
-          <a:ln w="13970">
-            <a:solidFill>
-              <a:srgbClr val="34445D"/>
-            </a:solidFill>
-          </a:ln>
-        </p:spPr>
-        <p:style>
-          <a:lnRef idx="1">
-            <a:schemeClr val="accent1"/>
-          </a:lnRef>
-          <a:fillRef idx="3">
-            <a:schemeClr val="accent1"/>
-          </a:fillRef>
-          <a:effectRef idx="2">
-            <a:schemeClr val="accent1"/>
-          </a:effectRef>
-          <a:fontRef idx="minor">
-            <a:schemeClr val="lt1"/>
-          </a:fontRef>
-        </p:style>
-        <p:txBody>
-          <a:bodyPr rtlCol="0" anchor="ctr"/>
-          <a:lstStyle/>
-          <a:p>
-            <a:pPr algn="ctr"/>
-          </a:p>
-        </p:txBody>
-      </p:sp>
-      <p:sp>
-        <p:nvSpPr>
-          <p:cNvPr id="20" name="Oval 19"/>
-          <p:cNvSpPr/>
-          <p:nvPr/>
-        </p:nvSpPr>
-        <p:spPr>
-          <a:xfrm>
-            <a:off x="1709928" y="3218688"/>
-            <a:ext cx="393192" cy="393192"/>
-          </a:xfrm>
-          <a:prstGeom prst="ellipse">
-            <a:avLst/>
-          </a:prstGeom>
-          <a:solidFill>
-            <a:srgbClr val="1D2B45"/>
-          </a:solidFill>
-          <a:ln w="13970">
-            <a:solidFill>
-              <a:srgbClr val="34445D"/>
-            </a:solidFill>
-          </a:ln>
-        </p:spPr>
-        <p:style>
-          <a:lnRef idx="1">
-            <a:schemeClr val="accent1"/>
-          </a:lnRef>
-          <a:fillRef idx="3">
-            <a:schemeClr val="accent1"/>
-          </a:fillRef>
-          <a:effectRef idx="2">
-            <a:schemeClr val="accent1"/>
-          </a:effectRef>
-          <a:fontRef idx="minor">
-            <a:schemeClr val="lt1"/>
-          </a:fontRef>
-        </p:style>
-        <p:txBody>
-          <a:bodyPr rtlCol="0" anchor="ctr"/>
-          <a:lstStyle/>
-          <a:p>
-            <a:pPr algn="ctr"/>
-          </a:p>
-        </p:txBody>
-      </p:sp>
-      <p:sp>
-        <p:nvSpPr>
-          <p:cNvPr id="21" name="Oval 20"/>
-          <p:cNvSpPr/>
-          <p:nvPr/>
-        </p:nvSpPr>
-        <p:spPr>
-          <a:xfrm>
-            <a:off x="2267712" y="3218688"/>
-            <a:ext cx="393192" cy="393192"/>
-          </a:xfrm>
-          <a:prstGeom prst="ellipse">
-            <a:avLst/>
-          </a:prstGeom>
-          <a:solidFill>
-            <a:srgbClr val="1D2B45"/>
-          </a:solidFill>
-          <a:ln w="13970">
-            <a:solidFill>
-              <a:srgbClr val="34445D"/>
-            </a:solidFill>
-          </a:ln>
-        </p:spPr>
-        <p:style>
-          <a:lnRef idx="1">
-            <a:schemeClr val="accent1"/>
-          </a:lnRef>
-          <a:fillRef idx="3">
-            <a:schemeClr val="accent1"/>
-          </a:fillRef>
-          <a:effectRef idx="2">
-            <a:schemeClr val="accent1"/>
-          </a:effectRef>
-          <a:fontRef idx="minor">
-            <a:schemeClr val="lt1"/>
-          </a:fontRef>
-        </p:style>
-        <p:txBody>
-          <a:bodyPr rtlCol="0" anchor="ctr"/>
-          <a:lstStyle/>
-          <a:p>
-            <a:pPr algn="ctr"/>
-          </a:p>
-        </p:txBody>
-      </p:sp>
-      <p:sp>
-        <p:nvSpPr>
-          <p:cNvPr id="22" name="Oval 21"/>
-          <p:cNvSpPr/>
-          <p:nvPr/>
-        </p:nvSpPr>
-        <p:spPr>
-          <a:xfrm>
-            <a:off x="2825496" y="3218688"/>
-            <a:ext cx="393192" cy="393192"/>
-          </a:xfrm>
-          <a:prstGeom prst="ellipse">
-            <a:avLst/>
-          </a:prstGeom>
-          <a:solidFill>
-            <a:srgbClr val="1D2B45"/>
-          </a:solidFill>
-          <a:ln w="13970">
-            <a:solidFill>
-              <a:srgbClr val="34445D"/>
-            </a:solidFill>
-          </a:ln>
-        </p:spPr>
-        <p:style>
-          <a:lnRef idx="1">
-            <a:schemeClr val="accent1"/>
-          </a:lnRef>
-          <a:fillRef idx="3">
-            <a:schemeClr val="accent1"/>
-          </a:fillRef>
-          <a:effectRef idx="2">
-            <a:schemeClr val="accent1"/>
-          </a:effectRef>
-          <a:fontRef idx="minor">
-            <a:schemeClr val="lt1"/>
-          </a:fontRef>
-        </p:style>
-        <p:txBody>
-          <a:bodyPr rtlCol="0" anchor="ctr"/>
-          <a:lstStyle/>
-          <a:p>
-            <a:pPr algn="ctr"/>
-          </a:p>
-        </p:txBody>
-      </p:sp>
-      <p:sp>
-        <p:nvSpPr>
-          <p:cNvPr id="23" name="Oval 22"/>
-          <p:cNvSpPr/>
-          <p:nvPr/>
-        </p:nvSpPr>
-        <p:spPr>
-          <a:xfrm>
-            <a:off x="3383280" y="3218688"/>
-            <a:ext cx="393192" cy="393192"/>
-          </a:xfrm>
-          <a:prstGeom prst="ellipse">
-            <a:avLst/>
-          </a:prstGeom>
-          <a:solidFill>
-            <a:srgbClr val="1D2B45"/>
-          </a:solidFill>
-          <a:ln w="13970">
-            <a:solidFill>
-              <a:srgbClr val="34445D"/>
-            </a:solidFill>
-          </a:ln>
-        </p:spPr>
-        <p:style>
-          <a:lnRef idx="1">
-            <a:schemeClr val="accent1"/>
-          </a:lnRef>
-          <a:fillRef idx="3">
-            <a:schemeClr val="accent1"/>
-          </a:fillRef>
-          <a:effectRef idx="2">
-            <a:schemeClr val="accent1"/>
-          </a:effectRef>
-          <a:fontRef idx="minor">
-            <a:schemeClr val="lt1"/>
-          </a:fontRef>
-        </p:style>
-        <p:txBody>
-          <a:bodyPr rtlCol="0" anchor="ctr"/>
-          <a:lstStyle/>
-          <a:p>
-            <a:pPr algn="ctr"/>
-          </a:p>
-        </p:txBody>
-      </p:sp>
-      <p:sp>
-        <p:nvSpPr>
-          <p:cNvPr id="24" name="Oval 23"/>
-          <p:cNvSpPr/>
-          <p:nvPr/>
-        </p:nvSpPr>
-        <p:spPr>
-          <a:xfrm>
-            <a:off x="3941063" y="3218688"/>
-            <a:ext cx="393192" cy="393192"/>
-          </a:xfrm>
-          <a:prstGeom prst="ellipse">
-            <a:avLst/>
-          </a:prstGeom>
-          <a:solidFill>
-            <a:srgbClr val="1D2B45"/>
-          </a:solidFill>
-          <a:ln w="13970">
-            <a:solidFill>
-              <a:srgbClr val="34445D"/>
-            </a:solidFill>
-          </a:ln>
-        </p:spPr>
-        <p:style>
-          <a:lnRef idx="1">
-            <a:schemeClr val="accent1"/>
-          </a:lnRef>
-          <a:fillRef idx="3">
-            <a:schemeClr val="accent1"/>
-          </a:fillRef>
-          <a:effectRef idx="2">
-            <a:schemeClr val="accent1"/>
-          </a:effectRef>
-          <a:fontRef idx="minor">
-            <a:schemeClr val="lt1"/>
-          </a:fontRef>
-        </p:style>
-        <p:txBody>
-          <a:bodyPr rtlCol="0" anchor="ctr"/>
-          <a:lstStyle/>
-          <a:p>
-            <a:pPr algn="ctr"/>
-          </a:p>
-        </p:txBody>
-      </p:sp>
-      <p:sp>
-        <p:nvSpPr>
-          <p:cNvPr id="25" name="Oval 24"/>
-          <p:cNvSpPr/>
-          <p:nvPr/>
-        </p:nvSpPr>
-        <p:spPr>
-          <a:xfrm>
-            <a:off x="4498848" y="3218688"/>
-            <a:ext cx="393192" cy="393192"/>
-          </a:xfrm>
-          <a:prstGeom prst="ellipse">
-            <a:avLst/>
-          </a:prstGeom>
-          <a:solidFill>
-            <a:srgbClr val="1D2B45"/>
-          </a:solidFill>
-          <a:ln w="13970">
-            <a:solidFill>
-              <a:srgbClr val="34445D"/>
-            </a:solidFill>
-          </a:ln>
-        </p:spPr>
-        <p:style>
-          <a:lnRef idx="1">
-            <a:schemeClr val="accent1"/>
-          </a:lnRef>
-          <a:fillRef idx="3">
-            <a:schemeClr val="accent1"/>
-          </a:fillRef>
-          <a:effectRef idx="2">
-            <a:schemeClr val="accent1"/>
-          </a:effectRef>
-          <a:fontRef idx="minor">
-            <a:schemeClr val="lt1"/>
-          </a:fontRef>
-        </p:style>
-        <p:txBody>
-          <a:bodyPr rtlCol="0" anchor="ctr"/>
-          <a:lstStyle/>
-          <a:p>
-            <a:pPr algn="ctr"/>
-          </a:p>
-        </p:txBody>
-      </p:sp>
-      <p:sp>
-        <p:nvSpPr>
-          <p:cNvPr id="26" name="Oval 25"/>
-          <p:cNvSpPr/>
-          <p:nvPr/>
-        </p:nvSpPr>
-        <p:spPr>
-          <a:xfrm>
-            <a:off x="5056631" y="3218688"/>
-            <a:ext cx="393192" cy="393192"/>
-          </a:xfrm>
-          <a:prstGeom prst="ellipse">
-            <a:avLst/>
-          </a:prstGeom>
-          <a:solidFill>
-            <a:srgbClr val="1D2B45"/>
-          </a:solidFill>
-          <a:ln w="13970">
-            <a:solidFill>
-              <a:srgbClr val="34445D"/>
-            </a:solidFill>
-          </a:ln>
-        </p:spPr>
-        <p:style>
-          <a:lnRef idx="1">
-            <a:schemeClr val="accent1"/>
-          </a:lnRef>
-          <a:fillRef idx="3">
-            <a:schemeClr val="accent1"/>
-          </a:fillRef>
-          <a:effectRef idx="2">
-            <a:schemeClr val="accent1"/>
-          </a:effectRef>
-          <a:fontRef idx="minor">
-            <a:schemeClr val="lt1"/>
-          </a:fontRef>
-        </p:style>
-        <p:txBody>
-          <a:bodyPr rtlCol="0" anchor="ctr"/>
-          <a:lstStyle/>
-          <a:p>
-            <a:pPr algn="ctr"/>
-          </a:p>
-        </p:txBody>
-      </p:sp>
-      <p:sp>
-        <p:nvSpPr>
-          <p:cNvPr id="27" name="Oval 26"/>
-          <p:cNvSpPr/>
-          <p:nvPr/>
-        </p:nvSpPr>
-        <p:spPr>
-          <a:xfrm>
-            <a:off x="5614416" y="3218688"/>
-            <a:ext cx="393192" cy="393192"/>
-          </a:xfrm>
-          <a:prstGeom prst="ellipse">
-            <a:avLst/>
-          </a:prstGeom>
-          <a:solidFill>
-            <a:srgbClr val="1D2B45"/>
-          </a:solidFill>
-          <a:ln w="13970">
-            <a:solidFill>
-              <a:srgbClr val="34445D"/>
-            </a:solidFill>
-          </a:ln>
-        </p:spPr>
-        <p:style>
-          <a:lnRef idx="1">
-            <a:schemeClr val="accent1"/>
-          </a:lnRef>
-          <a:fillRef idx="3">
-            <a:schemeClr val="accent1"/>
-          </a:fillRef>
-          <a:effectRef idx="2">
-            <a:schemeClr val="accent1"/>
-          </a:effectRef>
-          <a:fontRef idx="minor">
-            <a:schemeClr val="lt1"/>
-          </a:fontRef>
-        </p:style>
-        <p:txBody>
-          <a:bodyPr rtlCol="0" anchor="ctr"/>
-          <a:lstStyle/>
-          <a:p>
-            <a:pPr algn="ctr"/>
-          </a:p>
-        </p:txBody>
-      </p:sp>
-      <p:sp>
-        <p:nvSpPr>
-          <p:cNvPr id="28" name="Oval 27"/>
-          <p:cNvSpPr/>
-          <p:nvPr/>
-        </p:nvSpPr>
-        <p:spPr>
-          <a:xfrm>
-            <a:off x="6172200" y="3218688"/>
-            <a:ext cx="393192" cy="393192"/>
-          </a:xfrm>
-          <a:prstGeom prst="ellipse">
-            <a:avLst/>
-          </a:prstGeom>
-          <a:solidFill>
-            <a:srgbClr val="1D2B45"/>
-          </a:solidFill>
-          <a:ln w="13970">
-            <a:solidFill>
-              <a:srgbClr val="34445D"/>
-            </a:solidFill>
-          </a:ln>
-        </p:spPr>
-        <p:style>
-          <a:lnRef idx="1">
-            <a:schemeClr val="accent1"/>
-          </a:lnRef>
-          <a:fillRef idx="3">
-            <a:schemeClr val="accent1"/>
-          </a:fillRef>
-          <a:effectRef idx="2">
-            <a:schemeClr val="accent1"/>
-          </a:effectRef>
-          <a:fontRef idx="minor">
-            <a:schemeClr val="lt1"/>
-          </a:fontRef>
-        </p:style>
-        <p:txBody>
-          <a:bodyPr rtlCol="0" anchor="ctr"/>
-          <a:lstStyle/>
-          <a:p>
-            <a:pPr algn="ctr"/>
-          </a:p>
-        </p:txBody>
-      </p:sp>
-      <p:sp>
-        <p:nvSpPr>
-          <p:cNvPr id="29" name="TextBox 28"/>
+          <p:cNvPr id="17" name="TextBox 16"/>
           <p:cNvSpPr txBox="1"/>
           <p:nvPr/>
         </p:nvSpPr>
         <p:spPr>
           <a:xfrm>
-            <a:off x="1133856" y="4242816"/>
-            <a:ext cx="5660136" cy="722376"/>
+            <a:off x="1975103" y="5477255"/>
+            <a:ext cx="8247888" cy="484631"/>
           </a:xfrm>
           <a:prstGeom prst="rect">
             <a:avLst/>
@@ -9826,250 +8653,22 @@
           </a:bodyPr>
           <a:lstStyle/>
           <a:p>
-            <a:pPr algn="l">
+            <a:pPr algn="ctr">
               <a:lnSpc>
-                <a:spcPct val="110000"/>
+                <a:spcPct val="108000"/>
               </a:lnSpc>
               <a:spcAft>
                 <a:spcPts val="0"/>
               </a:spcAft>
             </a:pPr>
             <a:r>
-              <a:rPr sz="1700" b="0">
-                <a:solidFill>
-                  <a:srgbClr val="A8B5C8"/>
+              <a:rPr sz="1800" b="1">
+                <a:solidFill>
+                  <a:srgbClr val="FFC96E"/>
                 </a:solidFill>
                 <a:latin typeface="Arial"/>
               </a:rPr>
-              <a:t>20 final submissions in tasks labeled</a:t>
-            </a:r>
-          </a:p>
-          <a:p>
-            <a:pPr algn="l">
-              <a:lnSpc>
-                <a:spcPct val="110000"/>
-              </a:lnSpc>
-              <a:spcAft>
-                <a:spcPts val="0"/>
-              </a:spcAft>
-            </a:pPr>
-            <a:r>
-              <a:rPr sz="1700" b="0">
-                <a:solidFill>
-                  <a:srgbClr val="A8B5C8"/>
-                </a:solidFill>
-                <a:latin typeface="Arial"/>
-              </a:rPr>
-              <a:t>"unavailable" by the benchmark</a:t>
-            </a:r>
-          </a:p>
-        </p:txBody>
-      </p:sp>
-      <p:sp>
-        <p:nvSpPr>
-          <p:cNvPr id="30" name="TextBox 29"/>
-          <p:cNvSpPr txBox="1"/>
-          <p:nvPr/>
-        </p:nvSpPr>
-        <p:spPr>
-          <a:xfrm>
-            <a:off x="7708392" y="2176272"/>
-            <a:ext cx="3621024" cy="1143000"/>
-          </a:xfrm>
-          <a:prstGeom prst="rect">
-            <a:avLst/>
-          </a:prstGeom>
-          <a:noFill/>
-        </p:spPr>
-        <p:txBody>
-          <a:bodyPr wrap="square" lIns="0" rIns="0" tIns="0" bIns="0" anchor="ctr">
-            <a:spAutoFit/>
-          </a:bodyPr>
-          <a:lstStyle/>
-          <a:p>
-            <a:pPr algn="ctr">
-              <a:lnSpc>
-                <a:spcPct val="110000"/>
-              </a:lnSpc>
-              <a:spcAft>
-                <a:spcPts val="0"/>
-              </a:spcAft>
-            </a:pPr>
-            <a:r>
-              <a:rPr sz="5800" b="1">
-                <a:solidFill>
-                  <a:srgbClr val="FF7773"/>
-                </a:solidFill>
-                <a:latin typeface="Arial"/>
-              </a:rPr>
-              <a:t>9 / 20</a:t>
-            </a:r>
-          </a:p>
-        </p:txBody>
-      </p:sp>
-      <p:sp>
-        <p:nvSpPr>
-          <p:cNvPr id="31" name="TextBox 30"/>
-          <p:cNvSpPr txBox="1"/>
-          <p:nvPr/>
-        </p:nvSpPr>
-        <p:spPr>
-          <a:xfrm>
-            <a:off x="7680960" y="3520440"/>
-            <a:ext cx="3657600" cy="1353312"/>
-          </a:xfrm>
-          <a:prstGeom prst="rect">
-            <a:avLst/>
-          </a:prstGeom>
-          <a:noFill/>
-        </p:spPr>
-        <p:txBody>
-          <a:bodyPr wrap="square" lIns="0" rIns="0" tIns="0" bIns="0" anchor="ctr">
-            <a:spAutoFit/>
-          </a:bodyPr>
-          <a:lstStyle/>
-          <a:p>
-            <a:pPr algn="ctr">
-              <a:lnSpc>
-                <a:spcPct val="110000"/>
-              </a:lnSpc>
-              <a:spcAft>
-                <a:spcPts val="0"/>
-              </a:spcAft>
-            </a:pPr>
-            <a:r>
-              <a:rPr sz="2100" b="1">
-                <a:solidFill>
-                  <a:srgbClr val="F6F4EF"/>
-                </a:solidFill>
-                <a:latin typeface="Arial"/>
-              </a:rPr>
-              <a:t>passed the implemented</a:t>
-            </a:r>
-          </a:p>
-          <a:p>
-            <a:pPr algn="ctr">
-              <a:lnSpc>
-                <a:spcPct val="110000"/>
-              </a:lnSpc>
-              <a:spcAft>
-                <a:spcPts val="0"/>
-              </a:spcAft>
-            </a:pPr>
-            <a:r>
-              <a:rPr sz="2100" b="1">
-                <a:solidFill>
-                  <a:srgbClr val="F6F4EF"/>
-                </a:solidFill>
-                <a:latin typeface="Arial"/>
-              </a:rPr>
-              <a:t>family tests, yet the</a:t>
-            </a:r>
-          </a:p>
-          <a:p>
-            <a:pPr algn="ctr">
-              <a:lnSpc>
-                <a:spcPct val="110000"/>
-              </a:lnSpc>
-              <a:spcAft>
-                <a:spcPts val="0"/>
-              </a:spcAft>
-            </a:pPr>
-            <a:r>
-              <a:rPr sz="2100" b="1">
-                <a:solidFill>
-                  <a:srgbClr val="F6F4EF"/>
-                </a:solidFill>
-                <a:latin typeface="Arial"/>
-              </a:rPr>
-              <a:t>final gate rejected them</a:t>
-            </a:r>
-          </a:p>
-        </p:txBody>
-      </p:sp>
-      <p:sp>
-        <p:nvSpPr>
-          <p:cNvPr id="32" name="Rounded Rectangle 31"/>
-          <p:cNvSpPr/>
-          <p:nvPr/>
-        </p:nvSpPr>
-        <p:spPr>
-          <a:xfrm>
-            <a:off x="1572768" y="5541264"/>
-            <a:ext cx="9052560" cy="438912"/>
-          </a:xfrm>
-          <a:prstGeom prst="roundRect">
-            <a:avLst>
-              <a:gd name="adj" fmla="val 12000"/>
-            </a:avLst>
-          </a:prstGeom>
-          <a:solidFill>
-            <a:srgbClr val="3B2834"/>
-          </a:solidFill>
-          <a:ln>
-            <a:noFill/>
-          </a:ln>
-        </p:spPr>
-        <p:style>
-          <a:lnRef idx="1">
-            <a:schemeClr val="accent1"/>
-          </a:lnRef>
-          <a:fillRef idx="3">
-            <a:schemeClr val="accent1"/>
-          </a:fillRef>
-          <a:effectRef idx="2">
-            <a:schemeClr val="accent1"/>
-          </a:effectRef>
-          <a:fontRef idx="minor">
-            <a:schemeClr val="lt1"/>
-          </a:fontRef>
-        </p:style>
-        <p:txBody>
-          <a:bodyPr rtlCol="0" anchor="ctr"/>
-          <a:lstStyle/>
-          <a:p>
-            <a:pPr algn="ctr"/>
-          </a:p>
-        </p:txBody>
-      </p:sp>
-      <p:sp>
-        <p:nvSpPr>
-          <p:cNvPr id="33" name="TextBox 32"/>
-          <p:cNvSpPr txBox="1"/>
-          <p:nvPr/>
-        </p:nvSpPr>
-        <p:spPr>
-          <a:xfrm>
-            <a:off x="1664208" y="5559551"/>
-            <a:ext cx="8869680" cy="402336"/>
-          </a:xfrm>
-          <a:prstGeom prst="rect">
-            <a:avLst/>
-          </a:prstGeom>
-          <a:noFill/>
-        </p:spPr>
-        <p:txBody>
-          <a:bodyPr wrap="square" lIns="0" rIns="0" tIns="0" bIns="0" anchor="ctr">
-            <a:spAutoFit/>
-          </a:bodyPr>
-          <a:lstStyle/>
-          <a:p>
-            <a:pPr algn="ctr">
-              <a:lnSpc>
-                <a:spcPct val="110000"/>
-              </a:lnSpc>
-              <a:spcAft>
-                <a:spcPts val="0"/>
-              </a:spcAft>
-            </a:pPr>
-            <a:r>
-              <a:rPr sz="1500" b="1">
-                <a:solidFill>
-                  <a:srgbClr val="FFC0BC"/>
-                </a:solidFill>
-                <a:latin typeface="Arial"/>
-              </a:rPr>
-              <a:t>This is a checker disagreement in selected runs.</a:t>
+              <a:t>We added that rule. The AI did not see it.</a:t>
             </a:r>
           </a:p>
         </p:txBody>
@@ -10143,8 +8742,8 @@
         </p:nvSpPr>
         <p:spPr>
           <a:xfrm>
-            <a:off x="640080" y="329184"/>
-            <a:ext cx="9966960" cy="274320"/>
+            <a:off x="640080" y="320040"/>
+            <a:ext cx="9875520" cy="274320"/>
           </a:xfrm>
           <a:prstGeom prst="rect">
             <a:avLst/>
@@ -10159,7 +8758,7 @@
           <a:p>
             <a:pPr algn="l">
               <a:lnSpc>
-                <a:spcPct val="110000"/>
+                <a:spcPct val="108000"/>
               </a:lnSpc>
               <a:spcAft>
                 <a:spcPts val="0"/>
@@ -10172,7 +8771,7 @@
                 </a:solidFill>
                 <a:latin typeface="Arial"/>
               </a:rPr>
-              <a:t>WHY IT HAPPENED</a:t>
+              <a:t>SO WHAT?</a:t>
             </a:r>
           </a:p>
         </p:txBody>
@@ -10185,8 +8784,8 @@
         </p:nvSpPr>
         <p:spPr>
           <a:xfrm>
-            <a:off x="640080" y="740664"/>
-            <a:ext cx="10927080" cy="841248"/>
+            <a:off x="640080" y="758952"/>
+            <a:ext cx="10954512" cy="822960"/>
           </a:xfrm>
           <a:prstGeom prst="rect">
             <a:avLst/>
@@ -10201,20 +8800,20 @@
           <a:p>
             <a:pPr algn="l">
               <a:lnSpc>
-                <a:spcPct val="110000"/>
+                <a:spcPct val="108000"/>
               </a:lnSpc>
               <a:spcAft>
                 <a:spcPts val="0"/>
               </a:spcAft>
             </a:pPr>
             <a:r>
-              <a:rPr sz="3300" b="1">
+              <a:rPr sz="3500" b="1">
                 <a:solidFill>
                   <a:srgbClr val="F6F4EF"/>
                 </a:solidFill>
                 <a:latin typeface="Arial"/>
               </a:rPr>
-              <a:t>The benchmark had a second gate</a:t>
+              <a:t>The score can mislead us</a:t>
             </a:r>
           </a:p>
         </p:txBody>
@@ -10227,7 +8826,7 @@
         </p:nvCxnSpPr>
         <p:spPr>
           <a:xfrm>
-            <a:off x="640080" y="6473952"/>
+            <a:off x="640080" y="6464808"/>
             <a:ext cx="10908792" cy="0"/>
           </a:xfrm>
           <a:prstGeom prst="line">
@@ -10263,7 +8862,7 @@
         <p:spPr>
           <a:xfrm>
             <a:off x="658368" y="6528816"/>
-            <a:ext cx="10424160" cy="173736"/>
+            <a:ext cx="10332720" cy="173736"/>
           </a:xfrm>
           <a:prstGeom prst="rect">
             <a:avLst/>
@@ -10278,20 +8877,20 @@
           <a:p>
             <a:pPr algn="l">
               <a:lnSpc>
-                <a:spcPct val="110000"/>
+                <a:spcPct val="108000"/>
               </a:lnSpc>
               <a:spcAft>
                 <a:spcPts val="0"/>
               </a:spcAft>
             </a:pPr>
             <a:r>
-              <a:rPr sz="850" b="0">
-                <a:solidFill>
-                  <a:srgbClr val="A8B5C8"/>
+              <a:rPr sz="819" b="0">
+                <a:solidFill>
+                  <a:srgbClr val="ADB9CA"/>
                 </a:solidFill>
                 <a:latin typeface="Arial"/>
               </a:rPr>
-              <a:t>Evaluator rule and receipts: paper/final.md, Results; README.md.</a:t>
+              <a:t>Source: paper/final.md, Discussion and limitations.</a:t>
             </a:r>
           </a:p>
         </p:txBody>
@@ -10304,8 +8903,8 @@
         </p:nvSpPr>
         <p:spPr>
           <a:xfrm>
-            <a:off x="11064240" y="6501384"/>
-            <a:ext cx="457200" cy="219456"/>
+            <a:off x="11045952" y="6510528"/>
+            <a:ext cx="457200" cy="201168"/>
           </a:xfrm>
           <a:prstGeom prst="rect">
             <a:avLst/>
@@ -10320,7 +8919,7 @@
           <a:p>
             <a:pPr algn="r">
               <a:lnSpc>
-                <a:spcPct val="110000"/>
+                <a:spcPct val="108000"/>
               </a:lnSpc>
               <a:spcAft>
                 <a:spcPts val="0"/>
@@ -10329,7 +8928,7 @@
             <a:r>
               <a:rPr sz="1000" b="0">
                 <a:solidFill>
-                  <a:srgbClr val="A8B5C8"/>
+                  <a:srgbClr val="ADB9CA"/>
                 </a:solidFill>
                 <a:latin typeface="Arial"/>
               </a:rPr>
@@ -10346,8 +8945,139 @@
         </p:nvSpPr>
         <p:spPr>
           <a:xfrm>
-            <a:off x="768096" y="1984248"/>
-            <a:ext cx="3840480" cy="1664208"/>
+            <a:off x="713232" y="1938528"/>
+            <a:ext cx="4956048" cy="2450592"/>
+          </a:xfrm>
+          <a:prstGeom prst="roundRect">
+            <a:avLst>
+              <a:gd name="adj" fmla="val 12000"/>
+            </a:avLst>
+          </a:prstGeom>
+          <a:solidFill>
+            <a:srgbClr val="3D2634"/>
+          </a:solidFill>
+          <a:ln w="15240">
+            <a:solidFill>
+              <a:srgbClr val="794458"/>
+            </a:solidFill>
+          </a:ln>
+        </p:spPr>
+        <p:style>
+          <a:lnRef idx="1">
+            <a:schemeClr val="accent1"/>
+          </a:lnRef>
+          <a:fillRef idx="3">
+            <a:schemeClr val="accent1"/>
+          </a:fillRef>
+          <a:effectRef idx="2">
+            <a:schemeClr val="accent1"/>
+          </a:effectRef>
+          <a:fontRef idx="minor">
+            <a:schemeClr val="lt1"/>
+          </a:fontRef>
+        </p:style>
+        <p:txBody>
+          <a:bodyPr rtlCol="0" anchor="ctr"/>
+          <a:lstStyle/>
+          <a:p>
+            <a:pPr algn="ctr"/>
+          </a:p>
+        </p:txBody>
+      </p:sp>
+      <p:sp>
+        <p:nvSpPr>
+          <p:cNvPr id="9" name="TextBox 8"/>
+          <p:cNvSpPr txBox="1"/>
+          <p:nvPr/>
+        </p:nvSpPr>
+        <p:spPr>
+          <a:xfrm>
+            <a:off x="1005840" y="2231136"/>
+            <a:ext cx="4407408" cy="374904"/>
+          </a:xfrm>
+          <a:prstGeom prst="rect">
+            <a:avLst/>
+          </a:prstGeom>
+          <a:noFill/>
+        </p:spPr>
+        <p:txBody>
+          <a:bodyPr wrap="square" lIns="0" rIns="0" tIns="0" bIns="0" anchor="ctr">
+            <a:spAutoFit/>
+          </a:bodyPr>
+          <a:lstStyle/>
+          <a:p>
+            <a:pPr algn="l">
+              <a:lnSpc>
+                <a:spcPct val="108000"/>
+              </a:lnSpc>
+              <a:spcAft>
+                <a:spcPts val="0"/>
+              </a:spcAft>
+            </a:pPr>
+            <a:r>
+              <a:rPr sz="1500" b="1">
+                <a:solidFill>
+                  <a:srgbClr val="FF7773"/>
+                </a:solidFill>
+                <a:latin typeface="Arial"/>
+              </a:rPr>
+              <a:t>THE SCORE SEEMS TO SAY</a:t>
+            </a:r>
+          </a:p>
+        </p:txBody>
+      </p:sp>
+      <p:sp>
+        <p:nvSpPr>
+          <p:cNvPr id="10" name="TextBox 9"/>
+          <p:cNvSpPr txBox="1"/>
+          <p:nvPr/>
+        </p:nvSpPr>
+        <p:spPr>
+          <a:xfrm>
+            <a:off x="1014984" y="2916936"/>
+            <a:ext cx="4407408" cy="621792"/>
+          </a:xfrm>
+          <a:prstGeom prst="rect">
+            <a:avLst/>
+          </a:prstGeom>
+          <a:noFill/>
+        </p:spPr>
+        <p:txBody>
+          <a:bodyPr wrap="square" lIns="0" rIns="0" tIns="0" bIns="0" anchor="ctr">
+            <a:spAutoFit/>
+          </a:bodyPr>
+          <a:lstStyle/>
+          <a:p>
+            <a:pPr algn="l">
+              <a:lnSpc>
+                <a:spcPct val="108000"/>
+              </a:lnSpc>
+              <a:spcAft>
+                <a:spcPts val="0"/>
+              </a:spcAft>
+            </a:pPr>
+            <a:r>
+              <a:rPr sz="3000" b="1">
+                <a:solidFill>
+                  <a:srgbClr val="F6F4EF"/>
+                </a:solidFill>
+                <a:latin typeface="Arial"/>
+              </a:rPr>
+              <a:t>"The AI failed."</a:t>
+            </a:r>
+          </a:p>
+        </p:txBody>
+      </p:sp>
+      <p:sp>
+        <p:nvSpPr>
+          <p:cNvPr id="11" name="Rounded Rectangle 10"/>
+          <p:cNvSpPr/>
+          <p:nvPr/>
+        </p:nvSpPr>
+        <p:spPr>
+          <a:xfrm>
+            <a:off x="6528816" y="1938528"/>
+            <a:ext cx="4956048" cy="2450592"/>
           </a:xfrm>
           <a:prstGeom prst="roundRect">
             <a:avLst>
@@ -10387,14 +9117,14 @@
       </p:sp>
       <p:sp>
         <p:nvSpPr>
-          <p:cNvPr id="9" name="TextBox 8"/>
+          <p:cNvPr id="12" name="TextBox 11"/>
           <p:cNvSpPr txBox="1"/>
           <p:nvPr/>
         </p:nvSpPr>
         <p:spPr>
           <a:xfrm>
-            <a:off x="1005840" y="2258568"/>
-            <a:ext cx="3383280" cy="347472"/>
+            <a:off x="6830568" y="2231136"/>
+            <a:ext cx="4325112" cy="374904"/>
           </a:xfrm>
           <a:prstGeom prst="rect">
             <a:avLst/>
@@ -10407,36 +9137,36 @@
           </a:bodyPr>
           <a:lstStyle/>
           <a:p>
-            <a:pPr algn="ctr">
+            <a:pPr algn="l">
               <a:lnSpc>
-                <a:spcPct val="110000"/>
+                <a:spcPct val="108000"/>
               </a:lnSpc>
               <a:spcAft>
                 <a:spcPts val="0"/>
               </a:spcAft>
             </a:pPr>
             <a:r>
-              <a:rPr sz="1400" b="1">
+              <a:rPr sz="1500" b="1">
                 <a:solidFill>
                   <a:srgbClr val="5DDFC4"/>
                 </a:solidFill>
                 <a:latin typeface="Arial"/>
               </a:rPr>
-              <a:t>IMPLEMENTED TESTS</a:t>
-            </a:r>
-          </a:p>
-        </p:txBody>
-      </p:sp>
-      <p:sp>
-        <p:nvSpPr>
-          <p:cNvPr id="10" name="TextBox 9"/>
+              <a:t>OUR RECORDS SHOW</a:t>
+            </a:r>
+          </a:p>
+        </p:txBody>
+      </p:sp>
+      <p:sp>
+        <p:nvSpPr>
+          <p:cNvPr id="13" name="TextBox 12"/>
           <p:cNvSpPr txBox="1"/>
           <p:nvPr/>
         </p:nvSpPr>
         <p:spPr>
           <a:xfrm>
-            <a:off x="1014984" y="2779776"/>
-            <a:ext cx="3374136" cy="512064"/>
+            <a:off x="6839712" y="2761488"/>
+            <a:ext cx="4242816" cy="1143000"/>
           </a:xfrm>
           <a:prstGeom prst="rect">
             <a:avLst/>
@@ -10449,9 +9179,9 @@
           </a:bodyPr>
           <a:lstStyle/>
           <a:p>
-            <a:pPr algn="ctr">
+            <a:pPr algn="l">
               <a:lnSpc>
-                <a:spcPct val="110000"/>
+                <a:spcPct val="108000"/>
               </a:lnSpc>
               <a:spcAft>
                 <a:spcPts val="0"/>
@@ -10460,67 +9190,86 @@
             <a:r>
               <a:rPr sz="2900" b="1">
                 <a:solidFill>
-                  <a:srgbClr val="5DDFC4"/>
+                  <a:srgbClr val="F6F4EF"/>
                 </a:solidFill>
                 <a:latin typeface="Arial"/>
               </a:rPr>
-              <a:t>PASS</a:t>
-            </a:r>
-          </a:p>
-        </p:txBody>
-      </p:sp>
-      <p:sp>
-        <p:nvSpPr>
-          <p:cNvPr id="11" name="TextBox 10"/>
-          <p:cNvSpPr txBox="1"/>
-          <p:nvPr/>
-        </p:nvSpPr>
-        <p:spPr>
-          <a:xfrm>
-            <a:off x="4782312" y="2569464"/>
-            <a:ext cx="950976" cy="658368"/>
-          </a:xfrm>
-          <a:prstGeom prst="rect">
-            <a:avLst/>
-          </a:prstGeom>
-          <a:noFill/>
-        </p:spPr>
-        <p:txBody>
-          <a:bodyPr wrap="square" lIns="0" rIns="0" tIns="0" bIns="0" anchor="ctr">
-            <a:spAutoFit/>
-          </a:bodyPr>
-          <a:lstStyle/>
-          <a:p>
-            <a:pPr algn="ctr">
+              <a:t>The tests and</a:t>
+            </a:r>
+          </a:p>
+          <a:p>
+            <a:pPr algn="l">
               <a:lnSpc>
-                <a:spcPct val="110000"/>
+                <a:spcPct val="108000"/>
               </a:lnSpc>
               <a:spcAft>
                 <a:spcPts val="0"/>
               </a:spcAft>
             </a:pPr>
             <a:r>
-              <a:rPr sz="1900" b="1">
-                <a:solidFill>
-                  <a:srgbClr val="A8B5C8"/>
+              <a:rPr sz="2900" b="1">
+                <a:solidFill>
+                  <a:srgbClr val="F6F4EF"/>
                 </a:solidFill>
                 <a:latin typeface="Arial"/>
               </a:rPr>
-              <a:t>AND</a:t>
-            </a:r>
-          </a:p>
-        </p:txBody>
-      </p:sp>
-      <p:sp>
-        <p:nvSpPr>
-          <p:cNvPr id="12" name="Rounded Rectangle 11"/>
+              <a:t>score disagreed.</a:t>
+            </a:r>
+          </a:p>
+        </p:txBody>
+      </p:sp>
+      <p:sp>
+        <p:nvSpPr>
+          <p:cNvPr id="14" name="TextBox 13"/>
+          <p:cNvSpPr txBox="1"/>
+          <p:nvPr/>
+        </p:nvSpPr>
+        <p:spPr>
+          <a:xfrm>
+            <a:off x="1005840" y="4736592"/>
+            <a:ext cx="10168128" cy="685800"/>
+          </a:xfrm>
+          <a:prstGeom prst="rect">
+            <a:avLst/>
+          </a:prstGeom>
+          <a:noFill/>
+        </p:spPr>
+        <p:txBody>
+          <a:bodyPr wrap="square" lIns="0" rIns="0" tIns="0" bIns="0" anchor="ctr">
+            <a:spAutoFit/>
+          </a:bodyPr>
+          <a:lstStyle/>
+          <a:p>
+            <a:pPr algn="ctr">
+              <a:lnSpc>
+                <a:spcPct val="108000"/>
+              </a:lnSpc>
+              <a:spcAft>
+                <a:spcPts val="0"/>
+              </a:spcAft>
+            </a:pPr>
+            <a:r>
+              <a:rPr sz="2200" b="1">
+                <a:solidFill>
+                  <a:srgbClr val="F6F4EF"/>
+                </a:solidFill>
+                <a:latin typeface="Arial"/>
+              </a:rPr>
+              <a:t>So this score cannot tell us whether the AI should have stopped trying.</a:t>
+            </a:r>
+          </a:p>
+        </p:txBody>
+      </p:sp>
+      <p:sp>
+        <p:nvSpPr>
+          <p:cNvPr id="15" name="Rounded Rectangle 14"/>
           <p:cNvSpPr/>
           <p:nvPr/>
         </p:nvSpPr>
         <p:spPr>
           <a:xfrm>
-            <a:off x="5870448" y="1984248"/>
-            <a:ext cx="3840480" cy="1664208"/>
+            <a:off x="1389888" y="5577840"/>
+            <a:ext cx="9418320" cy="438912"/>
           </a:xfrm>
           <a:prstGeom prst="roundRect">
             <a:avLst>
@@ -10528,12 +9277,10 @@
             </a:avLst>
           </a:prstGeom>
           <a:solidFill>
-            <a:srgbClr val="3C2836"/>
+            <a:srgbClr val="1D2B45"/>
           </a:solidFill>
-          <a:ln w="15240">
-            <a:solidFill>
-              <a:srgbClr val="755065"/>
-            </a:solidFill>
+          <a:ln>
+            <a:noFill/>
           </a:ln>
         </p:spPr>
         <p:style>
@@ -10560,14 +9307,14 @@
       </p:sp>
       <p:sp>
         <p:nvSpPr>
-          <p:cNvPr id="13" name="TextBox 12"/>
+          <p:cNvPr id="16" name="TextBox 15"/>
           <p:cNvSpPr txBox="1"/>
           <p:nvPr/>
         </p:nvSpPr>
         <p:spPr>
           <a:xfrm>
-            <a:off x="6108192" y="2258568"/>
-            <a:ext cx="3383280" cy="347472"/>
+            <a:off x="1490472" y="5596127"/>
+            <a:ext cx="9217152" cy="402336"/>
           </a:xfrm>
           <a:prstGeom prst="rect">
             <a:avLst/>
@@ -10582,277 +9329,20 @@
           <a:p>
             <a:pPr algn="ctr">
               <a:lnSpc>
-                <a:spcPct val="110000"/>
+                <a:spcPct val="108000"/>
               </a:lnSpc>
               <a:spcAft>
                 <a:spcPts val="0"/>
               </a:spcAft>
             </a:pPr>
             <a:r>
-              <a:rPr sz="1400" b="1">
-                <a:solidFill>
-                  <a:srgbClr val="FFC0BC"/>
+              <a:rPr sz="1500" b="1">
+                <a:solidFill>
+                  <a:srgbClr val="FFC96E"/>
                 </a:solidFill>
                 <a:latin typeface="Arial"/>
               </a:rPr>
-              <a:t>HIDDEN CONDITION FLAG</a:t>
-            </a:r>
-          </a:p>
-        </p:txBody>
-      </p:sp>
-      <p:sp>
-        <p:nvSpPr>
-          <p:cNvPr id="14" name="TextBox 13"/>
-          <p:cNvSpPr txBox="1"/>
-          <p:nvPr/>
-        </p:nvSpPr>
-        <p:spPr>
-          <a:xfrm>
-            <a:off x="6117336" y="2779776"/>
-            <a:ext cx="3374136" cy="512064"/>
-          </a:xfrm>
-          <a:prstGeom prst="rect">
-            <a:avLst/>
-          </a:prstGeom>
-          <a:noFill/>
-        </p:spPr>
-        <p:txBody>
-          <a:bodyPr wrap="square" lIns="0" rIns="0" tIns="0" bIns="0" anchor="ctr">
-            <a:spAutoFit/>
-          </a:bodyPr>
-          <a:lstStyle/>
-          <a:p>
-            <a:pPr algn="ctr">
-              <a:lnSpc>
-                <a:spcPct val="110000"/>
-              </a:lnSpc>
-              <a:spcAft>
-                <a:spcPts val="0"/>
-              </a:spcAft>
-            </a:pPr>
-            <a:r>
-              <a:rPr sz="2900" b="1">
-                <a:solidFill>
-                  <a:srgbClr val="FF7773"/>
-                </a:solidFill>
-                <a:latin typeface="Arial"/>
-              </a:rPr>
-              <a:t>FALSE</a:t>
-            </a:r>
-          </a:p>
-        </p:txBody>
-      </p:sp>
-      <p:sp>
-        <p:nvSpPr>
-          <p:cNvPr id="15" name="TextBox 14"/>
-          <p:cNvSpPr txBox="1"/>
-          <p:nvPr/>
-        </p:nvSpPr>
-        <p:spPr>
-          <a:xfrm>
-            <a:off x="9921240" y="2569464"/>
-            <a:ext cx="475488" cy="658368"/>
-          </a:xfrm>
-          <a:prstGeom prst="rect">
-            <a:avLst/>
-          </a:prstGeom>
-          <a:noFill/>
-        </p:spPr>
-        <p:txBody>
-          <a:bodyPr wrap="square" lIns="0" rIns="0" tIns="0" bIns="0" anchor="ctr">
-            <a:spAutoFit/>
-          </a:bodyPr>
-          <a:lstStyle/>
-          <a:p>
-            <a:pPr algn="ctr">
-              <a:lnSpc>
-                <a:spcPct val="110000"/>
-              </a:lnSpc>
-              <a:spcAft>
-                <a:spcPts val="0"/>
-              </a:spcAft>
-            </a:pPr>
-            <a:r>
-              <a:rPr sz="3100" b="1">
-                <a:solidFill>
-                  <a:srgbClr val="A8B5C8"/>
-                </a:solidFill>
-                <a:latin typeface="Arial"/>
-              </a:rPr>
-              <a:t>=</a:t>
-            </a:r>
-          </a:p>
-        </p:txBody>
-      </p:sp>
-      <p:sp>
-        <p:nvSpPr>
-          <p:cNvPr id="16" name="Rounded Rectangle 15"/>
-          <p:cNvSpPr/>
-          <p:nvPr/>
-        </p:nvSpPr>
-        <p:spPr>
-          <a:xfrm>
-            <a:off x="10479024" y="2377440"/>
-            <a:ext cx="960120" cy="822960"/>
-          </a:xfrm>
-          <a:prstGeom prst="roundRect">
-            <a:avLst>
-              <a:gd name="adj" fmla="val 12000"/>
-            </a:avLst>
-          </a:prstGeom>
-          <a:solidFill>
-            <a:srgbClr val="633243"/>
-          </a:solidFill>
-          <a:ln w="15240">
-            <a:solidFill>
-              <a:srgbClr val="9F5469"/>
-            </a:solidFill>
-          </a:ln>
-        </p:spPr>
-        <p:style>
-          <a:lnRef idx="1">
-            <a:schemeClr val="accent1"/>
-          </a:lnRef>
-          <a:fillRef idx="3">
-            <a:schemeClr val="accent1"/>
-          </a:fillRef>
-          <a:effectRef idx="2">
-            <a:schemeClr val="accent1"/>
-          </a:effectRef>
-          <a:fontRef idx="minor">
-            <a:schemeClr val="lt1"/>
-          </a:fontRef>
-        </p:style>
-        <p:txBody>
-          <a:bodyPr rtlCol="0" anchor="ctr"/>
-          <a:lstStyle/>
-          <a:p>
-            <a:pPr algn="ctr"/>
-          </a:p>
-        </p:txBody>
-      </p:sp>
-      <p:sp>
-        <p:nvSpPr>
-          <p:cNvPr id="17" name="TextBox 16"/>
-          <p:cNvSpPr txBox="1"/>
-          <p:nvPr/>
-        </p:nvSpPr>
-        <p:spPr>
-          <a:xfrm>
-            <a:off x="10533888" y="2487168"/>
-            <a:ext cx="841248" cy="512064"/>
-          </a:xfrm>
-          <a:prstGeom prst="rect">
-            <a:avLst/>
-          </a:prstGeom>
-          <a:noFill/>
-        </p:spPr>
-        <p:txBody>
-          <a:bodyPr wrap="square" lIns="0" rIns="0" tIns="0" bIns="0" anchor="ctr">
-            <a:spAutoFit/>
-          </a:bodyPr>
-          <a:lstStyle/>
-          <a:p>
-            <a:pPr algn="ctr">
-              <a:lnSpc>
-                <a:spcPct val="110000"/>
-              </a:lnSpc>
-              <a:spcAft>
-                <a:spcPts val="0"/>
-              </a:spcAft>
-            </a:pPr>
-            <a:r>
-              <a:rPr sz="1800" b="1">
-                <a:solidFill>
-                  <a:srgbClr val="F6F4EF"/>
-                </a:solidFill>
-                <a:latin typeface="Arial"/>
-              </a:rPr>
-              <a:t>FAIL</a:t>
-            </a:r>
-          </a:p>
-        </p:txBody>
-      </p:sp>
-      <p:sp>
-        <p:nvSpPr>
-          <p:cNvPr id="18" name="TextBox 17"/>
-          <p:cNvSpPr txBox="1"/>
-          <p:nvPr/>
-        </p:nvSpPr>
-        <p:spPr>
-          <a:xfrm>
-            <a:off x="786384" y="4261104"/>
-            <a:ext cx="10725912" cy="457200"/>
-          </a:xfrm>
-          <a:prstGeom prst="rect">
-            <a:avLst/>
-          </a:prstGeom>
-          <a:noFill/>
-        </p:spPr>
-        <p:txBody>
-          <a:bodyPr wrap="square" lIns="0" rIns="0" tIns="0" bIns="0" anchor="ctr">
-            <a:spAutoFit/>
-          </a:bodyPr>
-          <a:lstStyle/>
-          <a:p>
-            <a:pPr algn="ctr">
-              <a:lnSpc>
-                <a:spcPct val="110000"/>
-              </a:lnSpc>
-              <a:spcAft>
-                <a:spcPts val="0"/>
-              </a:spcAft>
-            </a:pPr>
-            <a:r>
-              <a:rPr sz="2100" b="1">
-                <a:solidFill>
-                  <a:srgbClr val="F6F4EF"/>
-                </a:solidFill>
-                <a:latin typeface="Arial"/>
-              </a:rPr>
-              <a:t>The extra flag was false for tasks labeled "unavailable".</a:t>
-            </a:r>
-          </a:p>
-        </p:txBody>
-      </p:sp>
-      <p:sp>
-        <p:nvSpPr>
-          <p:cNvPr id="19" name="TextBox 18"/>
-          <p:cNvSpPr txBox="1"/>
-          <p:nvPr/>
-        </p:nvSpPr>
-        <p:spPr>
-          <a:xfrm>
-            <a:off x="786384" y="4974336"/>
-            <a:ext cx="10725912" cy="502920"/>
-          </a:xfrm>
-          <a:prstGeom prst="rect">
-            <a:avLst/>
-          </a:prstGeom>
-          <a:noFill/>
-        </p:spPr>
-        <p:txBody>
-          <a:bodyPr wrap="square" lIns="0" rIns="0" tIns="0" bIns="0" anchor="ctr">
-            <a:spAutoFit/>
-          </a:bodyPr>
-          <a:lstStyle/>
-          <a:p>
-            <a:pPr algn="ctr">
-              <a:lnSpc>
-                <a:spcPct val="110000"/>
-              </a:lnSpc>
-              <a:spcAft>
-                <a:spcPts val="0"/>
-              </a:spcAft>
-            </a:pPr>
-            <a:r>
-              <a:rPr sz="1800" b="0">
-                <a:solidFill>
-                  <a:srgbClr val="FFC96E"/>
-                </a:solidFill>
-                <a:latin typeface="Arial"/>
-              </a:rPr>
-              <a:t>Passing these finite tests still does not prove that code is secure in general.</a:t>
+              <a:t>Passing our small tests does not prove the code fully safe.</a:t>
             </a:r>
           </a:p>
         </p:txBody>
@@ -10926,8 +9416,8 @@
         </p:nvSpPr>
         <p:spPr>
           <a:xfrm>
-            <a:off x="640080" y="329184"/>
-            <a:ext cx="9966960" cy="274320"/>
+            <a:off x="640080" y="320040"/>
+            <a:ext cx="9875520" cy="274320"/>
           </a:xfrm>
           <a:prstGeom prst="rect">
             <a:avLst/>
@@ -10942,7 +9432,7 @@
           <a:p>
             <a:pPr algn="l">
               <a:lnSpc>
-                <a:spcPct val="110000"/>
+                <a:spcPct val="108000"/>
               </a:lnSpc>
               <a:spcAft>
                 <a:spcPts val="0"/>
@@ -10955,7 +9445,7 @@
                 </a:solidFill>
                 <a:latin typeface="Arial"/>
               </a:rPr>
-              <a:t>WHAT WE BUILT</a:t>
+              <a:t>OUR PROGRESS</a:t>
             </a:r>
           </a:p>
         </p:txBody>
@@ -10968,8 +9458,8 @@
         </p:nvSpPr>
         <p:spPr>
           <a:xfrm>
-            <a:off x="640080" y="740664"/>
-            <a:ext cx="10927080" cy="841248"/>
+            <a:off x="640080" y="758952"/>
+            <a:ext cx="10954512" cy="822960"/>
           </a:xfrm>
           <a:prstGeom prst="rect">
             <a:avLst/>
@@ -10984,20 +9474,20 @@
           <a:p>
             <a:pPr algn="l">
               <a:lnSpc>
-                <a:spcPct val="110000"/>
+                <a:spcPct val="108000"/>
               </a:lnSpc>
               <a:spcAft>
                 <a:spcPts val="0"/>
               </a:spcAft>
             </a:pPr>
             <a:r>
-              <a:rPr sz="3100" b="1">
+              <a:rPr sz="3500" b="1">
                 <a:solidFill>
                   <a:srgbClr val="F6F4EF"/>
                 </a:solidFill>
                 <a:latin typeface="Arial"/>
               </a:rPr>
-              <a:t>We checked the evidence from several angles</a:t>
+              <a:t>What we have done so far</a:t>
             </a:r>
           </a:p>
         </p:txBody>
@@ -11010,7 +9500,7 @@
         </p:nvCxnSpPr>
         <p:spPr>
           <a:xfrm>
-            <a:off x="640080" y="6473952"/>
+            <a:off x="640080" y="6464808"/>
             <a:ext cx="10908792" cy="0"/>
           </a:xfrm>
           <a:prstGeom prst="line">
@@ -11046,7 +9536,7 @@
         <p:spPr>
           <a:xfrm>
             <a:off x="658368" y="6528816"/>
-            <a:ext cx="10424160" cy="173736"/>
+            <a:ext cx="10332720" cy="173736"/>
           </a:xfrm>
           <a:prstGeom prst="rect">
             <a:avLst/>
@@ -11061,20 +9551,20 @@
           <a:p>
             <a:pPr algn="l">
               <a:lnSpc>
-                <a:spcPct val="110000"/>
+                <a:spcPct val="108000"/>
               </a:lnSpc>
               <a:spcAft>
                 <a:spcPts val="0"/>
               </a:spcAft>
             </a:pPr>
             <a:r>
-              <a:rPr sz="850" b="0">
-                <a:solidFill>
-                  <a:srgbClr val="A8B5C8"/>
+              <a:rPr sz="819" b="0">
+                <a:solidFill>
+                  <a:srgbClr val="ADB9CA"/>
                 </a:solidFill>
                 <a:latin typeface="Arial"/>
               </a:rPr>
-              <a:t>README.md; docs/MEASUREMENT_FOLLOWUP_20261030.md; docs/V7_DECISIVE_EXCLUDED_PILOT_20261005.md.</a:t>
+              <a:t>Sources: README.md; docs/MEASUREMENT_FOLLOWUP_20261030.md; docs/V7_DECISIVE_EXCLUDED_PILOT_20261005.md.</a:t>
             </a:r>
           </a:p>
         </p:txBody>
@@ -11087,8 +9577,8 @@
         </p:nvSpPr>
         <p:spPr>
           <a:xfrm>
-            <a:off x="11064240" y="6501384"/>
-            <a:ext cx="457200" cy="219456"/>
+            <a:off x="11045952" y="6510528"/>
+            <a:ext cx="457200" cy="201168"/>
           </a:xfrm>
           <a:prstGeom prst="rect">
             <a:avLst/>
@@ -11103,7 +9593,7 @@
           <a:p>
             <a:pPr algn="r">
               <a:lnSpc>
-                <a:spcPct val="110000"/>
+                <a:spcPct val="108000"/>
               </a:lnSpc>
               <a:spcAft>
                 <a:spcPts val="0"/>
@@ -11112,7 +9602,7 @@
             <a:r>
               <a:rPr sz="1000" b="0">
                 <a:solidFill>
-                  <a:srgbClr val="A8B5C8"/>
+                  <a:srgbClr val="ADB9CA"/>
                 </a:solidFill>
                 <a:latin typeface="Arial"/>
               </a:rPr>
@@ -11129,8 +9619,8 @@
         </p:nvSpPr>
         <p:spPr>
           <a:xfrm>
-            <a:off x="713232" y="1874519"/>
-            <a:ext cx="5285232" cy="1618488"/>
+            <a:off x="731520" y="1892807"/>
+            <a:ext cx="5230368" cy="1682496"/>
           </a:xfrm>
           <a:prstGeom prst="roundRect">
             <a:avLst>
@@ -11168,57 +9658,14 @@
       </p:sp>
       <p:sp>
         <p:nvSpPr>
-          <p:cNvPr id="9" name="Rectangle 8"/>
-          <p:cNvSpPr/>
-          <p:nvPr/>
-        </p:nvSpPr>
-        <p:spPr>
-          <a:xfrm>
-            <a:off x="713232" y="1874519"/>
-            <a:ext cx="109728" cy="1618488"/>
-          </a:xfrm>
-          <a:prstGeom prst="rect">
-            <a:avLst/>
-          </a:prstGeom>
-          <a:solidFill>
-            <a:srgbClr val="77A9FF"/>
-          </a:solidFill>
-          <a:ln>
-            <a:noFill/>
-          </a:ln>
-        </p:spPr>
-        <p:style>
-          <a:lnRef idx="1">
-            <a:schemeClr val="accent1"/>
-          </a:lnRef>
-          <a:fillRef idx="3">
-            <a:schemeClr val="accent1"/>
-          </a:fillRef>
-          <a:effectRef idx="2">
-            <a:schemeClr val="accent1"/>
-          </a:effectRef>
-          <a:fontRef idx="minor">
-            <a:schemeClr val="lt1"/>
-          </a:fontRef>
-        </p:style>
-        <p:txBody>
-          <a:bodyPr rtlCol="0" anchor="ctr"/>
-          <a:lstStyle/>
-          <a:p>
-            <a:pPr algn="ctr"/>
-          </a:p>
-        </p:txBody>
-      </p:sp>
-      <p:sp>
-        <p:nvSpPr>
-          <p:cNvPr id="10" name="TextBox 9"/>
+          <p:cNvPr id="9" name="TextBox 8"/>
           <p:cNvSpPr txBox="1"/>
           <p:nvPr/>
         </p:nvSpPr>
         <p:spPr>
           <a:xfrm>
-            <a:off x="996696" y="2039112"/>
-            <a:ext cx="4553712" cy="329184"/>
+            <a:off x="987552" y="2148839"/>
+            <a:ext cx="1161288" cy="1060704"/>
           </a:xfrm>
           <a:prstGeom prst="rect">
             <a:avLst/>
@@ -11231,36 +9678,36 @@
           </a:bodyPr>
           <a:lstStyle/>
           <a:p>
-            <a:pPr algn="l">
+            <a:pPr algn="ctr">
               <a:lnSpc>
-                <a:spcPct val="110000"/>
+                <a:spcPct val="108000"/>
               </a:lnSpc>
               <a:spcAft>
                 <a:spcPts val="0"/>
               </a:spcAft>
             </a:pPr>
             <a:r>
-              <a:rPr sz="1300" b="1">
+              <a:rPr sz="4400" b="1">
                 <a:solidFill>
                   <a:srgbClr val="77A9FF"/>
                 </a:solidFill>
                 <a:latin typeface="Arial"/>
               </a:rPr>
-              <a:t>ARCHIVE REPLAY</a:t>
-            </a:r>
-          </a:p>
-        </p:txBody>
-      </p:sp>
-      <p:sp>
-        <p:nvSpPr>
-          <p:cNvPr id="11" name="TextBox 10"/>
+              <a:t>40</a:t>
+            </a:r>
+          </a:p>
+        </p:txBody>
+      </p:sp>
+      <p:sp>
+        <p:nvSpPr>
+          <p:cNvPr id="10" name="TextBox 9"/>
           <p:cNvSpPr txBox="1"/>
           <p:nvPr/>
         </p:nvSpPr>
         <p:spPr>
           <a:xfrm>
-            <a:off x="987552" y="2450591"/>
-            <a:ext cx="4617720" cy="758952"/>
+            <a:off x="2377440" y="2157984"/>
+            <a:ext cx="3282696" cy="1042415"/>
           </a:xfrm>
           <a:prstGeom prst="rect">
             <a:avLst/>
@@ -11275,53 +9722,53 @@
           <a:p>
             <a:pPr algn="l">
               <a:lnSpc>
-                <a:spcPct val="110000"/>
+                <a:spcPct val="108000"/>
               </a:lnSpc>
               <a:spcAft>
                 <a:spcPts val="0"/>
               </a:spcAft>
             </a:pPr>
             <a:r>
-              <a:rPr sz="1830" b="1">
+              <a:rPr sz="2300" b="1">
                 <a:solidFill>
                   <a:srgbClr val="F6F4EF"/>
                 </a:solidFill>
                 <a:latin typeface="Arial"/>
               </a:rPr>
-              <a:t>Recomputed the 40-run result</a:t>
+              <a:t>old AI runs</a:t>
             </a:r>
           </a:p>
           <a:p>
             <a:pPr algn="l">
               <a:lnSpc>
-                <a:spcPct val="110000"/>
+                <a:spcPct val="108000"/>
               </a:lnSpc>
               <a:spcAft>
                 <a:spcPts val="0"/>
               </a:spcAft>
             </a:pPr>
             <a:r>
-              <a:rPr sz="1830" b="1">
+              <a:rPr sz="2300" b="1">
                 <a:solidFill>
                   <a:srgbClr val="F6F4EF"/>
                 </a:solidFill>
                 <a:latin typeface="Arial"/>
               </a:rPr>
-              <a:t>from saved receipts.</a:t>
-            </a:r>
-          </a:p>
-        </p:txBody>
-      </p:sp>
-      <p:sp>
-        <p:nvSpPr>
-          <p:cNvPr id="12" name="Rounded Rectangle 11"/>
+              <a:t>checked again</a:t>
+            </a:r>
+          </a:p>
+        </p:txBody>
+      </p:sp>
+      <p:sp>
+        <p:nvSpPr>
+          <p:cNvPr id="11" name="Rounded Rectangle 10"/>
           <p:cNvSpPr/>
           <p:nvPr/>
         </p:nvSpPr>
         <p:spPr>
           <a:xfrm>
-            <a:off x="6144768" y="1874519"/>
-            <a:ext cx="5285232" cy="1618488"/>
+            <a:off x="6190488" y="1892807"/>
+            <a:ext cx="5230368" cy="1682496"/>
           </a:xfrm>
           <a:prstGeom prst="roundRect">
             <a:avLst>
@@ -11359,57 +9806,14 @@
       </p:sp>
       <p:sp>
         <p:nvSpPr>
-          <p:cNvPr id="13" name="Rectangle 12"/>
-          <p:cNvSpPr/>
-          <p:nvPr/>
-        </p:nvSpPr>
-        <p:spPr>
-          <a:xfrm>
-            <a:off x="6144768" y="1874519"/>
-            <a:ext cx="109728" cy="1618488"/>
-          </a:xfrm>
-          <a:prstGeom prst="rect">
-            <a:avLst/>
-          </a:prstGeom>
-          <a:solidFill>
-            <a:srgbClr val="5DDFC4"/>
-          </a:solidFill>
-          <a:ln>
-            <a:noFill/>
-          </a:ln>
-        </p:spPr>
-        <p:style>
-          <a:lnRef idx="1">
-            <a:schemeClr val="accent1"/>
-          </a:lnRef>
-          <a:fillRef idx="3">
-            <a:schemeClr val="accent1"/>
-          </a:fillRef>
-          <a:effectRef idx="2">
-            <a:schemeClr val="accent1"/>
-          </a:effectRef>
-          <a:fontRef idx="minor">
-            <a:schemeClr val="lt1"/>
-          </a:fontRef>
-        </p:style>
-        <p:txBody>
-          <a:bodyPr rtlCol="0" anchor="ctr"/>
-          <a:lstStyle/>
-          <a:p>
-            <a:pPr algn="ctr"/>
-          </a:p>
-        </p:txBody>
-      </p:sp>
-      <p:sp>
-        <p:nvSpPr>
-          <p:cNvPr id="14" name="TextBox 13"/>
+          <p:cNvPr id="12" name="TextBox 11"/>
           <p:cNvSpPr txBox="1"/>
           <p:nvPr/>
         </p:nvSpPr>
         <p:spPr>
           <a:xfrm>
-            <a:off x="6428231" y="2039112"/>
-            <a:ext cx="4553712" cy="329184"/>
+            <a:off x="6446520" y="2148839"/>
+            <a:ext cx="1161288" cy="1060704"/>
           </a:xfrm>
           <a:prstGeom prst="rect">
             <a:avLst/>
@@ -11422,36 +9826,36 @@
           </a:bodyPr>
           <a:lstStyle/>
           <a:p>
-            <a:pPr algn="l">
+            <a:pPr algn="ctr">
               <a:lnSpc>
-                <a:spcPct val="110000"/>
+                <a:spcPct val="108000"/>
               </a:lnSpc>
               <a:spcAft>
                 <a:spcPts val="0"/>
               </a:spcAft>
             </a:pPr>
             <a:r>
-              <a:rPr sz="1300" b="1">
+              <a:rPr sz="4400" b="1">
                 <a:solidFill>
                   <a:srgbClr val="5DDFC4"/>
                 </a:solidFill>
                 <a:latin typeface="Arial"/>
               </a:rPr>
-              <a:t>TASK CATALOG</a:t>
-            </a:r>
-          </a:p>
-        </p:txBody>
-      </p:sp>
-      <p:sp>
-        <p:nvSpPr>
-          <p:cNvPr id="15" name="TextBox 14"/>
+              <a:t>20</a:t>
+            </a:r>
+          </a:p>
+        </p:txBody>
+      </p:sp>
+      <p:sp>
+        <p:nvSpPr>
+          <p:cNvPr id="13" name="TextBox 12"/>
           <p:cNvSpPr txBox="1"/>
           <p:nvPr/>
         </p:nvSpPr>
         <p:spPr>
           <a:xfrm>
-            <a:off x="6419088" y="2450591"/>
-            <a:ext cx="4617720" cy="758952"/>
+            <a:off x="7836408" y="2157984"/>
+            <a:ext cx="3282696" cy="1042415"/>
           </a:xfrm>
           <a:prstGeom prst="rect">
             <a:avLst/>
@@ -11466,53 +9870,53 @@
           <a:p>
             <a:pPr algn="l">
               <a:lnSpc>
-                <a:spcPct val="110000"/>
+                <a:spcPct val="108000"/>
               </a:lnSpc>
               <a:spcAft>
                 <a:spcPts val="0"/>
               </a:spcAft>
             </a:pPr>
             <a:r>
-              <a:rPr sz="1830" b="1">
+              <a:rPr sz="2300" b="1">
                 <a:solidFill>
                   <a:srgbClr val="F6F4EF"/>
                 </a:solidFill>
                 <a:latin typeface="Arial"/>
               </a:rPr>
-              <a:t>Built 20 types of security tasks;</a:t>
+              <a:t>new kinds of tasks</a:t>
             </a:r>
           </a:p>
           <a:p>
             <a:pPr algn="l">
               <a:lnSpc>
-                <a:spcPct val="110000"/>
+                <a:spcPct val="108000"/>
               </a:lnSpc>
               <a:spcAft>
                 <a:spcPts val="0"/>
               </a:spcAft>
             </a:pPr>
             <a:r>
-              <a:rPr sz="1830" b="1">
+              <a:rPr sz="2300" b="1">
                 <a:solidFill>
                   <a:srgbClr val="F6F4EF"/>
                 </a:solidFill>
                 <a:latin typeface="Arial"/>
               </a:rPr>
-              <a:t>human review is still pending.</a:t>
-            </a:r>
-          </a:p>
-        </p:txBody>
-      </p:sp>
-      <p:sp>
-        <p:nvSpPr>
-          <p:cNvPr id="16" name="Rounded Rectangle 15"/>
+              <a:t>drafted</a:t>
+            </a:r>
+          </a:p>
+        </p:txBody>
+      </p:sp>
+      <p:sp>
+        <p:nvSpPr>
+          <p:cNvPr id="14" name="Rounded Rectangle 13"/>
           <p:cNvSpPr/>
           <p:nvPr/>
         </p:nvSpPr>
         <p:spPr>
           <a:xfrm>
-            <a:off x="713232" y="3858768"/>
-            <a:ext cx="5285232" cy="1618488"/>
+            <a:off x="731520" y="3931920"/>
+            <a:ext cx="5230368" cy="1682496"/>
           </a:xfrm>
           <a:prstGeom prst="roundRect">
             <a:avLst>
@@ -11550,57 +9954,14 @@
       </p:sp>
       <p:sp>
         <p:nvSpPr>
-          <p:cNvPr id="17" name="Rectangle 16"/>
-          <p:cNvSpPr/>
-          <p:nvPr/>
-        </p:nvSpPr>
-        <p:spPr>
-          <a:xfrm>
-            <a:off x="713232" y="3858768"/>
-            <a:ext cx="109728" cy="1618488"/>
-          </a:xfrm>
-          <a:prstGeom prst="rect">
-            <a:avLst/>
-          </a:prstGeom>
-          <a:solidFill>
-            <a:srgbClr val="FFC96E"/>
-          </a:solidFill>
-          <a:ln>
-            <a:noFill/>
-          </a:ln>
-        </p:spPr>
-        <p:style>
-          <a:lnRef idx="1">
-            <a:schemeClr val="accent1"/>
-          </a:lnRef>
-          <a:fillRef idx="3">
-            <a:schemeClr val="accent1"/>
-          </a:fillRef>
-          <a:effectRef idx="2">
-            <a:schemeClr val="accent1"/>
-          </a:effectRef>
-          <a:fontRef idx="minor">
-            <a:schemeClr val="lt1"/>
-          </a:fontRef>
-        </p:style>
-        <p:txBody>
-          <a:bodyPr rtlCol="0" anchor="ctr"/>
-          <a:lstStyle/>
-          <a:p>
-            <a:pPr algn="ctr"/>
-          </a:p>
-        </p:txBody>
-      </p:sp>
-      <p:sp>
-        <p:nvSpPr>
-          <p:cNvPr id="18" name="TextBox 17"/>
+          <p:cNvPr id="15" name="TextBox 14"/>
           <p:cNvSpPr txBox="1"/>
           <p:nvPr/>
         </p:nvSpPr>
         <p:spPr>
           <a:xfrm>
-            <a:off x="996696" y="4023359"/>
-            <a:ext cx="4553712" cy="329184"/>
+            <a:off x="987552" y="4187952"/>
+            <a:ext cx="1161288" cy="1060704"/>
           </a:xfrm>
           <a:prstGeom prst="rect">
             <a:avLst/>
@@ -11613,36 +9974,36 @@
           </a:bodyPr>
           <a:lstStyle/>
           <a:p>
-            <a:pPr algn="l">
+            <a:pPr algn="ctr">
               <a:lnSpc>
-                <a:spcPct val="110000"/>
+                <a:spcPct val="108000"/>
               </a:lnSpc>
               <a:spcAft>
                 <a:spcPts val="0"/>
               </a:spcAft>
             </a:pPr>
             <a:r>
-              <a:rPr sz="1300" b="1">
+              <a:rPr sz="4400" b="1">
                 <a:solidFill>
                   <a:srgbClr val="FFC96E"/>
                 </a:solidFill>
                 <a:latin typeface="Arial"/>
               </a:rPr>
-              <a:t>TEST CALIBRATION</a:t>
-            </a:r>
-          </a:p>
-        </p:txBody>
-      </p:sp>
-      <p:sp>
-        <p:nvSpPr>
-          <p:cNvPr id="19" name="TextBox 18"/>
+              <a:t>30</a:t>
+            </a:r>
+          </a:p>
+        </p:txBody>
+      </p:sp>
+      <p:sp>
+        <p:nvSpPr>
+          <p:cNvPr id="16" name="TextBox 15"/>
           <p:cNvSpPr txBox="1"/>
           <p:nvPr/>
         </p:nvSpPr>
         <p:spPr>
           <a:xfrm>
-            <a:off x="987552" y="4434840"/>
-            <a:ext cx="4617720" cy="758952"/>
+            <a:off x="2377440" y="4197096"/>
+            <a:ext cx="3282696" cy="1042415"/>
           </a:xfrm>
           <a:prstGeom prst="rect">
             <a:avLst/>
@@ -11657,53 +10018,53 @@
           <a:p>
             <a:pPr algn="l">
               <a:lnSpc>
-                <a:spcPct val="110000"/>
+                <a:spcPct val="108000"/>
               </a:lnSpc>
               <a:spcAft>
                 <a:spcPts val="0"/>
               </a:spcAft>
             </a:pPr>
             <a:r>
-              <a:rPr sz="1830" b="1">
+              <a:rPr sz="2300" b="1">
                 <a:solidFill>
                   <a:srgbClr val="F6F4EF"/>
                 </a:solidFill>
                 <a:latin typeface="Arial"/>
               </a:rPr>
-              <a:t>Rechecked 1,820 outcomes on</a:t>
+              <a:t>separate practice</a:t>
             </a:r>
           </a:p>
           <a:p>
             <a:pPr algn="l">
               <a:lnSpc>
-                <a:spcPct val="110000"/>
+                <a:spcPct val="108000"/>
               </a:lnSpc>
               <a:spcAft>
                 <a:spcPts val="0"/>
               </a:spcAft>
             </a:pPr>
             <a:r>
-              <a:rPr sz="1830" b="1">
+              <a:rPr sz="2300" b="1">
                 <a:solidFill>
                   <a:srgbClr val="F6F4EF"/>
                 </a:solidFill>
                 <a:latin typeface="Arial"/>
               </a:rPr>
-              <a:t>examples we designed.</a:t>
-            </a:r>
-          </a:p>
-        </p:txBody>
-      </p:sp>
-      <p:sp>
-        <p:nvSpPr>
-          <p:cNvPr id="20" name="Rounded Rectangle 19"/>
+              <a:t>runs completed</a:t>
+            </a:r>
+          </a:p>
+        </p:txBody>
+      </p:sp>
+      <p:sp>
+        <p:nvSpPr>
+          <p:cNvPr id="17" name="Rounded Rectangle 16"/>
           <p:cNvSpPr/>
           <p:nvPr/>
         </p:nvSpPr>
         <p:spPr>
           <a:xfrm>
-            <a:off x="6144768" y="3858768"/>
-            <a:ext cx="5285232" cy="1618488"/>
+            <a:off x="6190488" y="3931920"/>
+            <a:ext cx="5230368" cy="1682496"/>
           </a:xfrm>
           <a:prstGeom prst="roundRect">
             <a:avLst>
@@ -11741,57 +10102,14 @@
       </p:sp>
       <p:sp>
         <p:nvSpPr>
-          <p:cNvPr id="21" name="Rectangle 20"/>
-          <p:cNvSpPr/>
-          <p:nvPr/>
-        </p:nvSpPr>
-        <p:spPr>
-          <a:xfrm>
-            <a:off x="6144768" y="3858768"/>
-            <a:ext cx="109728" cy="1618488"/>
-          </a:xfrm>
-          <a:prstGeom prst="rect">
-            <a:avLst/>
-          </a:prstGeom>
-          <a:solidFill>
-            <a:srgbClr val="FF7773"/>
-          </a:solidFill>
-          <a:ln>
-            <a:noFill/>
-          </a:ln>
-        </p:spPr>
-        <p:style>
-          <a:lnRef idx="1">
-            <a:schemeClr val="accent1"/>
-          </a:lnRef>
-          <a:fillRef idx="3">
-            <a:schemeClr val="accent1"/>
-          </a:fillRef>
-          <a:effectRef idx="2">
-            <a:schemeClr val="accent1"/>
-          </a:effectRef>
-          <a:fontRef idx="minor">
-            <a:schemeClr val="lt1"/>
-          </a:fontRef>
-        </p:style>
-        <p:txBody>
-          <a:bodyPr rtlCol="0" anchor="ctr"/>
-          <a:lstStyle/>
-          <a:p>
-            <a:pPr algn="ctr"/>
-          </a:p>
-        </p:txBody>
-      </p:sp>
-      <p:sp>
-        <p:nvSpPr>
-          <p:cNvPr id="22" name="TextBox 21"/>
+          <p:cNvPr id="18" name="TextBox 17"/>
           <p:cNvSpPr txBox="1"/>
           <p:nvPr/>
         </p:nvSpPr>
         <p:spPr>
           <a:xfrm>
-            <a:off x="6428231" y="4023359"/>
-            <a:ext cx="4553712" cy="329184"/>
+            <a:off x="6446520" y="4187952"/>
+            <a:ext cx="1161288" cy="1060704"/>
           </a:xfrm>
           <a:prstGeom prst="rect">
             <a:avLst/>
@@ -11804,36 +10122,36 @@
           </a:bodyPr>
           <a:lstStyle/>
           <a:p>
-            <a:pPr algn="l">
+            <a:pPr algn="ctr">
               <a:lnSpc>
-                <a:spcPct val="110000"/>
+                <a:spcPct val="108000"/>
               </a:lnSpc>
               <a:spcAft>
                 <a:spcPts val="0"/>
               </a:spcAft>
             </a:pPr>
             <a:r>
-              <a:rPr sz="1300" b="1">
+              <a:rPr sz="4400" b="1">
                 <a:solidFill>
                   <a:srgbClr val="FF7773"/>
                 </a:solidFill>
                 <a:latin typeface="Arial"/>
               </a:rPr>
-              <a:t>CORRECTED PILOT</a:t>
-            </a:r>
-          </a:p>
-        </p:txBody>
-      </p:sp>
-      <p:sp>
-        <p:nvSpPr>
-          <p:cNvPr id="23" name="TextBox 22"/>
+              <a:t>✓</a:t>
+            </a:r>
+          </a:p>
+        </p:txBody>
+      </p:sp>
+      <p:sp>
+        <p:nvSpPr>
+          <p:cNvPr id="19" name="TextBox 18"/>
           <p:cNvSpPr txBox="1"/>
           <p:nvPr/>
         </p:nvSpPr>
         <p:spPr>
           <a:xfrm>
-            <a:off x="6419088" y="4434840"/>
-            <a:ext cx="4617720" cy="758952"/>
+            <a:off x="7836408" y="4197096"/>
+            <a:ext cx="3282696" cy="1042415"/>
           </a:xfrm>
           <a:prstGeom prst="rect">
             <a:avLst/>
@@ -11848,39 +10166,39 @@
           <a:p>
             <a:pPr algn="l">
               <a:lnSpc>
-                <a:spcPct val="110000"/>
+                <a:spcPct val="108000"/>
               </a:lnSpc>
               <a:spcAft>
                 <a:spcPts val="0"/>
               </a:spcAft>
             </a:pPr>
             <a:r>
-              <a:rPr sz="1830" b="1">
+              <a:rPr sz="2300" b="1">
                 <a:solidFill>
                   <a:srgbClr val="F6F4EF"/>
                 </a:solidFill>
                 <a:latin typeface="Arial"/>
               </a:rPr>
-              <a:t>Completed 30 separate trial runs</a:t>
+              <a:t>code and analyses</a:t>
             </a:r>
           </a:p>
           <a:p>
             <a:pPr algn="l">
               <a:lnSpc>
-                <a:spcPct val="110000"/>
+                <a:spcPct val="108000"/>
               </a:lnSpc>
               <a:spcAft>
                 <a:spcPts val="0"/>
               </a:spcAft>
             </a:pPr>
             <a:r>
-              <a:rPr sz="1830" b="1">
+              <a:rPr sz="2300" b="1">
                 <a:solidFill>
                   <a:srgbClr val="F6F4EF"/>
                 </a:solidFill>
                 <a:latin typeface="Arial"/>
               </a:rPr>
-              <a:t>with a revised checker.</a:t>
+              <a:t>shared online</a:t>
             </a:r>
           </a:p>
         </p:txBody>
@@ -11954,8 +10272,8 @@
         </p:nvSpPr>
         <p:spPr>
           <a:xfrm>
-            <a:off x="640080" y="329184"/>
-            <a:ext cx="9966960" cy="274320"/>
+            <a:off x="640080" y="320040"/>
+            <a:ext cx="9875520" cy="274320"/>
           </a:xfrm>
           <a:prstGeom prst="rect">
             <a:avLst/>
@@ -11970,7 +10288,7 @@
           <a:p>
             <a:pPr algn="l">
               <a:lnSpc>
-                <a:spcPct val="110000"/>
+                <a:spcPct val="108000"/>
               </a:lnSpc>
               <a:spcAft>
                 <a:spcPts val="0"/>
@@ -11983,7 +10301,7 @@
                 </a:solidFill>
                 <a:latin typeface="Arial"/>
               </a:rPr>
-              <a:t>WHAT THE EVIDENCE MEANS</a:t>
+              <a:t>WHAT COMES NEXT?</a:t>
             </a:r>
           </a:p>
         </p:txBody>
@@ -11996,8 +10314,8 @@
         </p:nvSpPr>
         <p:spPr>
           <a:xfrm>
-            <a:off x="640080" y="740664"/>
-            <a:ext cx="10927080" cy="841248"/>
+            <a:off x="640080" y="758952"/>
+            <a:ext cx="10954512" cy="822960"/>
           </a:xfrm>
           <a:prstGeom prst="rect">
             <a:avLst/>
@@ -12012,20 +10330,20 @@
           <a:p>
             <a:pPr algn="l">
               <a:lnSpc>
-                <a:spcPct val="110000"/>
+                <a:spcPct val="108000"/>
               </a:lnSpc>
               <a:spcAft>
                 <a:spcPts val="0"/>
               </a:spcAft>
             </a:pPr>
             <a:r>
-              <a:rPr sz="3300" b="1">
+              <a:rPr sz="3500" b="1">
                 <a:solidFill>
                   <a:srgbClr val="F6F4EF"/>
                 </a:solidFill>
                 <a:latin typeface="Arial"/>
               </a:rPr>
-              <a:t>A clear result, with clear limits</a:t>
+              <a:t>Same code. Two different messages.</a:t>
             </a:r>
           </a:p>
         </p:txBody>
@@ -12038,7 +10356,7 @@
         </p:nvCxnSpPr>
         <p:spPr>
           <a:xfrm>
-            <a:off x="640080" y="6473952"/>
+            <a:off x="640080" y="6464808"/>
             <a:ext cx="10908792" cy="0"/>
           </a:xfrm>
           <a:prstGeom prst="line">
@@ -12074,7 +10392,7 @@
         <p:spPr>
           <a:xfrm>
             <a:off x="658368" y="6528816"/>
-            <a:ext cx="10424160" cy="173736"/>
+            <a:ext cx="10332720" cy="173736"/>
           </a:xfrm>
           <a:prstGeom prst="rect">
             <a:avLst/>
@@ -12089,20 +10407,20 @@
           <a:p>
             <a:pPr algn="l">
               <a:lnSpc>
-                <a:spcPct val="110000"/>
+                <a:spcPct val="108000"/>
               </a:lnSpc>
               <a:spcAft>
                 <a:spcPts val="0"/>
               </a:spcAft>
             </a:pPr>
             <a:r>
-              <a:rPr sz="850" b="0">
-                <a:solidFill>
-                  <a:srgbClr val="A8B5C8"/>
+              <a:rPr sz="819" b="0">
+                <a:solidFill>
+                  <a:srgbClr val="ADB9CA"/>
                 </a:solidFill>
                 <a:latin typeface="Arial"/>
               </a:rPr>
-              <a:t>Limitations: paper/final.md, Results and Discussion; README.md.</a:t>
+              <a:t>Planned study: docs/INTEGRATED_STUDY_EXTENSION_20261018.md.</a:t>
             </a:r>
           </a:p>
         </p:txBody>
@@ -12115,8 +10433,8 @@
         </p:nvSpPr>
         <p:spPr>
           <a:xfrm>
-            <a:off x="11064240" y="6501384"/>
-            <a:ext cx="457200" cy="219456"/>
+            <a:off x="11045952" y="6510528"/>
+            <a:ext cx="457200" cy="201168"/>
           </a:xfrm>
           <a:prstGeom prst="rect">
             <a:avLst/>
@@ -12131,7 +10449,7 @@
           <a:p>
             <a:pPr algn="r">
               <a:lnSpc>
-                <a:spcPct val="110000"/>
+                <a:spcPct val="108000"/>
               </a:lnSpc>
               <a:spcAft>
                 <a:spcPts val="0"/>
@@ -12140,7 +10458,7 @@
             <a:r>
               <a:rPr sz="1000" b="0">
                 <a:solidFill>
-                  <a:srgbClr val="A8B5C8"/>
+                  <a:srgbClr val="ADB9CA"/>
                 </a:solidFill>
                 <a:latin typeface="Arial"/>
               </a:rPr>
@@ -12157,697 +10475,8 @@
         </p:nvSpPr>
         <p:spPr>
           <a:xfrm>
-            <a:off x="713232" y="1865376"/>
-            <a:ext cx="5340096" cy="3191256"/>
-          </a:xfrm>
-          <a:prstGeom prst="roundRect">
-            <a:avLst>
-              <a:gd name="adj" fmla="val 12000"/>
-            </a:avLst>
-          </a:prstGeom>
-          <a:solidFill>
-            <a:srgbClr val="173A39"/>
-          </a:solidFill>
-          <a:ln w="15240">
-            <a:solidFill>
-              <a:srgbClr val="2A716C"/>
-            </a:solidFill>
-          </a:ln>
-        </p:spPr>
-        <p:style>
-          <a:lnRef idx="1">
-            <a:schemeClr val="accent1"/>
-          </a:lnRef>
-          <a:fillRef idx="3">
-            <a:schemeClr val="accent1"/>
-          </a:fillRef>
-          <a:effectRef idx="2">
-            <a:schemeClr val="accent1"/>
-          </a:effectRef>
-          <a:fontRef idx="minor">
-            <a:schemeClr val="lt1"/>
-          </a:fontRef>
-        </p:style>
-        <p:txBody>
-          <a:bodyPr rtlCol="0" anchor="ctr"/>
-          <a:lstStyle/>
-          <a:p>
-            <a:pPr algn="ctr"/>
-          </a:p>
-        </p:txBody>
-      </p:sp>
-      <p:sp>
-        <p:nvSpPr>
-          <p:cNvPr id="9" name="TextBox 8"/>
-          <p:cNvSpPr txBox="1"/>
-          <p:nvPr/>
-        </p:nvSpPr>
-        <p:spPr>
-          <a:xfrm>
-            <a:off x="987552" y="2139696"/>
-            <a:ext cx="4663440" cy="384048"/>
-          </a:xfrm>
-          <a:prstGeom prst="rect">
-            <a:avLst/>
-          </a:prstGeom>
-          <a:noFill/>
-        </p:spPr>
-        <p:txBody>
-          <a:bodyPr wrap="square" lIns="0" rIns="0" tIns="0" bIns="0" anchor="ctr">
-            <a:spAutoFit/>
-          </a:bodyPr>
-          <a:lstStyle/>
-          <a:p>
-            <a:pPr algn="l">
-              <a:lnSpc>
-                <a:spcPct val="110000"/>
-              </a:lnSpc>
-              <a:spcAft>
-                <a:spcPts val="0"/>
-              </a:spcAft>
-            </a:pPr>
-            <a:r>
-              <a:rPr sz="1500" b="1">
-                <a:solidFill>
-                  <a:srgbClr val="5DDFC4"/>
-                </a:solidFill>
-                <a:latin typeface="Arial"/>
-              </a:rPr>
-              <a:t>WE CAN SAY</a:t>
-            </a:r>
-          </a:p>
-        </p:txBody>
-      </p:sp>
-      <p:sp>
-        <p:nvSpPr>
-          <p:cNvPr id="10" name="TextBox 9"/>
-          <p:cNvSpPr txBox="1"/>
-          <p:nvPr/>
-        </p:nvSpPr>
-        <p:spPr>
-          <a:xfrm>
-            <a:off x="987552" y="2743200"/>
-            <a:ext cx="4626864" cy="1746504"/>
-          </a:xfrm>
-          <a:prstGeom prst="rect">
-            <a:avLst/>
-          </a:prstGeom>
-          <a:noFill/>
-        </p:spPr>
-        <p:txBody>
-          <a:bodyPr wrap="square" lIns="0" rIns="0" tIns="0" bIns="0" anchor="t">
-            <a:spAutoFit/>
-          </a:bodyPr>
-          <a:lstStyle/>
-          <a:p>
-            <a:pPr algn="l">
-              <a:lnSpc>
-                <a:spcPct val="110000"/>
-              </a:lnSpc>
-              <a:spcAft>
-                <a:spcPts val="0"/>
-              </a:spcAft>
-            </a:pPr>
-            <a:r>
-              <a:rPr sz="2400" b="1">
-                <a:solidFill>
-                  <a:srgbClr val="F6F4EF"/>
-                </a:solidFill>
-                <a:latin typeface="Arial"/>
-              </a:rPr>
-              <a:t>The checker and its own</a:t>
-            </a:r>
-          </a:p>
-          <a:p>
-            <a:pPr algn="l">
-              <a:lnSpc>
-                <a:spcPct val="110000"/>
-              </a:lnSpc>
-              <a:spcAft>
-                <a:spcPts val="0"/>
-              </a:spcAft>
-            </a:pPr>
-            <a:r>
-              <a:rPr sz="2400" b="1">
-                <a:solidFill>
-                  <a:srgbClr val="F6F4EF"/>
-                </a:solidFill>
-                <a:latin typeface="Arial"/>
-              </a:rPr>
-              <a:t>implemented tests disagreed</a:t>
-            </a:r>
-          </a:p>
-          <a:p>
-            <a:pPr algn="l">
-              <a:lnSpc>
-                <a:spcPct val="110000"/>
-              </a:lnSpc>
-              <a:spcAft>
-                <a:spcPts val="0"/>
-              </a:spcAft>
-            </a:pPr>
-            <a:r>
-              <a:rPr sz="2400" b="1">
-                <a:solidFill>
-                  <a:srgbClr val="F6F4EF"/>
-                </a:solidFill>
-                <a:latin typeface="Arial"/>
-              </a:rPr>
-              <a:t>in nine archived finals.</a:t>
-            </a:r>
-          </a:p>
-        </p:txBody>
-      </p:sp>
-      <p:sp>
-        <p:nvSpPr>
-          <p:cNvPr id="11" name="Rounded Rectangle 10"/>
-          <p:cNvSpPr/>
-          <p:nvPr/>
-        </p:nvSpPr>
-        <p:spPr>
-          <a:xfrm>
-            <a:off x="6181344" y="1865376"/>
-            <a:ext cx="5285232" cy="3191256"/>
-          </a:xfrm>
-          <a:prstGeom prst="roundRect">
-            <a:avLst>
-              <a:gd name="adj" fmla="val 12000"/>
-            </a:avLst>
-          </a:prstGeom>
-          <a:solidFill>
-            <a:srgbClr val="3A2C35"/>
-          </a:solidFill>
-          <a:ln w="15240">
-            <a:solidFill>
-              <a:srgbClr val="795867"/>
-            </a:solidFill>
-          </a:ln>
-        </p:spPr>
-        <p:style>
-          <a:lnRef idx="1">
-            <a:schemeClr val="accent1"/>
-          </a:lnRef>
-          <a:fillRef idx="3">
-            <a:schemeClr val="accent1"/>
-          </a:fillRef>
-          <a:effectRef idx="2">
-            <a:schemeClr val="accent1"/>
-          </a:effectRef>
-          <a:fontRef idx="minor">
-            <a:schemeClr val="lt1"/>
-          </a:fontRef>
-        </p:style>
-        <p:txBody>
-          <a:bodyPr rtlCol="0" anchor="ctr"/>
-          <a:lstStyle/>
-          <a:p>
-            <a:pPr algn="ctr"/>
-          </a:p>
-        </p:txBody>
-      </p:sp>
-      <p:sp>
-        <p:nvSpPr>
-          <p:cNvPr id="12" name="TextBox 11"/>
-          <p:cNvSpPr txBox="1"/>
-          <p:nvPr/>
-        </p:nvSpPr>
-        <p:spPr>
-          <a:xfrm>
-            <a:off x="6446520" y="2139696"/>
-            <a:ext cx="4663440" cy="384048"/>
-          </a:xfrm>
-          <a:prstGeom prst="rect">
-            <a:avLst/>
-          </a:prstGeom>
-          <a:noFill/>
-        </p:spPr>
-        <p:txBody>
-          <a:bodyPr wrap="square" lIns="0" rIns="0" tIns="0" bIns="0" anchor="ctr">
-            <a:spAutoFit/>
-          </a:bodyPr>
-          <a:lstStyle/>
-          <a:p>
-            <a:pPr algn="l">
-              <a:lnSpc>
-                <a:spcPct val="110000"/>
-              </a:lnSpc>
-              <a:spcAft>
-                <a:spcPts val="0"/>
-              </a:spcAft>
-            </a:pPr>
-            <a:r>
-              <a:rPr sz="1500" b="1">
-                <a:solidFill>
-                  <a:srgbClr val="FF7773"/>
-                </a:solidFill>
-                <a:latin typeface="Arial"/>
-              </a:rPr>
-              <a:t>WE CANNOT YET SAY</a:t>
-            </a:r>
-          </a:p>
-        </p:txBody>
-      </p:sp>
-      <p:sp>
-        <p:nvSpPr>
-          <p:cNvPr id="13" name="TextBox 12"/>
-          <p:cNvSpPr txBox="1"/>
-          <p:nvPr/>
-        </p:nvSpPr>
-        <p:spPr>
-          <a:xfrm>
-            <a:off x="6455664" y="2743200"/>
-            <a:ext cx="4626864" cy="1746504"/>
-          </a:xfrm>
-          <a:prstGeom prst="rect">
-            <a:avLst/>
-          </a:prstGeom>
-          <a:noFill/>
-        </p:spPr>
-        <p:txBody>
-          <a:bodyPr wrap="square" lIns="0" rIns="0" tIns="0" bIns="0" anchor="t">
-            <a:spAutoFit/>
-          </a:bodyPr>
-          <a:lstStyle/>
-          <a:p>
-            <a:pPr algn="l">
-              <a:lnSpc>
-                <a:spcPct val="110000"/>
-              </a:lnSpc>
-              <a:spcAft>
-                <a:spcPts val="0"/>
-              </a:spcAft>
-            </a:pPr>
-            <a:r>
-              <a:rPr sz="2300" b="1">
-                <a:solidFill>
-                  <a:srgbClr val="F6F4EF"/>
-                </a:solidFill>
-                <a:latin typeface="Arial"/>
-              </a:rPr>
-              <a:t>The AI generally reacts badly</a:t>
-            </a:r>
-          </a:p>
-          <a:p>
-            <a:pPr algn="l">
-              <a:lnSpc>
-                <a:spcPct val="110000"/>
-              </a:lnSpc>
-              <a:spcAft>
-                <a:spcPts val="0"/>
-              </a:spcAft>
-            </a:pPr>
-            <a:r>
-              <a:rPr sz="2300" b="1">
-                <a:solidFill>
-                  <a:srgbClr val="F6F4EF"/>
-                </a:solidFill>
-                <a:latin typeface="Arial"/>
-              </a:rPr>
-              <a:t>to wrong feedback—or that</a:t>
-            </a:r>
-          </a:p>
-          <a:p>
-            <a:pPr algn="l">
-              <a:lnSpc>
-                <a:spcPct val="110000"/>
-              </a:lnSpc>
-              <a:spcAft>
-                <a:spcPts val="0"/>
-              </a:spcAft>
-            </a:pPr>
-            <a:r>
-              <a:rPr sz="2300" b="1">
-                <a:solidFill>
-                  <a:srgbClr val="F6F4EF"/>
-                </a:solidFill>
-                <a:latin typeface="Arial"/>
-              </a:rPr>
-              <a:t>those fixes were fully secure.</a:t>
-            </a:r>
-          </a:p>
-        </p:txBody>
-      </p:sp>
-      <p:sp>
-        <p:nvSpPr>
-          <p:cNvPr id="14" name="Rounded Rectangle 13"/>
-          <p:cNvSpPr/>
-          <p:nvPr/>
-        </p:nvSpPr>
-        <p:spPr>
-          <a:xfrm>
-            <a:off x="731520" y="5449824"/>
-            <a:ext cx="10725912" cy="475488"/>
-          </a:xfrm>
-          <a:prstGeom prst="roundRect">
-            <a:avLst>
-              <a:gd name="adj" fmla="val 12000"/>
-            </a:avLst>
-          </a:prstGeom>
-          <a:solidFill>
-            <a:srgbClr val="1D2B45"/>
-          </a:solidFill>
-          <a:ln>
-            <a:noFill/>
-          </a:ln>
-        </p:spPr>
-        <p:style>
-          <a:lnRef idx="1">
-            <a:schemeClr val="accent1"/>
-          </a:lnRef>
-          <a:fillRef idx="3">
-            <a:schemeClr val="accent1"/>
-          </a:fillRef>
-          <a:effectRef idx="2">
-            <a:schemeClr val="accent1"/>
-          </a:effectRef>
-          <a:fontRef idx="minor">
-            <a:schemeClr val="lt1"/>
-          </a:fontRef>
-        </p:style>
-        <p:txBody>
-          <a:bodyPr rtlCol="0" anchor="ctr"/>
-          <a:lstStyle/>
-          <a:p>
-            <a:pPr algn="ctr"/>
-          </a:p>
-        </p:txBody>
-      </p:sp>
-      <p:sp>
-        <p:nvSpPr>
-          <p:cNvPr id="15" name="TextBox 14"/>
-          <p:cNvSpPr txBox="1"/>
-          <p:nvPr/>
-        </p:nvSpPr>
-        <p:spPr>
-          <a:xfrm>
-            <a:off x="822960" y="5468112"/>
-            <a:ext cx="10543032" cy="438912"/>
-          </a:xfrm>
-          <a:prstGeom prst="rect">
-            <a:avLst/>
-          </a:prstGeom>
-          <a:noFill/>
-        </p:spPr>
-        <p:txBody>
-          <a:bodyPr wrap="square" lIns="0" rIns="0" tIns="0" bIns="0" anchor="ctr">
-            <a:spAutoFit/>
-          </a:bodyPr>
-          <a:lstStyle/>
-          <a:p>
-            <a:pPr algn="ctr">
-              <a:lnSpc>
-                <a:spcPct val="110000"/>
-              </a:lnSpc>
-              <a:spcAft>
-                <a:spcPts val="0"/>
-              </a:spcAft>
-            </a:pPr>
-            <a:r>
-              <a:rPr sz="1500" b="1">
-                <a:solidFill>
-                  <a:srgbClr val="FFC96E"/>
-                </a:solidFill>
-                <a:latin typeface="Arial"/>
-              </a:rPr>
-              <a:t>Old logs: none of 81 intermediate checks saved the raw test result.</a:t>
-            </a:r>
-          </a:p>
-        </p:txBody>
-      </p:sp>
-    </p:spTree>
-  </p:cSld>
-  <p:clrMapOvr>
-    <a:masterClrMapping/>
-  </p:clrMapOvr>
-</p:sld>
-</file>
-
-<file path=ppt/slides/slide9.xml><?xml version="1.0" encoding="utf-8"?>
-<p:sld xmlns:a="http://schemas.openxmlformats.org/drawingml/2006/main" xmlns:p="http://schemas.openxmlformats.org/presentationml/2006/main" xmlns:r="http://schemas.openxmlformats.org/officeDocument/2006/relationships">
-  <p:cSld>
-    <p:spTree>
-      <p:nvGrpSpPr>
-        <p:cNvPr id="1" name=""/>
-        <p:cNvGrpSpPr/>
-        <p:nvPr/>
-      </p:nvGrpSpPr>
-      <p:grpSpPr/>
-      <p:sp>
-        <p:nvSpPr>
-          <p:cNvPr id="2" name="Rectangle 1"/>
-          <p:cNvSpPr/>
-          <p:nvPr/>
-        </p:nvSpPr>
-        <p:spPr>
-          <a:xfrm>
-            <a:off x="0" y="0"/>
-            <a:ext cx="12191695" cy="6858000"/>
-          </a:xfrm>
-          <a:prstGeom prst="rect">
-            <a:avLst/>
-          </a:prstGeom>
-          <a:solidFill>
-            <a:srgbClr val="0B1220"/>
-          </a:solidFill>
-          <a:ln>
-            <a:noFill/>
-          </a:ln>
-        </p:spPr>
-        <p:style>
-          <a:lnRef idx="1">
-            <a:schemeClr val="accent1"/>
-          </a:lnRef>
-          <a:fillRef idx="3">
-            <a:schemeClr val="accent1"/>
-          </a:fillRef>
-          <a:effectRef idx="2">
-            <a:schemeClr val="accent1"/>
-          </a:effectRef>
-          <a:fontRef idx="minor">
-            <a:schemeClr val="lt1"/>
-          </a:fontRef>
-        </p:style>
-        <p:txBody>
-          <a:bodyPr rtlCol="0" anchor="ctr"/>
-          <a:lstStyle/>
-          <a:p>
-            <a:pPr algn="ctr"/>
-          </a:p>
-        </p:txBody>
-      </p:sp>
-      <p:sp>
-        <p:nvSpPr>
-          <p:cNvPr id="3" name="TextBox 2"/>
-          <p:cNvSpPr txBox="1"/>
-          <p:nvPr/>
-        </p:nvSpPr>
-        <p:spPr>
-          <a:xfrm>
-            <a:off x="640080" y="329184"/>
-            <a:ext cx="9966960" cy="274320"/>
-          </a:xfrm>
-          <a:prstGeom prst="rect">
-            <a:avLst/>
-          </a:prstGeom>
-          <a:noFill/>
-        </p:spPr>
-        <p:txBody>
-          <a:bodyPr wrap="square" lIns="0" rIns="0" tIns="0" bIns="0" anchor="ctr">
-            <a:spAutoFit/>
-          </a:bodyPr>
-          <a:lstStyle/>
-          <a:p>
-            <a:pPr algn="l">
-              <a:lnSpc>
-                <a:spcPct val="110000"/>
-              </a:lnSpc>
-              <a:spcAft>
-                <a:spcPts val="0"/>
-              </a:spcAft>
-            </a:pPr>
-            <a:r>
-              <a:rPr sz="1100" b="1">
-                <a:solidFill>
-                  <a:srgbClr val="77A9FF"/>
-                </a:solidFill>
-                <a:latin typeface="Arial"/>
-              </a:rPr>
-              <a:t>THE NEXT EXPERIMENT</a:t>
-            </a:r>
-          </a:p>
-        </p:txBody>
-      </p:sp>
-      <p:sp>
-        <p:nvSpPr>
-          <p:cNvPr id="4" name="TextBox 3"/>
-          <p:cNvSpPr txBox="1"/>
-          <p:nvPr/>
-        </p:nvSpPr>
-        <p:spPr>
-          <a:xfrm>
-            <a:off x="640080" y="740664"/>
-            <a:ext cx="10927080" cy="841248"/>
-          </a:xfrm>
-          <a:prstGeom prst="rect">
-            <a:avLst/>
-          </a:prstGeom>
-          <a:noFill/>
-        </p:spPr>
-        <p:txBody>
-          <a:bodyPr wrap="square" lIns="0" rIns="0" tIns="0" bIns="0" anchor="t">
-            <a:spAutoFit/>
-          </a:bodyPr>
-          <a:lstStyle/>
-          <a:p>
-            <a:pPr algn="l">
-              <a:lnSpc>
-                <a:spcPct val="110000"/>
-              </a:lnSpc>
-              <a:spcAft>
-                <a:spcPts val="0"/>
-              </a:spcAft>
-            </a:pPr>
-            <a:r>
-              <a:rPr sz="3300" b="1">
-                <a:solidFill>
-                  <a:srgbClr val="F6F4EF"/>
-                </a:solidFill>
-                <a:latin typeface="Arial"/>
-              </a:rPr>
-              <a:t>Same code. Two different verdicts.</a:t>
-            </a:r>
-          </a:p>
-        </p:txBody>
-      </p:sp>
-      <p:cxnSp>
-        <p:nvCxnSpPr>
-          <p:cNvPr id="5" name="Connector 4"/>
-          <p:cNvCxnSpPr/>
-          <p:nvPr/>
-        </p:nvCxnSpPr>
-        <p:spPr>
-          <a:xfrm>
-            <a:off x="640080" y="6473952"/>
-            <a:ext cx="10908792" cy="0"/>
-          </a:xfrm>
-          <a:prstGeom prst="line">
-            <a:avLst/>
-          </a:prstGeom>
-          <a:ln w="19050">
-            <a:solidFill>
-              <a:srgbClr val="34445D"/>
-            </a:solidFill>
-          </a:ln>
-        </p:spPr>
-        <p:style>
-          <a:lnRef idx="2">
-            <a:schemeClr val="accent1"/>
-          </a:lnRef>
-          <a:fillRef idx="0">
-            <a:schemeClr val="accent1"/>
-          </a:fillRef>
-          <a:effectRef idx="1">
-            <a:schemeClr val="accent1"/>
-          </a:effectRef>
-          <a:fontRef idx="minor">
-            <a:schemeClr val="tx1"/>
-          </a:fontRef>
-        </p:style>
-      </p:cxnSp>
-      <p:sp>
-        <p:nvSpPr>
-          <p:cNvPr id="6" name="TextBox 5"/>
-          <p:cNvSpPr txBox="1"/>
-          <p:nvPr/>
-        </p:nvSpPr>
-        <p:spPr>
-          <a:xfrm>
-            <a:off x="658368" y="6528816"/>
-            <a:ext cx="10424160" cy="173736"/>
-          </a:xfrm>
-          <a:prstGeom prst="rect">
-            <a:avLst/>
-          </a:prstGeom>
-          <a:noFill/>
-        </p:spPr>
-        <p:txBody>
-          <a:bodyPr wrap="square" lIns="0" rIns="0" tIns="0" bIns="0" anchor="ctr">
-            <a:spAutoFit/>
-          </a:bodyPr>
-          <a:lstStyle/>
-          <a:p>
-            <a:pPr algn="l">
-              <a:lnSpc>
-                <a:spcPct val="110000"/>
-              </a:lnSpc>
-              <a:spcAft>
-                <a:spcPts val="0"/>
-              </a:spcAft>
-            </a:pPr>
-            <a:r>
-              <a:rPr sz="850" b="0">
-                <a:solidFill>
-                  <a:srgbClr val="A8B5C8"/>
-                </a:solidFill>
-                <a:latin typeface="Arial"/>
-              </a:rPr>
-              <a:t>Planned design only: docs/INTEGRATED_STUDY_EXTENSION_20261018.md.</a:t>
-            </a:r>
-          </a:p>
-        </p:txBody>
-      </p:sp>
-      <p:sp>
-        <p:nvSpPr>
-          <p:cNvPr id="7" name="TextBox 6"/>
-          <p:cNvSpPr txBox="1"/>
-          <p:nvPr/>
-        </p:nvSpPr>
-        <p:spPr>
-          <a:xfrm>
-            <a:off x="11064240" y="6501384"/>
-            <a:ext cx="457200" cy="219456"/>
-          </a:xfrm>
-          <a:prstGeom prst="rect">
-            <a:avLst/>
-          </a:prstGeom>
-          <a:noFill/>
-        </p:spPr>
-        <p:txBody>
-          <a:bodyPr wrap="square" lIns="0" rIns="0" tIns="0" bIns="0" anchor="ctr">
-            <a:spAutoFit/>
-          </a:bodyPr>
-          <a:lstStyle/>
-          <a:p>
-            <a:pPr algn="r">
-              <a:lnSpc>
-                <a:spcPct val="110000"/>
-              </a:lnSpc>
-              <a:spcAft>
-                <a:spcPts val="0"/>
-              </a:spcAft>
-            </a:pPr>
-            <a:r>
-              <a:rPr sz="1000" b="0">
-                <a:solidFill>
-                  <a:srgbClr val="A8B5C8"/>
-                </a:solidFill>
-                <a:latin typeface="Arial"/>
-              </a:rPr>
-              <a:t>09</a:t>
-            </a:r>
-          </a:p>
-        </p:txBody>
-      </p:sp>
-      <p:sp>
-        <p:nvSpPr>
-          <p:cNvPr id="8" name="Rounded Rectangle 7"/>
-          <p:cNvSpPr/>
-          <p:nvPr/>
-        </p:nvSpPr>
-        <p:spPr>
-          <a:xfrm>
-            <a:off x="3794760" y="1783080"/>
-            <a:ext cx="4608576" cy="950976"/>
+            <a:off x="3785615" y="1783080"/>
+            <a:ext cx="4626864" cy="877824"/>
           </a:xfrm>
           <a:prstGeom prst="roundRect">
             <a:avLst>
@@ -12893,8 +10522,8 @@
         </p:nvSpPr>
         <p:spPr>
           <a:xfrm>
-            <a:off x="4014215" y="1993392"/>
-            <a:ext cx="4160520" cy="475488"/>
+            <a:off x="4041648" y="1984248"/>
+            <a:ext cx="4096512" cy="484632"/>
           </a:xfrm>
           <a:prstGeom prst="rect">
             <a:avLst/>
@@ -12909,20 +10538,20 @@
           <a:p>
             <a:pPr algn="ctr">
               <a:lnSpc>
-                <a:spcPct val="110000"/>
+                <a:spcPct val="108000"/>
               </a:lnSpc>
               <a:spcAft>
                 <a:spcPts val="0"/>
               </a:spcAft>
             </a:pPr>
             <a:r>
-              <a:rPr sz="1950" b="1">
+              <a:rPr sz="2100" b="1">
                 <a:solidFill>
                   <a:srgbClr val="F6F4EF"/>
                 </a:solidFill>
                 <a:latin typeface="Arial"/>
               </a:rPr>
-              <a:t>One independently checked candidate</a:t>
+              <a:t>The same checked code</a:t>
             </a:r>
           </a:p>
         </p:txBody>
@@ -12935,8 +10564,8 @@
         </p:nvCxnSpPr>
         <p:spPr>
           <a:xfrm>
-            <a:off x="6099048" y="2734056"/>
-            <a:ext cx="0" cy="411480"/>
+            <a:off x="6099048" y="2660904"/>
+            <a:ext cx="0" cy="402336"/>
           </a:xfrm>
           <a:prstGeom prst="line">
             <a:avLst/>
@@ -12970,8 +10599,8 @@
         </p:nvCxnSpPr>
         <p:spPr>
           <a:xfrm>
-            <a:off x="3383280" y="3145536"/>
-            <a:ext cx="5422392" cy="0"/>
+            <a:off x="3355848" y="3063240"/>
+            <a:ext cx="5486400" cy="0"/>
           </a:xfrm>
           <a:prstGeom prst="line">
             <a:avLst/>
@@ -13005,8 +10634,8 @@
         </p:nvCxnSpPr>
         <p:spPr>
           <a:xfrm>
-            <a:off x="3383280" y="3145536"/>
-            <a:ext cx="0" cy="301752"/>
+            <a:off x="3355848" y="3063240"/>
+            <a:ext cx="0" cy="283464"/>
           </a:xfrm>
           <a:prstGeom prst="line">
             <a:avLst/>
@@ -13040,8 +10669,8 @@
         </p:nvCxnSpPr>
         <p:spPr>
           <a:xfrm>
-            <a:off x="8805672" y="3145536"/>
-            <a:ext cx="0" cy="301752"/>
+            <a:off x="8842248" y="3063240"/>
+            <a:ext cx="0" cy="283464"/>
           </a:xfrm>
           <a:prstGeom prst="line">
             <a:avLst/>
@@ -13075,8 +10704,8 @@
         </p:nvSpPr>
         <p:spPr>
           <a:xfrm>
-            <a:off x="1097280" y="3447288"/>
-            <a:ext cx="4608576" cy="1188720"/>
+            <a:off x="1069848" y="3346704"/>
+            <a:ext cx="4608576" cy="1069848"/>
           </a:xfrm>
           <a:prstGeom prst="roundRect">
             <a:avLst>
@@ -13122,8 +10751,8 @@
         </p:nvSpPr>
         <p:spPr>
           <a:xfrm>
-            <a:off x="1380744" y="3758184"/>
-            <a:ext cx="4023360" cy="539496"/>
+            <a:off x="1344168" y="3621024"/>
+            <a:ext cx="4059936" cy="548640"/>
           </a:xfrm>
           <a:prstGeom prst="rect">
             <a:avLst/>
@@ -13138,20 +10767,20 @@
           <a:p>
             <a:pPr algn="ctr">
               <a:lnSpc>
-                <a:spcPct val="110000"/>
+                <a:spcPct val="108000"/>
               </a:lnSpc>
               <a:spcAft>
                 <a:spcPts val="0"/>
               </a:spcAft>
             </a:pPr>
             <a:r>
-              <a:rPr sz="2300" b="1">
+              <a:rPr sz="2400" b="1">
                 <a:solidFill>
                   <a:srgbClr val="5DDFC4"/>
                 </a:solidFill>
                 <a:latin typeface="Arial"/>
               </a:rPr>
-              <a:t>A  ·  truthful PASS</a:t>
+              <a:t>AI hears true PASS</a:t>
             </a:r>
           </a:p>
         </p:txBody>
@@ -13164,8 +10793,8 @@
         </p:nvSpPr>
         <p:spPr>
           <a:xfrm>
-            <a:off x="6473952" y="3447288"/>
-            <a:ext cx="4608576" cy="1188720"/>
+            <a:off x="6519672" y="3346704"/>
+            <a:ext cx="4608576" cy="1069848"/>
           </a:xfrm>
           <a:prstGeom prst="roundRect">
             <a:avLst>
@@ -13173,11 +10802,11 @@
             </a:avLst>
           </a:prstGeom>
           <a:solidFill>
-            <a:srgbClr val="3C2836"/>
+            <a:srgbClr val="3D2634"/>
           </a:solidFill>
           <a:ln w="15240">
             <a:solidFill>
-              <a:srgbClr val="755065"/>
+              <a:srgbClr val="794458"/>
             </a:solidFill>
           </a:ln>
         </p:spPr>
@@ -13211,8 +10840,8 @@
         </p:nvSpPr>
         <p:spPr>
           <a:xfrm>
-            <a:off x="6766560" y="3758184"/>
-            <a:ext cx="4023360" cy="539496"/>
+            <a:off x="6803136" y="3621024"/>
+            <a:ext cx="4050791" cy="548640"/>
           </a:xfrm>
           <a:prstGeom prst="rect">
             <a:avLst/>
@@ -13227,20 +10856,20 @@
           <a:p>
             <a:pPr algn="ctr">
               <a:lnSpc>
-                <a:spcPct val="110000"/>
+                <a:spcPct val="108000"/>
               </a:lnSpc>
               <a:spcAft>
                 <a:spcPts val="0"/>
               </a:spcAft>
             </a:pPr>
             <a:r>
-              <a:rPr sz="2300" b="1">
+              <a:rPr sz="2400" b="1">
                 <a:solidFill>
                   <a:srgbClr val="FF7773"/>
                 </a:solidFill>
                 <a:latin typeface="Arial"/>
               </a:rPr>
-              <a:t>B  ·  false FAIL</a:t>
+              <a:t>AI hears false FAIL</a:t>
             </a:r>
           </a:p>
         </p:txBody>
@@ -13253,8 +10882,8 @@
         </p:nvSpPr>
         <p:spPr>
           <a:xfrm>
-            <a:off x="932688" y="5157216"/>
-            <a:ext cx="10305288" cy="502920"/>
+            <a:off x="914400" y="4718304"/>
+            <a:ext cx="10378440" cy="521207"/>
           </a:xfrm>
           <a:prstGeom prst="rect">
             <a:avLst/>
@@ -13269,20 +10898,20 @@
           <a:p>
             <a:pPr algn="ctr">
               <a:lnSpc>
-                <a:spcPct val="110000"/>
+                <a:spcPct val="108000"/>
               </a:lnSpc>
               <a:spcAft>
                 <a:spcPts val="0"/>
               </a:spcAft>
             </a:pPr>
             <a:r>
-              <a:rPr sz="2000" b="1">
+              <a:rPr sz="2500" b="1">
                 <a:solidFill>
                   <a:srgbClr val="F6F4EF"/>
                 </a:solidFill>
                 <a:latin typeface="Arial"/>
               </a:rPr>
-              <a:t>Compare the later code and whether it keeps the verified finite property.</a:t>
+              <a:t>Does the wrong message make it lose the fix?</a:t>
             </a:r>
           </a:p>
         </p:txBody>
@@ -13295,8 +10924,8 @@
         </p:nvSpPr>
         <p:spPr>
           <a:xfrm>
-            <a:off x="3419856" y="5751576"/>
-            <a:ext cx="5340096" cy="384048"/>
+            <a:off x="2532888" y="5422392"/>
+            <a:ext cx="7132320" cy="448056"/>
           </a:xfrm>
           <a:prstGeom prst="roundRect">
             <a:avLst>
@@ -13340,8 +10969,8 @@
         </p:nvSpPr>
         <p:spPr>
           <a:xfrm>
-            <a:off x="3511296" y="5769864"/>
-            <a:ext cx="5157216" cy="347472"/>
+            <a:off x="2633472" y="5440679"/>
+            <a:ext cx="6931152" cy="411480"/>
           </a:xfrm>
           <a:prstGeom prst="rect">
             <a:avLst/>
@@ -13356,20 +10985,104 @@
           <a:p>
             <a:pPr algn="ctr">
               <a:lnSpc>
-                <a:spcPct val="110000"/>
+                <a:spcPct val="108000"/>
               </a:lnSpc>
               <a:spcAft>
                 <a:spcPts val="0"/>
               </a:spcAft>
             </a:pPr>
             <a:r>
-              <a:rPr sz="1200" b="1">
+              <a:rPr sz="1500" b="1">
                 <a:solidFill>
                   <a:srgbClr val="77A9FF"/>
                 </a:solidFill>
                 <a:latin typeface="Arial"/>
               </a:rPr>
-              <a:t>PLANNED  ·  NO ELIGIBLE MAIN RESULTS YET</a:t>
+              <a:t>PLANNED: this larger test has no results yet.</a:t>
+            </a:r>
+          </a:p>
+        </p:txBody>
+      </p:sp>
+      <p:sp>
+        <p:nvSpPr>
+          <p:cNvPr id="21" name="TextBox 20"/>
+          <p:cNvSpPr txBox="1"/>
+          <p:nvPr/>
+        </p:nvSpPr>
+        <p:spPr>
+          <a:xfrm>
+            <a:off x="941832" y="5989320"/>
+            <a:ext cx="7086600" cy="310896"/>
+          </a:xfrm>
+          <a:prstGeom prst="rect">
+            <a:avLst/>
+          </a:prstGeom>
+          <a:noFill/>
+        </p:spPr>
+        <p:txBody>
+          <a:bodyPr wrap="square" lIns="0" rIns="0" tIns="0" bIns="0" anchor="ctr">
+            <a:spAutoFit/>
+          </a:bodyPr>
+          <a:lstStyle/>
+          <a:p>
+            <a:pPr algn="l">
+              <a:lnSpc>
+                <a:spcPct val="108000"/>
+              </a:lnSpc>
+              <a:spcAft>
+                <a:spcPts val="0"/>
+              </a:spcAft>
+            </a:pPr>
+            <a:r>
+              <a:rPr sz="2000" b="1">
+                <a:solidFill>
+                  <a:srgbClr val="FFC96E"/>
+                </a:solidFill>
+                <a:latin typeface="Arial"/>
+              </a:rPr>
+              <a:t>Before judging the AI, check the grader.</a:t>
+            </a:r>
+          </a:p>
+        </p:txBody>
+      </p:sp>
+      <p:sp>
+        <p:nvSpPr>
+          <p:cNvPr id="22" name="TextBox 21"/>
+          <p:cNvSpPr txBox="1"/>
+          <p:nvPr/>
+        </p:nvSpPr>
+        <p:spPr>
+          <a:xfrm>
+            <a:off x="7799831" y="5989320"/>
+            <a:ext cx="3465576" cy="310896"/>
+          </a:xfrm>
+          <a:prstGeom prst="rect">
+            <a:avLst/>
+          </a:prstGeom>
+          <a:noFill/>
+        </p:spPr>
+        <p:txBody>
+          <a:bodyPr wrap="square" lIns="0" rIns="0" tIns="0" bIns="0" anchor="ctr">
+            <a:spAutoFit/>
+          </a:bodyPr>
+          <a:lstStyle/>
+          <a:p>
+            <a:pPr algn="r">
+              <a:lnSpc>
+                <a:spcPct val="108000"/>
+              </a:lnSpc>
+              <a:spcAft>
+                <a:spcPts val="0"/>
+              </a:spcAft>
+            </a:pPr>
+            <a:r>
+              <a:rPr sz="1350" b="1">
+                <a:solidFill>
+                  <a:srgbClr val="77A9FF"/>
+                </a:solidFill>
+                <a:latin typeface="Arial"/>
+              </a:rPr>
+              <a:t>github.com/Imranqsl212/AiResearch</a:t>
             </a:r>
           </a:p>
         </p:txBody>
